--- a/docs/presentations_files/design-overview/VIA-design-overview-DP41-45.pptx
+++ b/docs/presentations_files/design-overview/VIA-design-overview-DP41-45.pptx
@@ -2,13 +2,13 @@
 <file path=ppt/presentation.xml><?xml version="1.0" encoding="utf-8"?>
 <p:presentation xmlns:p="http://schemas.openxmlformats.org/presentationml/2006/main">
   <p:sldMasterIdLst>
-    <p:sldMasterId xmlns:r="http://schemas.openxmlformats.org/officeDocument/2006/relationships" id="2147483648" r:id="Rf3ab3244cd7f414d"/>
+    <p:sldMasterId xmlns:r="http://schemas.openxmlformats.org/officeDocument/2006/relationships" id="2147483648" r:id="Rb26aa1cf0dfe4521"/>
   </p:sldMasterIdLst>
   <p:notesMasterIdLst>
-    <p:notesMasterId xmlns:r="http://schemas.openxmlformats.org/officeDocument/2006/relationships" r:id="R99c50bece4a1430d"/>
+    <p:notesMasterId xmlns:r="http://schemas.openxmlformats.org/officeDocument/2006/relationships" r:id="R0b020002d82e4f28"/>
   </p:notesMasterIdLst>
   <p:sldIdLst>
-    <p:sldId xmlns:r="http://schemas.openxmlformats.org/officeDocument/2006/relationships" id="256" r:id="R5d3146c2e3cf474a"/>
+    <p:sldId xmlns:r="http://schemas.openxmlformats.org/officeDocument/2006/relationships" id="256" r:id="Re5ee6fdfaa394c00"/>
   </p:sldIdLst>
   <p:sldSz cx="18288000" cy="10287000"/>
   <p:notesSz cx="6858000" cy="9144000"/>
@@ -442,7 +442,7 @@
           <a:lstStyle xmlns:a="http://schemas.openxmlformats.org/drawingml/2006/main"/>
           <a:p xmlns:a="http://schemas.openxmlformats.org/drawingml/2006/main">
             <a:r>
-              <a:t>설계 Overview: VIA overall architecture와 04-41~45의 주요 설계 범위</a:t>
+              <a:t>설계 Overview: VIA 공통 책임과 41 → 44 → 45 → 42의 주요 비교 위치</a:t>
             </a:r>
           </a:p>
           <a:p xmlns:a="http://schemas.openxmlformats.org/drawingml/2006/main">
@@ -482,11 +482,6 @@
           </a:p>
           <a:p xmlns:a="http://schemas.openxmlformats.org/drawingml/2006/main">
             <a:r>
-              <a:t>04-43: Request Interpreter 내부의 F1 의도, F2 지칭, F3 대화/Task 연결, F4 요청 관계, F5 정정 범위, F6 처리 방향의 생산 책임과 조정. A 통합 생산과 C 기능별 생산이다. Request Controller의 채택, Context/Task 원본과 공유 Omni는 공통이다.</a:t>
-            </a:r>
-          </a:p>
-          <a:p xmlns:a="http://schemas.openxmlformats.org/drawingml/2006/main">
-            <a:r>
               <a:t>04-44: Interaction Manager, Request Controller 및 Response Manager를 잇는 후속 실행의 조직. 중앙 비동기 Orchestration/Mediator와 반응형 Dataflow/Pipes-and-Filters다. Task Manager/Agent Gateway의 확인된 질문/결과도 이 흐름에 들어오고 모델 자원은 공통이다. 반응형이 항상 빠르다는 측정 결론은 없다.</a:t>
             </a:r>
           </a:p>
@@ -502,7 +497,17 @@
           </a:p>
           <a:p xmlns:a="http://schemas.openxmlformats.org/drawingml/2006/main">
             <a:r>
-              <a:t>왼쪽 품질 목표는 각 DP 배경의 주된 설계 동기다. 전체 적용 품질을 3개로 제한하지 않으며 각 본문의 V-01~13 검토와 회귀/비용 조건을 유지한다. 구조 비교 후보는 미선정이고 구현/모델 실행/측정은 없다.</a:t>
+              <a:t>품질 목표는 ASR-QA-v6 원본에서 투영한 여섯 ASR-QA다. 정확성, 상호작용 응답시간, VIA 요청 처리시간, 모델 비용, 변경 용이성, 로컬 commit 메모리 순으로 우선한다. 선은 주된 설계 동기의 일부이며 전체 적용성 목록이나 효과 크기, 대안 우열을 뜻하지 않는다. 여섯 품질과 보호 조건은 네 비교에 모두 확인한다.</a:t>
+            </a:r>
+          </a:p>
+          <a:p xmlns:a="http://schemas.openxmlformats.org/drawingml/2006/main">
+            <a:r>
+              <a:t>모델 배치는 04-40 공통 실행 계약을 따른다. VIA와 Request/Task/실제 전달의 권위 상태는 사용자 PC의 로컬 owner가 관리한다. Interaction Manager 내부 Turn-Taking Control의 로컬 VAD가 발화 경계를 제공하고 즉시 재생 중단을 수행한다. Model Access는 클라우드 음성 모델과 별도 의미 LLM의 adapter, session/call, timeout/cancel/usage를 관리한다. 전사 의존성은 공급자별 inventory와 청구 항목으로 확인하며 별도 Streaming ASR을 공통 필수 모델로 확정하지 않는다. 모델 provider/checkpoint의 최종 채택이나 모델 서버 메모리를 로컬 VIA 메모리로 합산하지 않는다.</a:t>
+            </a:r>
+          </a:p>
+          <a:p xmlns:a="http://schemas.openxmlformats.org/drawingml/2006/main">
+            <a:r>
+              <a:t>현재 P21은 21개 사례를 5회 독립 반복하며 모델 비용 목표는 $0.50/P21 이하다. 목표와 점수는 작성자 평가 기준이고 구현/모델 실행/측정 결과가 아니다. 기존 Reference Architecture와 QA catalog 및 ADR는 보존하며 이 발표 그림이 그것들을 일괄 변경하지 않는다.</a:t>
             </a:r>
           </a:p>
           <a:p xmlns:a="http://schemas.openxmlformats.org/drawingml/2006/main">
@@ -512,6 +517,16 @@
           </a:p>
           <a:p xmlns:a="http://schemas.openxmlformats.org/drawingml/2006/main">
             <a:r>
+              <a:t>https://github.com/cbyche/via-sw-architecture/blob/main/docs/architecture/12-decisions/decision-packages/04-40-common-execution-contract.md</a:t>
+            </a:r>
+          </a:p>
+          <a:p xmlns:a="http://schemas.openxmlformats.org/drawingml/2006/main">
+            <a:r>
+              <a:t>https://github.com/cbyche/via-sw-architecture/blob/main/docs/architecture/12-decisions/decision-packages/03-02-quality-attribute-definitions.md</a:t>
+            </a:r>
+          </a:p>
+          <a:p xmlns:a="http://schemas.openxmlformats.org/drawingml/2006/main">
+            <a:r>
               <a:t>https://github.com/cbyche/via-sw-architecture/blob/main/docs/architecture/12-decisions/target-architecture/architecture.md#4-component와-상태-소유권</a:t>
             </a:r>
           </a:p>
@@ -523,11 +538,6 @@
           <a:p xmlns:a="http://schemas.openxmlformats.org/drawingml/2006/main">
             <a:r>
               <a:t>04-42: https://github.com/cbyche/via-sw-architecture/blob/main/docs/architecture/12-decisions/decision-packages/04-42-lifecycle-ownership.md</a:t>
-            </a:r>
-          </a:p>
-          <a:p xmlns:a="http://schemas.openxmlformats.org/drawingml/2006/main">
-            <a:r>
-              <a:t>04-43: https://github.com/cbyche/via-sw-architecture/blob/main/docs/architecture/12-decisions/decision-packages/04-43-request-interpretation.md</a:t>
             </a:r>
           </a:p>
           <a:p xmlns:a="http://schemas.openxmlformats.org/drawingml/2006/main">
@@ -605,7 +615,7 @@
   </p:cSld>
   <p:clrMap bg1="lt1" tx1="dk1" bg2="lt2" tx2="dk2" accent1="accent1" accent2="accent2" accent3="accent3" accent4="accent4" accent5="accent5" accent6="accent6" hlink="hlink" folHlink="folHlink"/>
   <p:sldLayoutIdLst>
-    <p:sldLayoutId xmlns:r="http://schemas.openxmlformats.org/officeDocument/2006/relationships" id="2147483649" r:id="Rc7f0fa929f7247fa"/>
+    <p:sldLayoutId xmlns:r="http://schemas.openxmlformats.org/officeDocument/2006/relationships" id="2147483649" r:id="R4e847fe89cb840f6"/>
   </p:sldLayoutIdLst>
   <p:txStyles>
     <p:titleStyle>
@@ -1153,10 +1163,10 @@
       </p:grpSpPr>
       <p:sp>
         <p:nvSpPr>
-          <p:cNvPr id="120" name="overview-title">
-            <a:extLst xmlns:a="http://schemas.openxmlformats.org/drawingml/2006/main">
-              <a:ext uri="{FF2B5EF4-FFF2-40B4-BE49-F238E27FC236}">
-                <a16:creationId xmlns:a16="http://schemas.microsoft.com/office/drawing/2014/main" id="{F6676593-2C10-4614-9D11-3B92B920EADA}"/>
+          <p:cNvPr id="129" name="overview-title">
+            <a:extLst xmlns:a="http://schemas.openxmlformats.org/drawingml/2006/main">
+              <a:ext uri="{FF2B5EF4-FFF2-40B4-BE49-F238E27FC236}">
+                <a16:creationId xmlns:a16="http://schemas.microsoft.com/office/drawing/2014/main" id="{3FA9B9E0-1721-440B-B414-98E51D89BDE8}"/>
               </a:ext>
             </a:extLst>
           </p:cNvPr>
@@ -1214,7 +1224,7 @@
           <p:cNvPr id="2" name="overview-step-0">
             <a:extLst xmlns:a="http://schemas.openxmlformats.org/drawingml/2006/main">
               <a:ext uri="{FF2B5EF4-FFF2-40B4-BE49-F238E27FC236}">
-                <a16:creationId xmlns:a16="http://schemas.microsoft.com/office/drawing/2014/main" id="{B6BF91A6-D044-43BF-BCE1-32D6AC88A093}"/>
+                <a16:creationId xmlns:a16="http://schemas.microsoft.com/office/drawing/2014/main" id="{5D2C6240-291B-463B-B74F-9D4C53059BC2}"/>
               </a:ext>
             </a:extLst>
           </p:cNvPr>
@@ -1266,7 +1276,7 @@
           <p:cNvPr id="3" name="overview-step-label-0">
             <a:extLst xmlns:a="http://schemas.openxmlformats.org/drawingml/2006/main">
               <a:ext uri="{FF2B5EF4-FFF2-40B4-BE49-F238E27FC236}">
-                <a16:creationId xmlns:a16="http://schemas.microsoft.com/office/drawing/2014/main" id="{D7A394C8-99BD-4044-9850-A25F0E04CF93}"/>
+                <a16:creationId xmlns:a16="http://schemas.microsoft.com/office/drawing/2014/main" id="{FBA08701-9047-4A3A-8332-AFBAB7D43ECD}"/>
               </a:ext>
             </a:extLst>
           </p:cNvPr>
@@ -1324,7 +1334,7 @@
           <p:cNvPr id="4" name="overview-step-1">
             <a:extLst xmlns:a="http://schemas.openxmlformats.org/drawingml/2006/main">
               <a:ext uri="{FF2B5EF4-FFF2-40B4-BE49-F238E27FC236}">
-                <a16:creationId xmlns:a16="http://schemas.microsoft.com/office/drawing/2014/main" id="{E8E7E136-423C-47FF-AFDA-FA2DCC793DCC}"/>
+                <a16:creationId xmlns:a16="http://schemas.microsoft.com/office/drawing/2014/main" id="{7F812109-A2ED-4705-90C6-57E5683CB498}"/>
               </a:ext>
             </a:extLst>
           </p:cNvPr>
@@ -1379,7 +1389,7 @@
           <p:cNvPr id="5" name="overview-step-label-1">
             <a:extLst xmlns:a="http://schemas.openxmlformats.org/drawingml/2006/main">
               <a:ext uri="{FF2B5EF4-FFF2-40B4-BE49-F238E27FC236}">
-                <a16:creationId xmlns:a16="http://schemas.microsoft.com/office/drawing/2014/main" id="{F4F4464A-4402-4378-9F27-477643274909}"/>
+                <a16:creationId xmlns:a16="http://schemas.microsoft.com/office/drawing/2014/main" id="{E1774CA4-3A78-4AD3-B8C6-82F52180399B}"/>
               </a:ext>
             </a:extLst>
           </p:cNvPr>
@@ -1437,7 +1447,7 @@
           <p:cNvPr id="6" name="overview-step-2">
             <a:extLst xmlns:a="http://schemas.openxmlformats.org/drawingml/2006/main">
               <a:ext uri="{FF2B5EF4-FFF2-40B4-BE49-F238E27FC236}">
-                <a16:creationId xmlns:a16="http://schemas.microsoft.com/office/drawing/2014/main" id="{284DDAF0-ED81-400A-928E-411F50131E9F}"/>
+                <a16:creationId xmlns:a16="http://schemas.microsoft.com/office/drawing/2014/main" id="{E71D2F5C-FEEF-4FB5-BE94-3CBAE5FDFF8D}"/>
               </a:ext>
             </a:extLst>
           </p:cNvPr>
@@ -1492,7 +1502,7 @@
           <p:cNvPr id="7" name="overview-step-label-2">
             <a:extLst xmlns:a="http://schemas.openxmlformats.org/drawingml/2006/main">
               <a:ext uri="{FF2B5EF4-FFF2-40B4-BE49-F238E27FC236}">
-                <a16:creationId xmlns:a16="http://schemas.microsoft.com/office/drawing/2014/main" id="{99894498-9D3F-4FF3-8EFC-195967B63EB6}"/>
+                <a16:creationId xmlns:a16="http://schemas.microsoft.com/office/drawing/2014/main" id="{C0026E30-CF2D-4517-916D-EA0847A5D744}"/>
               </a:ext>
             </a:extLst>
           </p:cNvPr>
@@ -1550,7 +1560,7 @@
           <p:cNvPr id="8" name="overview-step-3">
             <a:extLst xmlns:a="http://schemas.openxmlformats.org/drawingml/2006/main">
               <a:ext uri="{FF2B5EF4-FFF2-40B4-BE49-F238E27FC236}">
-                <a16:creationId xmlns:a16="http://schemas.microsoft.com/office/drawing/2014/main" id="{51EC3765-5E9F-4FB8-B327-FFC17A0EE482}"/>
+                <a16:creationId xmlns:a16="http://schemas.microsoft.com/office/drawing/2014/main" id="{1778232F-241B-45F6-BBC9-98DA0627FFAB}"/>
               </a:ext>
             </a:extLst>
           </p:cNvPr>
@@ -1605,7 +1615,7 @@
           <p:cNvPr id="9" name="overview-step-label-3">
             <a:extLst xmlns:a="http://schemas.openxmlformats.org/drawingml/2006/main">
               <a:ext uri="{FF2B5EF4-FFF2-40B4-BE49-F238E27FC236}">
-                <a16:creationId xmlns:a16="http://schemas.microsoft.com/office/drawing/2014/main" id="{D2470542-F802-46FC-A233-7FCAC659A081}"/>
+                <a16:creationId xmlns:a16="http://schemas.microsoft.com/office/drawing/2014/main" id="{4733DE92-EA7E-4D20-A6B5-D0BEE3E3AF28}"/>
               </a:ext>
             </a:extLst>
           </p:cNvPr>
@@ -1663,7 +1673,7 @@
           <p:cNvPr id="10" name="overview-step-4">
             <a:extLst xmlns:a="http://schemas.openxmlformats.org/drawingml/2006/main">
               <a:ext uri="{FF2B5EF4-FFF2-40B4-BE49-F238E27FC236}">
-                <a16:creationId xmlns:a16="http://schemas.microsoft.com/office/drawing/2014/main" id="{78166B5C-E38E-4F05-B0A0-2882CCB762B9}"/>
+                <a16:creationId xmlns:a16="http://schemas.microsoft.com/office/drawing/2014/main" id="{CF850C3C-2294-4B70-9961-8E240595230D}"/>
               </a:ext>
             </a:extLst>
           </p:cNvPr>
@@ -1718,7 +1728,7 @@
           <p:cNvPr id="11" name="overview-step-label-4">
             <a:extLst xmlns:a="http://schemas.openxmlformats.org/drawingml/2006/main">
               <a:ext uri="{FF2B5EF4-FFF2-40B4-BE49-F238E27FC236}">
-                <a16:creationId xmlns:a16="http://schemas.microsoft.com/office/drawing/2014/main" id="{252D2759-9423-4D4B-B43E-17D017211182}"/>
+                <a16:creationId xmlns:a16="http://schemas.microsoft.com/office/drawing/2014/main" id="{FD3E9190-E72A-4E7F-AF59-74AE2F0C60E2}"/>
               </a:ext>
             </a:extLst>
           </p:cNvPr>
@@ -1776,7 +1786,7 @@
           <p:cNvPr id="12" name="overview-header-rule">
             <a:extLst xmlns:a="http://schemas.openxmlformats.org/drawingml/2006/main">
               <a:ext uri="{FF2B5EF4-FFF2-40B4-BE49-F238E27FC236}">
-                <a16:creationId xmlns:a16="http://schemas.microsoft.com/office/drawing/2014/main" id="{9B9BE56E-7A6B-4AE3-9827-B05E441ED4F9}"/>
+                <a16:creationId xmlns:a16="http://schemas.microsoft.com/office/drawing/2014/main" id="{C6FAA2DD-FEF1-4097-9C91-131E4BE11434}"/>
               </a:ext>
             </a:extLst>
           </p:cNvPr>
@@ -1816,7 +1826,7 @@
           <p:cNvPr id="13" name="overview-left-heading">
             <a:extLst xmlns:a="http://schemas.openxmlformats.org/drawingml/2006/main">
               <a:ext uri="{FF2B5EF4-FFF2-40B4-BE49-F238E27FC236}">
-                <a16:creationId xmlns:a16="http://schemas.microsoft.com/office/drawing/2014/main" id="{A031AC41-76AF-4098-9EBF-2A99A6BB15CE}"/>
+                <a16:creationId xmlns:a16="http://schemas.microsoft.com/office/drawing/2014/main" id="{B1FA0C3E-E018-4953-854E-03F4CFA7E889}"/>
               </a:ext>
             </a:extLst>
           </p:cNvPr>
@@ -1864,44 +1874,102 @@
                 <a:ea typeface="Apple SD Gothic Neo"/>
                 <a:cs typeface="Apple SD Gothic Neo"/>
               </a:rPr>
-              <a:t>품질 목표와 주요 설계 결정</a:t>
+              <a:t>품질 목표와 주요 설계 질문</a:t>
             </a:r>
           </a:p>
         </p:txBody>
       </p:sp>
       <p:sp>
         <p:nvSpPr>
-          <p:cNvPr id="14" name="overview-goal-41">
-            <a:extLst xmlns:a="http://schemas.openxmlformats.org/drawingml/2006/main">
-              <a:ext uri="{FF2B5EF4-FFF2-40B4-BE49-F238E27FC236}">
-                <a16:creationId xmlns:a16="http://schemas.microsoft.com/office/drawing/2014/main" id="{24028A3F-2752-4F3D-9384-5F0EF1290299}"/>
-              </a:ext>
-            </a:extLst>
-          </p:cNvPr>
-          <p:cNvSpPr>
-            <a:spLocks xmlns:a="http://schemas.openxmlformats.org/drawingml/2006/main" noGrp="1"/>
-          </p:cNvSpPr>
-          <p:nvPr/>
-        </p:nvSpPr>
-        <p:spPr>
-          <a:xfrm xmlns:a="http://schemas.openxmlformats.org/drawingml/2006/main">
-            <a:off x="2743200" y="2686050"/>
-            <a:ext cx="533400" cy="1095375"/>
+          <p:cNvPr id="14" name="overview-quality-contract">
+            <a:extLst xmlns:a="http://schemas.openxmlformats.org/drawingml/2006/main">
+              <a:ext uri="{FF2B5EF4-FFF2-40B4-BE49-F238E27FC236}">
+                <a16:creationId xmlns:a16="http://schemas.microsoft.com/office/drawing/2014/main" id="{6F52088C-2D65-4F63-8B41-AC849B3D4C0C}"/>
+              </a:ext>
+            </a:extLst>
+          </p:cNvPr>
+          <p:cNvSpPr>
+            <a:spLocks xmlns:a="http://schemas.openxmlformats.org/drawingml/2006/main" noGrp="1"/>
+          </p:cNvSpPr>
+          <p:nvPr/>
+        </p:nvSpPr>
+        <p:spPr>
+          <a:xfrm xmlns:a="http://schemas.openxmlformats.org/drawingml/2006/main">
+            <a:off x="495300" y="2057400"/>
+            <a:ext cx="7429500" cy="285750"/>
+          </a:xfrm>
+          <a:prstGeom xmlns:a="http://schemas.openxmlformats.org/drawingml/2006/main" prst="rect">
+            <a:avLst/>
+          </a:prstGeom>
+          <a:noFill xmlns:a="http://schemas.openxmlformats.org/drawingml/2006/main"/>
+          <a:ln xmlns:a="http://schemas.openxmlformats.org/drawingml/2006/main" w="0">
+            <a:noFill/>
+            <a:prstDash val="solid"/>
+          </a:ln>
+        </p:spPr>
+        <p:txBody>
+          <a:bodyPr xmlns:a="http://schemas.openxmlformats.org/drawingml/2006/main" wrap="none" lIns="0" tIns="0" rIns="0" bIns="0" anchor="ctr">
+            <a:noAutofit/>
+          </a:bodyPr>
+          <a:lstStyle xmlns:a="http://schemas.openxmlformats.org/drawingml/2006/main"/>
+          <a:p xmlns:a="http://schemas.openxmlformats.org/drawingml/2006/main">
+            <a:pPr algn="l">
+              <a:defRPr sz="1650" b="0">
+                <a:solidFill>
+                  <a:srgbClr val="59616B"/>
+                </a:solidFill>
+                <a:latin typeface="Apple SD Gothic Neo"/>
+                <a:ea typeface="Apple SD Gothic Neo"/>
+                <a:cs typeface="Apple SD Gothic Neo"/>
+              </a:defRPr>
+            </a:pPr>
+            <a:r>
+              <a:rPr sz="1650" b="0">
+                <a:solidFill>
+                  <a:srgbClr val="59616B"/>
+                </a:solidFill>
+                <a:latin typeface="Apple SD Gothic Neo"/>
+                <a:ea typeface="Apple SD Gothic Neo"/>
+                <a:cs typeface="Apple SD Gothic Neo"/>
+              </a:rPr>
+              <a:t>ASR-QA-v6 / 번호순 우선순위</a:t>
+            </a:r>
+          </a:p>
+        </p:txBody>
+      </p:sp>
+      <p:sp>
+        <p:nvSpPr>
+          <p:cNvPr id="15" name="overview-goal-1-41">
+            <a:extLst xmlns:a="http://schemas.openxmlformats.org/drawingml/2006/main">
+              <a:ext uri="{FF2B5EF4-FFF2-40B4-BE49-F238E27FC236}">
+                <a16:creationId xmlns:a16="http://schemas.microsoft.com/office/drawing/2014/main" id="{48048AF6-B46C-4AC6-A145-98ACCAEA01DA}"/>
+              </a:ext>
+            </a:extLst>
+          </p:cNvPr>
+          <p:cNvSpPr>
+            <a:spLocks xmlns:a="http://schemas.openxmlformats.org/drawingml/2006/main" noGrp="1"/>
+          </p:cNvSpPr>
+          <p:nvPr/>
+        </p:nvSpPr>
+        <p:spPr>
+          <a:xfrm xmlns:a="http://schemas.openxmlformats.org/drawingml/2006/main">
+            <a:off x="3238500" y="2686050"/>
+            <a:ext cx="257175" cy="104775"/>
           </a:xfrm>
           <a:custGeom xmlns:a="http://schemas.openxmlformats.org/drawingml/2006/main">
             <a:pathLst>
-              <a:path w="533400" h="1095375">
+              <a:path w="257175" h="104775">
                 <a:moveTo>
-                  <a:pt x="0" y="1095375"/>
+                  <a:pt x="0" y="104775"/>
                 </a:moveTo>
                 <a:lnTo>
-                  <a:pt x="533400" y="0"/>
+                  <a:pt x="257175" y="0"/>
                 </a:lnTo>
               </a:path>
             </a:pathLst>
           </a:custGeom>
           <a:noFill xmlns:a="http://schemas.openxmlformats.org/drawingml/2006/main"/>
-          <a:ln xmlns:a="http://schemas.openxmlformats.org/drawingml/2006/main" w="33338">
+          <a:ln xmlns:a="http://schemas.openxmlformats.org/drawingml/2006/main" w="24765">
             <a:solidFill>
               <a:srgbClr val="E5A700"/>
             </a:solidFill>
@@ -1911,77 +1979,37 @@
       </p:sp>
       <p:sp>
         <p:nvSpPr>
-          <p:cNvPr id="15" name="overview-goal-43">
-            <a:extLst xmlns:a="http://schemas.openxmlformats.org/drawingml/2006/main">
-              <a:ext uri="{FF2B5EF4-FFF2-40B4-BE49-F238E27FC236}">
-                <a16:creationId xmlns:a16="http://schemas.microsoft.com/office/drawing/2014/main" id="{14D037F6-DC8E-4D0E-B4B6-9A94510B89B1}"/>
-              </a:ext>
-            </a:extLst>
-          </p:cNvPr>
-          <p:cNvSpPr>
-            <a:spLocks xmlns:a="http://schemas.openxmlformats.org/drawingml/2006/main" noGrp="1"/>
-          </p:cNvSpPr>
-          <p:nvPr/>
-        </p:nvSpPr>
-        <p:spPr>
-          <a:xfrm xmlns:a="http://schemas.openxmlformats.org/drawingml/2006/main">
-            <a:off x="2743200" y="3762375"/>
-            <a:ext cx="533400" cy="19050"/>
+          <p:cNvPr id="16" name="overview-goal-1-45">
+            <a:extLst xmlns:a="http://schemas.openxmlformats.org/drawingml/2006/main">
+              <a:ext uri="{FF2B5EF4-FFF2-40B4-BE49-F238E27FC236}">
+                <a16:creationId xmlns:a16="http://schemas.microsoft.com/office/drawing/2014/main" id="{B85A7F82-6AB9-4A6F-A70F-F75BA6FACF82}"/>
+              </a:ext>
+            </a:extLst>
+          </p:cNvPr>
+          <p:cNvSpPr>
+            <a:spLocks xmlns:a="http://schemas.openxmlformats.org/drawingml/2006/main" noGrp="1"/>
+          </p:cNvSpPr>
+          <p:nvPr/>
+        </p:nvSpPr>
+        <p:spPr>
+          <a:xfrm xmlns:a="http://schemas.openxmlformats.org/drawingml/2006/main">
+            <a:off x="3238500" y="2790825"/>
+            <a:ext cx="257175" cy="3133725"/>
           </a:xfrm>
           <a:custGeom xmlns:a="http://schemas.openxmlformats.org/drawingml/2006/main">
             <a:pathLst>
-              <a:path w="533400" h="19050">
+              <a:path w="257175" h="3133725">
                 <a:moveTo>
-                  <a:pt x="0" y="19050"/>
+                  <a:pt x="0" y="0"/>
                 </a:moveTo>
                 <a:lnTo>
-                  <a:pt x="533400" y="0"/>
+                  <a:pt x="257175" y="3133725"/>
                 </a:lnTo>
               </a:path>
             </a:pathLst>
           </a:custGeom>
           <a:noFill xmlns:a="http://schemas.openxmlformats.org/drawingml/2006/main"/>
-          <a:ln xmlns:a="http://schemas.openxmlformats.org/drawingml/2006/main" w="33338">
-            <a:solidFill>
-              <a:srgbClr val="E73338"/>
-            </a:solidFill>
-            <a:prstDash val="solid"/>
-          </a:ln>
-        </p:spPr>
-      </p:sp>
-      <p:sp>
-        <p:nvSpPr>
-          <p:cNvPr id="16" name="overview-goal-45">
-            <a:extLst xmlns:a="http://schemas.openxmlformats.org/drawingml/2006/main">
-              <a:ext uri="{FF2B5EF4-FFF2-40B4-BE49-F238E27FC236}">
-                <a16:creationId xmlns:a16="http://schemas.microsoft.com/office/drawing/2014/main" id="{3F0DF884-D9F2-4D6D-B16A-187EB1D0B00F}"/>
-              </a:ext>
-            </a:extLst>
-          </p:cNvPr>
-          <p:cNvSpPr>
-            <a:spLocks xmlns:a="http://schemas.openxmlformats.org/drawingml/2006/main" noGrp="1"/>
-          </p:cNvSpPr>
-          <p:nvPr/>
-        </p:nvSpPr>
-        <p:spPr>
-          <a:xfrm xmlns:a="http://schemas.openxmlformats.org/drawingml/2006/main">
-            <a:off x="2743200" y="3781425"/>
-            <a:ext cx="533400" cy="1057275"/>
-          </a:xfrm>
-          <a:custGeom xmlns:a="http://schemas.openxmlformats.org/drawingml/2006/main">
-            <a:pathLst>
-              <a:path w="533400" h="1057275">
-                <a:moveTo>
-                  <a:pt x="0" y="0"/>
-                </a:moveTo>
-                <a:lnTo>
-                  <a:pt x="533400" y="1057275"/>
-                </a:lnTo>
-              </a:path>
-            </a:pathLst>
-          </a:custGeom>
-          <a:noFill xmlns:a="http://schemas.openxmlformats.org/drawingml/2006/main"/>
-          <a:ln xmlns:a="http://schemas.openxmlformats.org/drawingml/2006/main" w="33338">
+          <a:ln xmlns:a="http://schemas.openxmlformats.org/drawingml/2006/main" w="24765">
             <a:solidFill>
               <a:srgbClr val="8D49B8"/>
             </a:solidFill>
@@ -1991,22 +2019,22 @@
       </p:sp>
       <p:sp>
         <p:nvSpPr>
-          <p:cNvPr id="17" name="overview-goal-기능 정확성">
-            <a:extLst xmlns:a="http://schemas.openxmlformats.org/drawingml/2006/main">
-              <a:ext uri="{FF2B5EF4-FFF2-40B4-BE49-F238E27FC236}">
-                <a16:creationId xmlns:a16="http://schemas.microsoft.com/office/drawing/2014/main" id="{9624A6FB-D405-49A7-B36D-EBC26DC68C30}"/>
-              </a:ext>
-            </a:extLst>
-          </p:cNvPr>
-          <p:cNvSpPr>
-            <a:spLocks xmlns:a="http://schemas.openxmlformats.org/drawingml/2006/main" noGrp="1"/>
-          </p:cNvSpPr>
-          <p:nvPr/>
-        </p:nvSpPr>
-        <p:spPr>
-          <a:xfrm xmlns:a="http://schemas.openxmlformats.org/drawingml/2006/main">
-            <a:off x="495300" y="3409950"/>
-            <a:ext cx="2247900" cy="742950"/>
+          <p:cNvPr id="17" name="overview-goal-ASR-QA-01">
+            <a:extLst xmlns:a="http://schemas.openxmlformats.org/drawingml/2006/main">
+              <a:ext uri="{FF2B5EF4-FFF2-40B4-BE49-F238E27FC236}">
+                <a16:creationId xmlns:a16="http://schemas.microsoft.com/office/drawing/2014/main" id="{C40B0269-1EE0-45CA-9A6A-AADAF6EF1E0F}"/>
+              </a:ext>
+            </a:extLst>
+          </p:cNvPr>
+          <p:cNvSpPr>
+            <a:spLocks xmlns:a="http://schemas.openxmlformats.org/drawingml/2006/main" noGrp="1"/>
+          </p:cNvSpPr>
+          <p:nvPr/>
+        </p:nvSpPr>
+        <p:spPr>
+          <a:xfrm xmlns:a="http://schemas.openxmlformats.org/drawingml/2006/main">
+            <a:off x="495300" y="2409825"/>
+            <a:ext cx="2743200" cy="771525"/>
           </a:xfrm>
           <a:prstGeom xmlns:a="http://schemas.openxmlformats.org/drawingml/2006/main" prst="rect">
             <a:avLst/>
@@ -2024,22 +2052,22 @@
       </p:sp>
       <p:sp>
         <p:nvSpPr>
-          <p:cNvPr id="18" name="overview-goal-name-기능 정확성">
-            <a:extLst xmlns:a="http://schemas.openxmlformats.org/drawingml/2006/main">
-              <a:ext uri="{FF2B5EF4-FFF2-40B4-BE49-F238E27FC236}">
-                <a16:creationId xmlns:a16="http://schemas.microsoft.com/office/drawing/2014/main" id="{CF580015-B494-4718-802A-B857E7D20324}"/>
-              </a:ext>
-            </a:extLst>
-          </p:cNvPr>
-          <p:cNvSpPr>
-            <a:spLocks xmlns:a="http://schemas.openxmlformats.org/drawingml/2006/main" noGrp="1"/>
-          </p:cNvSpPr>
-          <p:nvPr/>
-        </p:nvSpPr>
-        <p:spPr>
-          <a:xfrm xmlns:a="http://schemas.openxmlformats.org/drawingml/2006/main">
-            <a:off x="542925" y="3409950"/>
-            <a:ext cx="2152650" cy="742950"/>
+          <p:cNvPr id="18" name="overview-goal-name-ASR-QA-01">
+            <a:extLst xmlns:a="http://schemas.openxmlformats.org/drawingml/2006/main">
+              <a:ext uri="{FF2B5EF4-FFF2-40B4-BE49-F238E27FC236}">
+                <a16:creationId xmlns:a16="http://schemas.microsoft.com/office/drawing/2014/main" id="{33A893EF-0B93-4ED0-86C7-D8266512AF2C}"/>
+              </a:ext>
+            </a:extLst>
+          </p:cNvPr>
+          <p:cNvSpPr>
+            <a:spLocks xmlns:a="http://schemas.openxmlformats.org/drawingml/2006/main" noGrp="1"/>
+          </p:cNvSpPr>
+          <p:nvPr/>
+        </p:nvSpPr>
+        <p:spPr>
+          <a:xfrm xmlns:a="http://schemas.openxmlformats.org/drawingml/2006/main">
+            <a:off x="581025" y="2457450"/>
+            <a:ext cx="2571750" cy="342900"/>
           </a:xfrm>
           <a:prstGeom xmlns:a="http://schemas.openxmlformats.org/drawingml/2006/main" prst="rect">
             <a:avLst/>
@@ -2057,7 +2085,7 @@
           <a:lstStyle xmlns:a="http://schemas.openxmlformats.org/drawingml/2006/main"/>
           <a:p xmlns:a="http://schemas.openxmlformats.org/drawingml/2006/main">
             <a:pPr algn="ctr">
-              <a:defRPr sz="2475" b="1">
+              <a:defRPr sz="1800" b="1">
                 <a:solidFill>
                   <a:srgbClr val="FFFFFF"/>
                 </a:solidFill>
@@ -2067,7 +2095,7 @@
               </a:defRPr>
             </a:pPr>
             <a:r>
-              <a:rPr sz="2475" b="1">
+              <a:rPr sz="1800" b="1">
                 <a:solidFill>
                   <a:srgbClr val="FFFFFF"/>
                 </a:solidFill>
@@ -2075,44 +2103,102 @@
                 <a:ea typeface="Apple SD Gothic Neo"/>
                 <a:cs typeface="Apple SD Gothic Neo"/>
               </a:rPr>
-              <a:t>기능 정확성</a:t>
+              <a:t>01 요청 처리 정확성</a:t>
             </a:r>
           </a:p>
         </p:txBody>
       </p:sp>
       <p:sp>
         <p:nvSpPr>
-          <p:cNvPr id="19" name="overview-goal-44">
-            <a:extLst xmlns:a="http://schemas.openxmlformats.org/drawingml/2006/main">
-              <a:ext uri="{FF2B5EF4-FFF2-40B4-BE49-F238E27FC236}">
-                <a16:creationId xmlns:a16="http://schemas.microsoft.com/office/drawing/2014/main" id="{A34161F5-DB52-4009-8B4A-D30EB9CC0F81}"/>
-              </a:ext>
-            </a:extLst>
-          </p:cNvPr>
-          <p:cNvSpPr>
-            <a:spLocks xmlns:a="http://schemas.openxmlformats.org/drawingml/2006/main" noGrp="1"/>
-          </p:cNvSpPr>
-          <p:nvPr/>
-        </p:nvSpPr>
-        <p:spPr>
-          <a:xfrm xmlns:a="http://schemas.openxmlformats.org/drawingml/2006/main">
-            <a:off x="2743200" y="6000750"/>
-            <a:ext cx="533400" cy="953"/>
+          <p:cNvPr id="19" name="overview-goal-target-ASR-QA-01">
+            <a:extLst xmlns:a="http://schemas.openxmlformats.org/drawingml/2006/main">
+              <a:ext uri="{FF2B5EF4-FFF2-40B4-BE49-F238E27FC236}">
+                <a16:creationId xmlns:a16="http://schemas.microsoft.com/office/drawing/2014/main" id="{786B7EAC-9562-4918-B9B6-1D0F83B8F30F}"/>
+              </a:ext>
+            </a:extLst>
+          </p:cNvPr>
+          <p:cNvSpPr>
+            <a:spLocks xmlns:a="http://schemas.openxmlformats.org/drawingml/2006/main" noGrp="1"/>
+          </p:cNvSpPr>
+          <p:nvPr/>
+        </p:nvSpPr>
+        <p:spPr>
+          <a:xfrm xmlns:a="http://schemas.openxmlformats.org/drawingml/2006/main">
+            <a:off x="552450" y="2809875"/>
+            <a:ext cx="2628900" cy="295275"/>
+          </a:xfrm>
+          <a:prstGeom xmlns:a="http://schemas.openxmlformats.org/drawingml/2006/main" prst="rect">
+            <a:avLst/>
+          </a:prstGeom>
+          <a:noFill xmlns:a="http://schemas.openxmlformats.org/drawingml/2006/main"/>
+          <a:ln xmlns:a="http://schemas.openxmlformats.org/drawingml/2006/main" w="0">
+            <a:noFill/>
+            <a:prstDash val="solid"/>
+          </a:ln>
+        </p:spPr>
+        <p:txBody>
+          <a:bodyPr xmlns:a="http://schemas.openxmlformats.org/drawingml/2006/main" wrap="none" lIns="0" tIns="0" rIns="0" bIns="0" anchor="ctr">
+            <a:noAutofit/>
+          </a:bodyPr>
+          <a:lstStyle xmlns:a="http://schemas.openxmlformats.org/drawingml/2006/main"/>
+          <a:p xmlns:a="http://schemas.openxmlformats.org/drawingml/2006/main">
+            <a:pPr algn="ctr">
+              <a:defRPr sz="1650" b="0">
+                <a:solidFill>
+                  <a:srgbClr val="FFFFFF"/>
+                </a:solidFill>
+                <a:latin typeface="Apple SD Gothic Neo"/>
+                <a:ea typeface="Apple SD Gothic Neo"/>
+                <a:cs typeface="Apple SD Gothic Neo"/>
+              </a:defRPr>
+            </a:pPr>
+            <a:r>
+              <a:rPr sz="1650" b="0">
+                <a:solidFill>
+                  <a:srgbClr val="FFFFFF"/>
+                </a:solidFill>
+                <a:latin typeface="Apple SD Gothic Neo"/>
+                <a:ea typeface="Apple SD Gothic Neo"/>
+                <a:cs typeface="Apple SD Gothic Neo"/>
+              </a:rPr>
+              <a:t>98% 이상</a:t>
+            </a:r>
+          </a:p>
+        </p:txBody>
+      </p:sp>
+      <p:sp>
+        <p:nvSpPr>
+          <p:cNvPr id="20" name="overview-goal-2-44">
+            <a:extLst xmlns:a="http://schemas.openxmlformats.org/drawingml/2006/main">
+              <a:ext uri="{FF2B5EF4-FFF2-40B4-BE49-F238E27FC236}">
+                <a16:creationId xmlns:a16="http://schemas.microsoft.com/office/drawing/2014/main" id="{3EA41C85-312E-49A5-9884-0AB37F3DFE83}"/>
+              </a:ext>
+            </a:extLst>
+          </p:cNvPr>
+          <p:cNvSpPr>
+            <a:spLocks xmlns:a="http://schemas.openxmlformats.org/drawingml/2006/main" noGrp="1"/>
+          </p:cNvSpPr>
+          <p:nvPr/>
+        </p:nvSpPr>
+        <p:spPr>
+          <a:xfrm xmlns:a="http://schemas.openxmlformats.org/drawingml/2006/main">
+            <a:off x="3238500" y="3714750"/>
+            <a:ext cx="257175" cy="590550"/>
           </a:xfrm>
           <a:custGeom xmlns:a="http://schemas.openxmlformats.org/drawingml/2006/main">
             <a:pathLst>
-              <a:path w="533400" h="953">
+              <a:path w="257175" h="590550">
                 <a:moveTo>
                   <a:pt x="0" y="0"/>
                 </a:moveTo>
                 <a:lnTo>
-                  <a:pt x="533400" y="0"/>
+                  <a:pt x="257175" y="590550"/>
                 </a:lnTo>
               </a:path>
             </a:pathLst>
           </a:custGeom>
           <a:noFill xmlns:a="http://schemas.openxmlformats.org/drawingml/2006/main"/>
-          <a:ln xmlns:a="http://schemas.openxmlformats.org/drawingml/2006/main" w="33338">
+          <a:ln xmlns:a="http://schemas.openxmlformats.org/drawingml/2006/main" w="24765">
             <a:solidFill>
               <a:srgbClr val="00A65A"/>
             </a:solidFill>
@@ -2122,22 +2208,22 @@
       </p:sp>
       <p:sp>
         <p:nvSpPr>
-          <p:cNvPr id="20" name="overview-goal-반응성">
-            <a:extLst xmlns:a="http://schemas.openxmlformats.org/drawingml/2006/main">
-              <a:ext uri="{FF2B5EF4-FFF2-40B4-BE49-F238E27FC236}">
-                <a16:creationId xmlns:a16="http://schemas.microsoft.com/office/drawing/2014/main" id="{2C1EF522-F788-4FB5-BBEB-A6D466E2E87B}"/>
-              </a:ext>
-            </a:extLst>
-          </p:cNvPr>
-          <p:cNvSpPr>
-            <a:spLocks xmlns:a="http://schemas.openxmlformats.org/drawingml/2006/main" noGrp="1"/>
-          </p:cNvSpPr>
-          <p:nvPr/>
-        </p:nvSpPr>
-        <p:spPr>
-          <a:xfrm xmlns:a="http://schemas.openxmlformats.org/drawingml/2006/main">
-            <a:off x="495300" y="5629275"/>
-            <a:ext cx="2247900" cy="742950"/>
+          <p:cNvPr id="21" name="overview-goal-ASR-QA-02">
+            <a:extLst xmlns:a="http://schemas.openxmlformats.org/drawingml/2006/main">
+              <a:ext uri="{FF2B5EF4-FFF2-40B4-BE49-F238E27FC236}">
+                <a16:creationId xmlns:a16="http://schemas.microsoft.com/office/drawing/2014/main" id="{47DE8FFE-70BC-4BE8-A3BD-98E8EC716A87}"/>
+              </a:ext>
+            </a:extLst>
+          </p:cNvPr>
+          <p:cNvSpPr>
+            <a:spLocks xmlns:a="http://schemas.openxmlformats.org/drawingml/2006/main" noGrp="1"/>
+          </p:cNvSpPr>
+          <p:nvPr/>
+        </p:nvSpPr>
+        <p:spPr>
+          <a:xfrm xmlns:a="http://schemas.openxmlformats.org/drawingml/2006/main">
+            <a:off x="495300" y="3333750"/>
+            <a:ext cx="2743200" cy="771525"/>
           </a:xfrm>
           <a:prstGeom xmlns:a="http://schemas.openxmlformats.org/drawingml/2006/main" prst="rect">
             <a:avLst/>
@@ -2155,22 +2241,22 @@
       </p:sp>
       <p:sp>
         <p:nvSpPr>
-          <p:cNvPr id="21" name="overview-goal-name-반응성">
-            <a:extLst xmlns:a="http://schemas.openxmlformats.org/drawingml/2006/main">
-              <a:ext uri="{FF2B5EF4-FFF2-40B4-BE49-F238E27FC236}">
-                <a16:creationId xmlns:a16="http://schemas.microsoft.com/office/drawing/2014/main" id="{F6B75F18-120B-4985-AA6C-5A00831684CF}"/>
-              </a:ext>
-            </a:extLst>
-          </p:cNvPr>
-          <p:cNvSpPr>
-            <a:spLocks xmlns:a="http://schemas.openxmlformats.org/drawingml/2006/main" noGrp="1"/>
-          </p:cNvSpPr>
-          <p:nvPr/>
-        </p:nvSpPr>
-        <p:spPr>
-          <a:xfrm xmlns:a="http://schemas.openxmlformats.org/drawingml/2006/main">
-            <a:off x="542925" y="5629275"/>
-            <a:ext cx="2152650" cy="742950"/>
+          <p:cNvPr id="22" name="overview-goal-name-ASR-QA-02">
+            <a:extLst xmlns:a="http://schemas.openxmlformats.org/drawingml/2006/main">
+              <a:ext uri="{FF2B5EF4-FFF2-40B4-BE49-F238E27FC236}">
+                <a16:creationId xmlns:a16="http://schemas.microsoft.com/office/drawing/2014/main" id="{B08B77C5-75BE-484E-BC51-4F51D121D082}"/>
+              </a:ext>
+            </a:extLst>
+          </p:cNvPr>
+          <p:cNvSpPr>
+            <a:spLocks xmlns:a="http://schemas.openxmlformats.org/drawingml/2006/main" noGrp="1"/>
+          </p:cNvSpPr>
+          <p:nvPr/>
+        </p:nvSpPr>
+        <p:spPr>
+          <a:xfrm xmlns:a="http://schemas.openxmlformats.org/drawingml/2006/main">
+            <a:off x="581025" y="3381375"/>
+            <a:ext cx="2571750" cy="342900"/>
           </a:xfrm>
           <a:prstGeom xmlns:a="http://schemas.openxmlformats.org/drawingml/2006/main" prst="rect">
             <a:avLst/>
@@ -2188,7 +2274,7 @@
           <a:lstStyle xmlns:a="http://schemas.openxmlformats.org/drawingml/2006/main"/>
           <a:p xmlns:a="http://schemas.openxmlformats.org/drawingml/2006/main">
             <a:pPr algn="ctr">
-              <a:defRPr sz="2475" b="1">
+              <a:defRPr sz="1800" b="1">
                 <a:solidFill>
                   <a:srgbClr val="FFFFFF"/>
                 </a:solidFill>
@@ -2198,7 +2284,7 @@
               </a:defRPr>
             </a:pPr>
             <a:r>
-              <a:rPr sz="2475" b="1">
+              <a:rPr sz="1800" b="1">
                 <a:solidFill>
                   <a:srgbClr val="FFFFFF"/>
                 </a:solidFill>
@@ -2206,46 +2292,104 @@
                 <a:ea typeface="Apple SD Gothic Neo"/>
                 <a:cs typeface="Apple SD Gothic Neo"/>
               </a:rPr>
-              <a:t>반응성</a:t>
+              <a:t>02 상호작용 응답시간</a:t>
             </a:r>
           </a:p>
         </p:txBody>
       </p:sp>
       <p:sp>
         <p:nvSpPr>
-          <p:cNvPr id="22" name="overview-goal-42">
-            <a:extLst xmlns:a="http://schemas.openxmlformats.org/drawingml/2006/main">
-              <a:ext uri="{FF2B5EF4-FFF2-40B4-BE49-F238E27FC236}">
-                <a16:creationId xmlns:a16="http://schemas.microsoft.com/office/drawing/2014/main" id="{F40F4895-125F-4870-BC3F-19D59E3C956F}"/>
-              </a:ext>
-            </a:extLst>
-          </p:cNvPr>
-          <p:cNvSpPr>
-            <a:spLocks xmlns:a="http://schemas.openxmlformats.org/drawingml/2006/main" noGrp="1"/>
-          </p:cNvSpPr>
-          <p:nvPr/>
-        </p:nvSpPr>
-        <p:spPr>
-          <a:xfrm xmlns:a="http://schemas.openxmlformats.org/drawingml/2006/main">
-            <a:off x="2743200" y="7353300"/>
-            <a:ext cx="533400" cy="953"/>
+          <p:cNvPr id="23" name="overview-goal-target-ASR-QA-02">
+            <a:extLst xmlns:a="http://schemas.openxmlformats.org/drawingml/2006/main">
+              <a:ext uri="{FF2B5EF4-FFF2-40B4-BE49-F238E27FC236}">
+                <a16:creationId xmlns:a16="http://schemas.microsoft.com/office/drawing/2014/main" id="{9D55656E-45B0-45D9-854D-ED28EC7575F5}"/>
+              </a:ext>
+            </a:extLst>
+          </p:cNvPr>
+          <p:cNvSpPr>
+            <a:spLocks xmlns:a="http://schemas.openxmlformats.org/drawingml/2006/main" noGrp="1"/>
+          </p:cNvSpPr>
+          <p:nvPr/>
+        </p:nvSpPr>
+        <p:spPr>
+          <a:xfrm xmlns:a="http://schemas.openxmlformats.org/drawingml/2006/main">
+            <a:off x="552450" y="3733800"/>
+            <a:ext cx="2628900" cy="295275"/>
+          </a:xfrm>
+          <a:prstGeom xmlns:a="http://schemas.openxmlformats.org/drawingml/2006/main" prst="rect">
+            <a:avLst/>
+          </a:prstGeom>
+          <a:noFill xmlns:a="http://schemas.openxmlformats.org/drawingml/2006/main"/>
+          <a:ln xmlns:a="http://schemas.openxmlformats.org/drawingml/2006/main" w="0">
+            <a:noFill/>
+            <a:prstDash val="solid"/>
+          </a:ln>
+        </p:spPr>
+        <p:txBody>
+          <a:bodyPr xmlns:a="http://schemas.openxmlformats.org/drawingml/2006/main" wrap="none" lIns="0" tIns="0" rIns="0" bIns="0" anchor="ctr">
+            <a:noAutofit/>
+          </a:bodyPr>
+          <a:lstStyle xmlns:a="http://schemas.openxmlformats.org/drawingml/2006/main"/>
+          <a:p xmlns:a="http://schemas.openxmlformats.org/drawingml/2006/main">
+            <a:pPr algn="ctr">
+              <a:defRPr sz="1425" b="0">
+                <a:solidFill>
+                  <a:srgbClr val="FFFFFF"/>
+                </a:solidFill>
+                <a:latin typeface="Apple SD Gothic Neo"/>
+                <a:ea typeface="Apple SD Gothic Neo"/>
+                <a:cs typeface="Apple SD Gothic Neo"/>
+              </a:defRPr>
+            </a:pPr>
+            <a:r>
+              <a:rPr sz="1425" b="0">
+                <a:solidFill>
+                  <a:srgbClr val="FFFFFF"/>
+                </a:solidFill>
+                <a:latin typeface="Apple SD Gothic Neo"/>
+                <a:ea typeface="Apple SD Gothic Neo"/>
+                <a:cs typeface="Apple SD Gothic Neo"/>
+              </a:rPr>
+              <a:t>평균 1초 이하, stop 0.1초 이하</a:t>
+            </a:r>
+          </a:p>
+        </p:txBody>
+      </p:sp>
+      <p:sp>
+        <p:nvSpPr>
+          <p:cNvPr id="24" name="overview-goal-3-44">
+            <a:extLst xmlns:a="http://schemas.openxmlformats.org/drawingml/2006/main">
+              <a:ext uri="{FF2B5EF4-FFF2-40B4-BE49-F238E27FC236}">
+                <a16:creationId xmlns:a16="http://schemas.microsoft.com/office/drawing/2014/main" id="{5A7432CB-123F-419B-AD5C-459087272C61}"/>
+              </a:ext>
+            </a:extLst>
+          </p:cNvPr>
+          <p:cNvSpPr>
+            <a:spLocks xmlns:a="http://schemas.openxmlformats.org/drawingml/2006/main" noGrp="1"/>
+          </p:cNvSpPr>
+          <p:nvPr/>
+        </p:nvSpPr>
+        <p:spPr>
+          <a:xfrm xmlns:a="http://schemas.openxmlformats.org/drawingml/2006/main">
+            <a:off x="3238500" y="4305300"/>
+            <a:ext cx="257175" cy="333375"/>
           </a:xfrm>
           <a:custGeom xmlns:a="http://schemas.openxmlformats.org/drawingml/2006/main">
             <a:pathLst>
-              <a:path w="533400" h="953">
+              <a:path w="257175" h="333375">
                 <a:moveTo>
-                  <a:pt x="0" y="0"/>
+                  <a:pt x="0" y="333375"/>
                 </a:moveTo>
                 <a:lnTo>
-                  <a:pt x="533400" y="0"/>
+                  <a:pt x="257175" y="0"/>
                 </a:lnTo>
               </a:path>
             </a:pathLst>
           </a:custGeom>
           <a:noFill xmlns:a="http://schemas.openxmlformats.org/drawingml/2006/main"/>
-          <a:ln xmlns:a="http://schemas.openxmlformats.org/drawingml/2006/main" w="33338">
+          <a:ln xmlns:a="http://schemas.openxmlformats.org/drawingml/2006/main" w="24765">
             <a:solidFill>
-              <a:srgbClr val="2463DD"/>
+              <a:srgbClr val="00A65A"/>
             </a:solidFill>
             <a:prstDash val="solid"/>
           </a:ln>
@@ -2253,22 +2397,22 @@
       </p:sp>
       <p:sp>
         <p:nvSpPr>
-          <p:cNvPr id="23" name="overview-goal-변경 용이성">
-            <a:extLst xmlns:a="http://schemas.openxmlformats.org/drawingml/2006/main">
-              <a:ext uri="{FF2B5EF4-FFF2-40B4-BE49-F238E27FC236}">
-                <a16:creationId xmlns:a16="http://schemas.microsoft.com/office/drawing/2014/main" id="{0461FD20-F7B1-4876-8C36-915D58289154}"/>
-              </a:ext>
-            </a:extLst>
-          </p:cNvPr>
-          <p:cNvSpPr>
-            <a:spLocks xmlns:a="http://schemas.openxmlformats.org/drawingml/2006/main" noGrp="1"/>
-          </p:cNvSpPr>
-          <p:nvPr/>
-        </p:nvSpPr>
-        <p:spPr>
-          <a:xfrm xmlns:a="http://schemas.openxmlformats.org/drawingml/2006/main">
-            <a:off x="495300" y="6981825"/>
-            <a:ext cx="2247900" cy="742950"/>
+          <p:cNvPr id="25" name="overview-goal-ASR-QA-03">
+            <a:extLst xmlns:a="http://schemas.openxmlformats.org/drawingml/2006/main">
+              <a:ext uri="{FF2B5EF4-FFF2-40B4-BE49-F238E27FC236}">
+                <a16:creationId xmlns:a16="http://schemas.microsoft.com/office/drawing/2014/main" id="{94039416-4C98-455A-81FF-820108EF8A6C}"/>
+              </a:ext>
+            </a:extLst>
+          </p:cNvPr>
+          <p:cNvSpPr>
+            <a:spLocks xmlns:a="http://schemas.openxmlformats.org/drawingml/2006/main" noGrp="1"/>
+          </p:cNvSpPr>
+          <p:nvPr/>
+        </p:nvSpPr>
+        <p:spPr>
+          <a:xfrm xmlns:a="http://schemas.openxmlformats.org/drawingml/2006/main">
+            <a:off x="495300" y="4257675"/>
+            <a:ext cx="2743200" cy="771525"/>
           </a:xfrm>
           <a:prstGeom xmlns:a="http://schemas.openxmlformats.org/drawingml/2006/main" prst="rect">
             <a:avLst/>
@@ -2286,22 +2430,22 @@
       </p:sp>
       <p:sp>
         <p:nvSpPr>
-          <p:cNvPr id="24" name="overview-goal-name-변경 용이성">
-            <a:extLst xmlns:a="http://schemas.openxmlformats.org/drawingml/2006/main">
-              <a:ext uri="{FF2B5EF4-FFF2-40B4-BE49-F238E27FC236}">
-                <a16:creationId xmlns:a16="http://schemas.microsoft.com/office/drawing/2014/main" id="{5B024587-35C9-4997-9DA4-D7F26D3944C0}"/>
-              </a:ext>
-            </a:extLst>
-          </p:cNvPr>
-          <p:cNvSpPr>
-            <a:spLocks xmlns:a="http://schemas.openxmlformats.org/drawingml/2006/main" noGrp="1"/>
-          </p:cNvSpPr>
-          <p:nvPr/>
-        </p:nvSpPr>
-        <p:spPr>
-          <a:xfrm xmlns:a="http://schemas.openxmlformats.org/drawingml/2006/main">
-            <a:off x="542925" y="6981825"/>
-            <a:ext cx="2152650" cy="742950"/>
+          <p:cNvPr id="26" name="overview-goal-name-ASR-QA-03">
+            <a:extLst xmlns:a="http://schemas.openxmlformats.org/drawingml/2006/main">
+              <a:ext uri="{FF2B5EF4-FFF2-40B4-BE49-F238E27FC236}">
+                <a16:creationId xmlns:a16="http://schemas.microsoft.com/office/drawing/2014/main" id="{B75D278C-1D79-4BFF-87BE-A0008E5E0B9A}"/>
+              </a:ext>
+            </a:extLst>
+          </p:cNvPr>
+          <p:cNvSpPr>
+            <a:spLocks xmlns:a="http://schemas.openxmlformats.org/drawingml/2006/main" noGrp="1"/>
+          </p:cNvSpPr>
+          <p:nvPr/>
+        </p:nvSpPr>
+        <p:spPr>
+          <a:xfrm xmlns:a="http://schemas.openxmlformats.org/drawingml/2006/main">
+            <a:off x="581025" y="4305300"/>
+            <a:ext cx="2571750" cy="342900"/>
           </a:xfrm>
           <a:prstGeom xmlns:a="http://schemas.openxmlformats.org/drawingml/2006/main" prst="rect">
             <a:avLst/>
@@ -2319,7 +2463,7 @@
           <a:lstStyle xmlns:a="http://schemas.openxmlformats.org/drawingml/2006/main"/>
           <a:p xmlns:a="http://schemas.openxmlformats.org/drawingml/2006/main">
             <a:pPr algn="ctr">
-              <a:defRPr sz="2475" b="1">
+              <a:defRPr sz="1800" b="1">
                 <a:solidFill>
                   <a:srgbClr val="FFFFFF"/>
                 </a:solidFill>
@@ -2329,7 +2473,7 @@
               </a:defRPr>
             </a:pPr>
             <a:r>
-              <a:rPr sz="2475" b="1">
+              <a:rPr sz="1800" b="1">
                 <a:solidFill>
                   <a:srgbClr val="FFFFFF"/>
                 </a:solidFill>
@@ -2337,17 +2481,682 @@
                 <a:ea typeface="Apple SD Gothic Neo"/>
                 <a:cs typeface="Apple SD Gothic Neo"/>
               </a:rPr>
-              <a:t>변경 용이성</a:t>
+              <a:t>03 VIA 요청 처리시간</a:t>
             </a:r>
           </a:p>
         </p:txBody>
       </p:sp>
       <p:sp>
         <p:nvSpPr>
-          <p:cNvPr id="25" name="overview-swatch-41">
-            <a:extLst xmlns:a="http://schemas.openxmlformats.org/drawingml/2006/main">
-              <a:ext uri="{FF2B5EF4-FFF2-40B4-BE49-F238E27FC236}">
-                <a16:creationId xmlns:a16="http://schemas.microsoft.com/office/drawing/2014/main" id="{6617CB8A-EE02-43F9-9AED-8B0F9967119E}"/>
+          <p:cNvPr id="27" name="overview-goal-target-ASR-QA-03">
+            <a:extLst xmlns:a="http://schemas.openxmlformats.org/drawingml/2006/main">
+              <a:ext uri="{FF2B5EF4-FFF2-40B4-BE49-F238E27FC236}">
+                <a16:creationId xmlns:a16="http://schemas.microsoft.com/office/drawing/2014/main" id="{A58BBC63-821F-4642-A8CC-F0F1C84026B3}"/>
+              </a:ext>
+            </a:extLst>
+          </p:cNvPr>
+          <p:cNvSpPr>
+            <a:spLocks xmlns:a="http://schemas.openxmlformats.org/drawingml/2006/main" noGrp="1"/>
+          </p:cNvSpPr>
+          <p:nvPr/>
+        </p:nvSpPr>
+        <p:spPr>
+          <a:xfrm xmlns:a="http://schemas.openxmlformats.org/drawingml/2006/main">
+            <a:off x="552450" y="4657725"/>
+            <a:ext cx="2628900" cy="295275"/>
+          </a:xfrm>
+          <a:prstGeom xmlns:a="http://schemas.openxmlformats.org/drawingml/2006/main" prst="rect">
+            <a:avLst/>
+          </a:prstGeom>
+          <a:noFill xmlns:a="http://schemas.openxmlformats.org/drawingml/2006/main"/>
+          <a:ln xmlns:a="http://schemas.openxmlformats.org/drawingml/2006/main" w="0">
+            <a:noFill/>
+            <a:prstDash val="solid"/>
+          </a:ln>
+        </p:spPr>
+        <p:txBody>
+          <a:bodyPr xmlns:a="http://schemas.openxmlformats.org/drawingml/2006/main" wrap="none" lIns="0" tIns="0" rIns="0" bIns="0" anchor="ctr">
+            <a:noAutofit/>
+          </a:bodyPr>
+          <a:lstStyle xmlns:a="http://schemas.openxmlformats.org/drawingml/2006/main"/>
+          <a:p xmlns:a="http://schemas.openxmlformats.org/drawingml/2006/main">
+            <a:pPr algn="ctr">
+              <a:defRPr sz="1650" b="0">
+                <a:solidFill>
+                  <a:srgbClr val="FFFFFF"/>
+                </a:solidFill>
+                <a:latin typeface="Apple SD Gothic Neo"/>
+                <a:ea typeface="Apple SD Gothic Neo"/>
+                <a:cs typeface="Apple SD Gothic Neo"/>
+              </a:defRPr>
+            </a:pPr>
+            <a:r>
+              <a:rPr sz="1650" b="0">
+                <a:solidFill>
+                  <a:srgbClr val="FFFFFF"/>
+                </a:solidFill>
+                <a:latin typeface="Apple SD Gothic Neo"/>
+                <a:ea typeface="Apple SD Gothic Neo"/>
+                <a:cs typeface="Apple SD Gothic Neo"/>
+              </a:rPr>
+              <a:t>평균 10초 이하</a:t>
+            </a:r>
+          </a:p>
+        </p:txBody>
+      </p:sp>
+      <p:sp>
+        <p:nvSpPr>
+          <p:cNvPr id="28" name="overview-goal-4-41">
+            <a:extLst xmlns:a="http://schemas.openxmlformats.org/drawingml/2006/main">
+              <a:ext uri="{FF2B5EF4-FFF2-40B4-BE49-F238E27FC236}">
+                <a16:creationId xmlns:a16="http://schemas.microsoft.com/office/drawing/2014/main" id="{73AB4624-8CAB-41EC-8E84-9A40F6DE61C3}"/>
+              </a:ext>
+            </a:extLst>
+          </p:cNvPr>
+          <p:cNvSpPr>
+            <a:spLocks xmlns:a="http://schemas.openxmlformats.org/drawingml/2006/main" noGrp="1"/>
+          </p:cNvSpPr>
+          <p:nvPr/>
+        </p:nvSpPr>
+        <p:spPr>
+          <a:xfrm xmlns:a="http://schemas.openxmlformats.org/drawingml/2006/main">
+            <a:off x="3238500" y="2686050"/>
+            <a:ext cx="257175" cy="2876550"/>
+          </a:xfrm>
+          <a:custGeom xmlns:a="http://schemas.openxmlformats.org/drawingml/2006/main">
+            <a:pathLst>
+              <a:path w="257175" h="2876550">
+                <a:moveTo>
+                  <a:pt x="0" y="2876550"/>
+                </a:moveTo>
+                <a:lnTo>
+                  <a:pt x="257175" y="0"/>
+                </a:lnTo>
+              </a:path>
+            </a:pathLst>
+          </a:custGeom>
+          <a:noFill xmlns:a="http://schemas.openxmlformats.org/drawingml/2006/main"/>
+          <a:ln xmlns:a="http://schemas.openxmlformats.org/drawingml/2006/main" w="24765">
+            <a:solidFill>
+              <a:srgbClr val="E5A700"/>
+            </a:solidFill>
+            <a:prstDash val="solid"/>
+          </a:ln>
+        </p:spPr>
+      </p:sp>
+      <p:sp>
+        <p:nvSpPr>
+          <p:cNvPr id="29" name="overview-goal-4-45">
+            <a:extLst xmlns:a="http://schemas.openxmlformats.org/drawingml/2006/main">
+              <a:ext uri="{FF2B5EF4-FFF2-40B4-BE49-F238E27FC236}">
+                <a16:creationId xmlns:a16="http://schemas.microsoft.com/office/drawing/2014/main" id="{62342AAF-0482-49F4-BCFC-9018640F9854}"/>
+              </a:ext>
+            </a:extLst>
+          </p:cNvPr>
+          <p:cNvSpPr>
+            <a:spLocks xmlns:a="http://schemas.openxmlformats.org/drawingml/2006/main" noGrp="1"/>
+          </p:cNvSpPr>
+          <p:nvPr/>
+        </p:nvSpPr>
+        <p:spPr>
+          <a:xfrm xmlns:a="http://schemas.openxmlformats.org/drawingml/2006/main">
+            <a:off x="3238500" y="5562600"/>
+            <a:ext cx="257175" cy="361950"/>
+          </a:xfrm>
+          <a:custGeom xmlns:a="http://schemas.openxmlformats.org/drawingml/2006/main">
+            <a:pathLst>
+              <a:path w="257175" h="361950">
+                <a:moveTo>
+                  <a:pt x="0" y="0"/>
+                </a:moveTo>
+                <a:lnTo>
+                  <a:pt x="257175" y="361950"/>
+                </a:lnTo>
+              </a:path>
+            </a:pathLst>
+          </a:custGeom>
+          <a:noFill xmlns:a="http://schemas.openxmlformats.org/drawingml/2006/main"/>
+          <a:ln xmlns:a="http://schemas.openxmlformats.org/drawingml/2006/main" w="24765">
+            <a:solidFill>
+              <a:srgbClr val="8D49B8"/>
+            </a:solidFill>
+            <a:prstDash val="solid"/>
+          </a:ln>
+        </p:spPr>
+      </p:sp>
+      <p:sp>
+        <p:nvSpPr>
+          <p:cNvPr id="30" name="overview-goal-ASR-QA-04">
+            <a:extLst xmlns:a="http://schemas.openxmlformats.org/drawingml/2006/main">
+              <a:ext uri="{FF2B5EF4-FFF2-40B4-BE49-F238E27FC236}">
+                <a16:creationId xmlns:a16="http://schemas.microsoft.com/office/drawing/2014/main" id="{A5442B45-AF8D-431B-BA53-B1FFF3A95BC4}"/>
+              </a:ext>
+            </a:extLst>
+          </p:cNvPr>
+          <p:cNvSpPr>
+            <a:spLocks xmlns:a="http://schemas.openxmlformats.org/drawingml/2006/main" noGrp="1"/>
+          </p:cNvSpPr>
+          <p:nvPr/>
+        </p:nvSpPr>
+        <p:spPr>
+          <a:xfrm xmlns:a="http://schemas.openxmlformats.org/drawingml/2006/main">
+            <a:off x="495300" y="5181600"/>
+            <a:ext cx="2743200" cy="771525"/>
+          </a:xfrm>
+          <a:prstGeom xmlns:a="http://schemas.openxmlformats.org/drawingml/2006/main" prst="rect">
+            <a:avLst/>
+          </a:prstGeom>
+          <a:solidFill xmlns:a="http://schemas.openxmlformats.org/drawingml/2006/main">
+            <a:srgbClr val="354354"/>
+          </a:solidFill>
+          <a:ln xmlns:a="http://schemas.openxmlformats.org/drawingml/2006/main" w="19050">
+            <a:solidFill>
+              <a:srgbClr val="45699B"/>
+            </a:solidFill>
+            <a:prstDash val="solid"/>
+          </a:ln>
+        </p:spPr>
+      </p:sp>
+      <p:sp>
+        <p:nvSpPr>
+          <p:cNvPr id="31" name="overview-goal-name-ASR-QA-04">
+            <a:extLst xmlns:a="http://schemas.openxmlformats.org/drawingml/2006/main">
+              <a:ext uri="{FF2B5EF4-FFF2-40B4-BE49-F238E27FC236}">
+                <a16:creationId xmlns:a16="http://schemas.microsoft.com/office/drawing/2014/main" id="{8A745147-861A-49A7-9133-65F7CD4D8997}"/>
+              </a:ext>
+            </a:extLst>
+          </p:cNvPr>
+          <p:cNvSpPr>
+            <a:spLocks xmlns:a="http://schemas.openxmlformats.org/drawingml/2006/main" noGrp="1"/>
+          </p:cNvSpPr>
+          <p:nvPr/>
+        </p:nvSpPr>
+        <p:spPr>
+          <a:xfrm xmlns:a="http://schemas.openxmlformats.org/drawingml/2006/main">
+            <a:off x="581025" y="5229225"/>
+            <a:ext cx="2571750" cy="342900"/>
+          </a:xfrm>
+          <a:prstGeom xmlns:a="http://schemas.openxmlformats.org/drawingml/2006/main" prst="rect">
+            <a:avLst/>
+          </a:prstGeom>
+          <a:noFill xmlns:a="http://schemas.openxmlformats.org/drawingml/2006/main"/>
+          <a:ln xmlns:a="http://schemas.openxmlformats.org/drawingml/2006/main" w="0">
+            <a:noFill/>
+            <a:prstDash val="solid"/>
+          </a:ln>
+        </p:spPr>
+        <p:txBody>
+          <a:bodyPr xmlns:a="http://schemas.openxmlformats.org/drawingml/2006/main" wrap="none" lIns="0" tIns="0" rIns="0" bIns="0" anchor="ctr">
+            <a:noAutofit/>
+          </a:bodyPr>
+          <a:lstStyle xmlns:a="http://schemas.openxmlformats.org/drawingml/2006/main"/>
+          <a:p xmlns:a="http://schemas.openxmlformats.org/drawingml/2006/main">
+            <a:pPr algn="ctr">
+              <a:defRPr sz="1800" b="1">
+                <a:solidFill>
+                  <a:srgbClr val="FFFFFF"/>
+                </a:solidFill>
+                <a:latin typeface="Apple SD Gothic Neo"/>
+                <a:ea typeface="Apple SD Gothic Neo"/>
+                <a:cs typeface="Apple SD Gothic Neo"/>
+              </a:defRPr>
+            </a:pPr>
+            <a:r>
+              <a:rPr sz="1800" b="1">
+                <a:solidFill>
+                  <a:srgbClr val="FFFFFF"/>
+                </a:solidFill>
+                <a:latin typeface="Apple SD Gothic Neo"/>
+                <a:ea typeface="Apple SD Gothic Neo"/>
+                <a:cs typeface="Apple SD Gothic Neo"/>
+              </a:rPr>
+              <a:t>04 VIA 모델 사용 비용</a:t>
+            </a:r>
+          </a:p>
+        </p:txBody>
+      </p:sp>
+      <p:sp>
+        <p:nvSpPr>
+          <p:cNvPr id="32" name="overview-goal-target-ASR-QA-04">
+            <a:extLst xmlns:a="http://schemas.openxmlformats.org/drawingml/2006/main">
+              <a:ext uri="{FF2B5EF4-FFF2-40B4-BE49-F238E27FC236}">
+                <a16:creationId xmlns:a16="http://schemas.microsoft.com/office/drawing/2014/main" id="{A1E7A340-E402-44F5-AB96-7EFD356DE24E}"/>
+              </a:ext>
+            </a:extLst>
+          </p:cNvPr>
+          <p:cNvSpPr>
+            <a:spLocks xmlns:a="http://schemas.openxmlformats.org/drawingml/2006/main" noGrp="1"/>
+          </p:cNvSpPr>
+          <p:nvPr/>
+        </p:nvSpPr>
+        <p:spPr>
+          <a:xfrm xmlns:a="http://schemas.openxmlformats.org/drawingml/2006/main">
+            <a:off x="552450" y="5581650"/>
+            <a:ext cx="2628900" cy="295275"/>
+          </a:xfrm>
+          <a:prstGeom xmlns:a="http://schemas.openxmlformats.org/drawingml/2006/main" prst="rect">
+            <a:avLst/>
+          </a:prstGeom>
+          <a:noFill xmlns:a="http://schemas.openxmlformats.org/drawingml/2006/main"/>
+          <a:ln xmlns:a="http://schemas.openxmlformats.org/drawingml/2006/main" w="0">
+            <a:noFill/>
+            <a:prstDash val="solid"/>
+          </a:ln>
+        </p:spPr>
+        <p:txBody>
+          <a:bodyPr xmlns:a="http://schemas.openxmlformats.org/drawingml/2006/main" wrap="none" lIns="0" tIns="0" rIns="0" bIns="0" anchor="ctr">
+            <a:noAutofit/>
+          </a:bodyPr>
+          <a:lstStyle xmlns:a="http://schemas.openxmlformats.org/drawingml/2006/main"/>
+          <a:p xmlns:a="http://schemas.openxmlformats.org/drawingml/2006/main">
+            <a:pPr algn="ctr">
+              <a:defRPr sz="1650" b="0">
+                <a:solidFill>
+                  <a:srgbClr val="FFFFFF"/>
+                </a:solidFill>
+                <a:latin typeface="Apple SD Gothic Neo"/>
+                <a:ea typeface="Apple SD Gothic Neo"/>
+                <a:cs typeface="Apple SD Gothic Neo"/>
+              </a:defRPr>
+            </a:pPr>
+            <a:r>
+              <a:rPr sz="1650" b="0">
+                <a:solidFill>
+                  <a:srgbClr val="FFFFFF"/>
+                </a:solidFill>
+                <a:latin typeface="Apple SD Gothic Neo"/>
+                <a:ea typeface="Apple SD Gothic Neo"/>
+                <a:cs typeface="Apple SD Gothic Neo"/>
+              </a:rPr>
+              <a:t>$0.50/P21 이하</a:t>
+            </a:r>
+          </a:p>
+        </p:txBody>
+      </p:sp>
+      <p:sp>
+        <p:nvSpPr>
+          <p:cNvPr id="33" name="overview-goal-5-42">
+            <a:extLst xmlns:a="http://schemas.openxmlformats.org/drawingml/2006/main">
+              <a:ext uri="{FF2B5EF4-FFF2-40B4-BE49-F238E27FC236}">
+                <a16:creationId xmlns:a16="http://schemas.microsoft.com/office/drawing/2014/main" id="{B14483C5-9D05-4439-AE28-21AD64D93E42}"/>
+              </a:ext>
+            </a:extLst>
+          </p:cNvPr>
+          <p:cNvSpPr>
+            <a:spLocks xmlns:a="http://schemas.openxmlformats.org/drawingml/2006/main" noGrp="1"/>
+          </p:cNvSpPr>
+          <p:nvPr/>
+        </p:nvSpPr>
+        <p:spPr>
+          <a:xfrm xmlns:a="http://schemas.openxmlformats.org/drawingml/2006/main">
+            <a:off x="3238500" y="6486525"/>
+            <a:ext cx="257175" cy="866775"/>
+          </a:xfrm>
+          <a:custGeom xmlns:a="http://schemas.openxmlformats.org/drawingml/2006/main">
+            <a:pathLst>
+              <a:path w="257175" h="866775">
+                <a:moveTo>
+                  <a:pt x="0" y="0"/>
+                </a:moveTo>
+                <a:lnTo>
+                  <a:pt x="257175" y="866775"/>
+                </a:lnTo>
+              </a:path>
+            </a:pathLst>
+          </a:custGeom>
+          <a:noFill xmlns:a="http://schemas.openxmlformats.org/drawingml/2006/main"/>
+          <a:ln xmlns:a="http://schemas.openxmlformats.org/drawingml/2006/main" w="24765">
+            <a:solidFill>
+              <a:srgbClr val="2463DD"/>
+            </a:solidFill>
+            <a:prstDash val="solid"/>
+          </a:ln>
+        </p:spPr>
+      </p:sp>
+      <p:sp>
+        <p:nvSpPr>
+          <p:cNvPr id="34" name="overview-goal-ASR-QA-05">
+            <a:extLst xmlns:a="http://schemas.openxmlformats.org/drawingml/2006/main">
+              <a:ext uri="{FF2B5EF4-FFF2-40B4-BE49-F238E27FC236}">
+                <a16:creationId xmlns:a16="http://schemas.microsoft.com/office/drawing/2014/main" id="{0A55BD03-61FF-4CB6-9B47-5BA39B81C553}"/>
+              </a:ext>
+            </a:extLst>
+          </p:cNvPr>
+          <p:cNvSpPr>
+            <a:spLocks xmlns:a="http://schemas.openxmlformats.org/drawingml/2006/main" noGrp="1"/>
+          </p:cNvSpPr>
+          <p:nvPr/>
+        </p:nvSpPr>
+        <p:spPr>
+          <a:xfrm xmlns:a="http://schemas.openxmlformats.org/drawingml/2006/main">
+            <a:off x="495300" y="6105525"/>
+            <a:ext cx="2743200" cy="771525"/>
+          </a:xfrm>
+          <a:prstGeom xmlns:a="http://schemas.openxmlformats.org/drawingml/2006/main" prst="rect">
+            <a:avLst/>
+          </a:prstGeom>
+          <a:solidFill xmlns:a="http://schemas.openxmlformats.org/drawingml/2006/main">
+            <a:srgbClr val="354354"/>
+          </a:solidFill>
+          <a:ln xmlns:a="http://schemas.openxmlformats.org/drawingml/2006/main" w="19050">
+            <a:solidFill>
+              <a:srgbClr val="45699B"/>
+            </a:solidFill>
+            <a:prstDash val="solid"/>
+          </a:ln>
+        </p:spPr>
+      </p:sp>
+      <p:sp>
+        <p:nvSpPr>
+          <p:cNvPr id="35" name="overview-goal-name-ASR-QA-05">
+            <a:extLst xmlns:a="http://schemas.openxmlformats.org/drawingml/2006/main">
+              <a:ext uri="{FF2B5EF4-FFF2-40B4-BE49-F238E27FC236}">
+                <a16:creationId xmlns:a16="http://schemas.microsoft.com/office/drawing/2014/main" id="{9A39E249-2325-48F7-AC3C-69EAA8EAAB22}"/>
+              </a:ext>
+            </a:extLst>
+          </p:cNvPr>
+          <p:cNvSpPr>
+            <a:spLocks xmlns:a="http://schemas.openxmlformats.org/drawingml/2006/main" noGrp="1"/>
+          </p:cNvSpPr>
+          <p:nvPr/>
+        </p:nvSpPr>
+        <p:spPr>
+          <a:xfrm xmlns:a="http://schemas.openxmlformats.org/drawingml/2006/main">
+            <a:off x="581025" y="6153150"/>
+            <a:ext cx="2571750" cy="342900"/>
+          </a:xfrm>
+          <a:prstGeom xmlns:a="http://schemas.openxmlformats.org/drawingml/2006/main" prst="rect">
+            <a:avLst/>
+          </a:prstGeom>
+          <a:noFill xmlns:a="http://schemas.openxmlformats.org/drawingml/2006/main"/>
+          <a:ln xmlns:a="http://schemas.openxmlformats.org/drawingml/2006/main" w="0">
+            <a:noFill/>
+            <a:prstDash val="solid"/>
+          </a:ln>
+        </p:spPr>
+        <p:txBody>
+          <a:bodyPr xmlns:a="http://schemas.openxmlformats.org/drawingml/2006/main" wrap="none" lIns="0" tIns="0" rIns="0" bIns="0" anchor="ctr">
+            <a:noAutofit/>
+          </a:bodyPr>
+          <a:lstStyle xmlns:a="http://schemas.openxmlformats.org/drawingml/2006/main"/>
+          <a:p xmlns:a="http://schemas.openxmlformats.org/drawingml/2006/main">
+            <a:pPr algn="ctr">
+              <a:defRPr sz="1800" b="1">
+                <a:solidFill>
+                  <a:srgbClr val="FFFFFF"/>
+                </a:solidFill>
+                <a:latin typeface="Apple SD Gothic Neo"/>
+                <a:ea typeface="Apple SD Gothic Neo"/>
+                <a:cs typeface="Apple SD Gothic Neo"/>
+              </a:defRPr>
+            </a:pPr>
+            <a:r>
+              <a:rPr sz="1800" b="1">
+                <a:solidFill>
+                  <a:srgbClr val="FFFFFF"/>
+                </a:solidFill>
+                <a:latin typeface="Apple SD Gothic Neo"/>
+                <a:ea typeface="Apple SD Gothic Neo"/>
+                <a:cs typeface="Apple SD Gothic Neo"/>
+              </a:rPr>
+              <a:t>05 VIA 변경 용이성</a:t>
+            </a:r>
+          </a:p>
+        </p:txBody>
+      </p:sp>
+      <p:sp>
+        <p:nvSpPr>
+          <p:cNvPr id="36" name="overview-goal-target-ASR-QA-05">
+            <a:extLst xmlns:a="http://schemas.openxmlformats.org/drawingml/2006/main">
+              <a:ext uri="{FF2B5EF4-FFF2-40B4-BE49-F238E27FC236}">
+                <a16:creationId xmlns:a16="http://schemas.microsoft.com/office/drawing/2014/main" id="{CB22923C-2C12-432C-9600-06704B1B768A}"/>
+              </a:ext>
+            </a:extLst>
+          </p:cNvPr>
+          <p:cNvSpPr>
+            <a:spLocks xmlns:a="http://schemas.openxmlformats.org/drawingml/2006/main" noGrp="1"/>
+          </p:cNvSpPr>
+          <p:nvPr/>
+        </p:nvSpPr>
+        <p:spPr>
+          <a:xfrm xmlns:a="http://schemas.openxmlformats.org/drawingml/2006/main">
+            <a:off x="552450" y="6505575"/>
+            <a:ext cx="2628900" cy="295275"/>
+          </a:xfrm>
+          <a:prstGeom xmlns:a="http://schemas.openxmlformats.org/drawingml/2006/main" prst="rect">
+            <a:avLst/>
+          </a:prstGeom>
+          <a:noFill xmlns:a="http://schemas.openxmlformats.org/drawingml/2006/main"/>
+          <a:ln xmlns:a="http://schemas.openxmlformats.org/drawingml/2006/main" w="0">
+            <a:noFill/>
+            <a:prstDash val="solid"/>
+          </a:ln>
+        </p:spPr>
+        <p:txBody>
+          <a:bodyPr xmlns:a="http://schemas.openxmlformats.org/drawingml/2006/main" wrap="none" lIns="0" tIns="0" rIns="0" bIns="0" anchor="ctr">
+            <a:noAutofit/>
+          </a:bodyPr>
+          <a:lstStyle xmlns:a="http://schemas.openxmlformats.org/drawingml/2006/main"/>
+          <a:p xmlns:a="http://schemas.openxmlformats.org/drawingml/2006/main">
+            <a:pPr algn="ctr">
+              <a:defRPr sz="1425" b="0">
+                <a:solidFill>
+                  <a:srgbClr val="FFFFFF"/>
+                </a:solidFill>
+                <a:latin typeface="Apple SD Gothic Neo"/>
+                <a:ea typeface="Apple SD Gothic Neo"/>
+                <a:cs typeface="Apple SD Gothic Neo"/>
+              </a:defRPr>
+            </a:pPr>
+            <a:r>
+              <a:rPr sz="1425" b="0">
+                <a:solidFill>
+                  <a:srgbClr val="FFFFFF"/>
+                </a:solidFill>
+                <a:latin typeface="Apple SD Gothic Neo"/>
+                <a:ea typeface="Apple SD Gothic Neo"/>
+                <a:cs typeface="Apple SD Gothic Neo"/>
+              </a:rPr>
+              <a:t>평균 3개 이하, 과제별 5개 이하</a:t>
+            </a:r>
+          </a:p>
+        </p:txBody>
+      </p:sp>
+      <p:sp>
+        <p:nvSpPr>
+          <p:cNvPr id="37" name="overview-goal-6-42">
+            <a:extLst xmlns:a="http://schemas.openxmlformats.org/drawingml/2006/main">
+              <a:ext uri="{FF2B5EF4-FFF2-40B4-BE49-F238E27FC236}">
+                <a16:creationId xmlns:a16="http://schemas.microsoft.com/office/drawing/2014/main" id="{7DAC7C8E-AC07-4FC9-B641-A62DBFB9C865}"/>
+              </a:ext>
+            </a:extLst>
+          </p:cNvPr>
+          <p:cNvSpPr>
+            <a:spLocks xmlns:a="http://schemas.openxmlformats.org/drawingml/2006/main" noGrp="1"/>
+          </p:cNvSpPr>
+          <p:nvPr/>
+        </p:nvSpPr>
+        <p:spPr>
+          <a:xfrm xmlns:a="http://schemas.openxmlformats.org/drawingml/2006/main">
+            <a:off x="3238500" y="7353300"/>
+            <a:ext cx="257175" cy="57150"/>
+          </a:xfrm>
+          <a:custGeom xmlns:a="http://schemas.openxmlformats.org/drawingml/2006/main">
+            <a:pathLst>
+              <a:path w="257175" h="57150">
+                <a:moveTo>
+                  <a:pt x="0" y="57150"/>
+                </a:moveTo>
+                <a:lnTo>
+                  <a:pt x="257175" y="0"/>
+                </a:lnTo>
+              </a:path>
+            </a:pathLst>
+          </a:custGeom>
+          <a:noFill xmlns:a="http://schemas.openxmlformats.org/drawingml/2006/main"/>
+          <a:ln xmlns:a="http://schemas.openxmlformats.org/drawingml/2006/main" w="24765">
+            <a:solidFill>
+              <a:srgbClr val="2463DD"/>
+            </a:solidFill>
+            <a:prstDash val="solid"/>
+          </a:ln>
+        </p:spPr>
+      </p:sp>
+      <p:sp>
+        <p:nvSpPr>
+          <p:cNvPr id="38" name="overview-goal-ASR-QA-06">
+            <a:extLst xmlns:a="http://schemas.openxmlformats.org/drawingml/2006/main">
+              <a:ext uri="{FF2B5EF4-FFF2-40B4-BE49-F238E27FC236}">
+                <a16:creationId xmlns:a16="http://schemas.microsoft.com/office/drawing/2014/main" id="{FB062707-8159-4FC1-B8B7-81A8266AC0ED}"/>
+              </a:ext>
+            </a:extLst>
+          </p:cNvPr>
+          <p:cNvSpPr>
+            <a:spLocks xmlns:a="http://schemas.openxmlformats.org/drawingml/2006/main" noGrp="1"/>
+          </p:cNvSpPr>
+          <p:nvPr/>
+        </p:nvSpPr>
+        <p:spPr>
+          <a:xfrm xmlns:a="http://schemas.openxmlformats.org/drawingml/2006/main">
+            <a:off x="495300" y="7029450"/>
+            <a:ext cx="2743200" cy="771525"/>
+          </a:xfrm>
+          <a:prstGeom xmlns:a="http://schemas.openxmlformats.org/drawingml/2006/main" prst="rect">
+            <a:avLst/>
+          </a:prstGeom>
+          <a:solidFill xmlns:a="http://schemas.openxmlformats.org/drawingml/2006/main">
+            <a:srgbClr val="354354"/>
+          </a:solidFill>
+          <a:ln xmlns:a="http://schemas.openxmlformats.org/drawingml/2006/main" w="19050">
+            <a:solidFill>
+              <a:srgbClr val="45699B"/>
+            </a:solidFill>
+            <a:prstDash val="solid"/>
+          </a:ln>
+        </p:spPr>
+      </p:sp>
+      <p:sp>
+        <p:nvSpPr>
+          <p:cNvPr id="39" name="overview-goal-name-ASR-QA-06">
+            <a:extLst xmlns:a="http://schemas.openxmlformats.org/drawingml/2006/main">
+              <a:ext uri="{FF2B5EF4-FFF2-40B4-BE49-F238E27FC236}">
+                <a16:creationId xmlns:a16="http://schemas.microsoft.com/office/drawing/2014/main" id="{25FDCD8E-FD7C-4D0D-A29F-3AB509674788}"/>
+              </a:ext>
+            </a:extLst>
+          </p:cNvPr>
+          <p:cNvSpPr>
+            <a:spLocks xmlns:a="http://schemas.openxmlformats.org/drawingml/2006/main" noGrp="1"/>
+          </p:cNvSpPr>
+          <p:nvPr/>
+        </p:nvSpPr>
+        <p:spPr>
+          <a:xfrm xmlns:a="http://schemas.openxmlformats.org/drawingml/2006/main">
+            <a:off x="581025" y="7077075"/>
+            <a:ext cx="2571750" cy="342900"/>
+          </a:xfrm>
+          <a:prstGeom xmlns:a="http://schemas.openxmlformats.org/drawingml/2006/main" prst="rect">
+            <a:avLst/>
+          </a:prstGeom>
+          <a:noFill xmlns:a="http://schemas.openxmlformats.org/drawingml/2006/main"/>
+          <a:ln xmlns:a="http://schemas.openxmlformats.org/drawingml/2006/main" w="0">
+            <a:noFill/>
+            <a:prstDash val="solid"/>
+          </a:ln>
+        </p:spPr>
+        <p:txBody>
+          <a:bodyPr xmlns:a="http://schemas.openxmlformats.org/drawingml/2006/main" wrap="none" lIns="0" tIns="0" rIns="0" bIns="0" anchor="ctr">
+            <a:noAutofit/>
+          </a:bodyPr>
+          <a:lstStyle xmlns:a="http://schemas.openxmlformats.org/drawingml/2006/main"/>
+          <a:p xmlns:a="http://schemas.openxmlformats.org/drawingml/2006/main">
+            <a:pPr algn="ctr">
+              <a:defRPr sz="1800" b="1">
+                <a:solidFill>
+                  <a:srgbClr val="FFFFFF"/>
+                </a:solidFill>
+                <a:latin typeface="Apple SD Gothic Neo"/>
+                <a:ea typeface="Apple SD Gothic Neo"/>
+                <a:cs typeface="Apple SD Gothic Neo"/>
+              </a:defRPr>
+            </a:pPr>
+            <a:r>
+              <a:rPr sz="1800" b="1">
+                <a:solidFill>
+                  <a:srgbClr val="FFFFFF"/>
+                </a:solidFill>
+                <a:latin typeface="Apple SD Gothic Neo"/>
+                <a:ea typeface="Apple SD Gothic Neo"/>
+                <a:cs typeface="Apple SD Gothic Neo"/>
+              </a:rPr>
+              <a:t>06 로컬 VIA 메모리 사용량</a:t>
+            </a:r>
+          </a:p>
+        </p:txBody>
+      </p:sp>
+      <p:sp>
+        <p:nvSpPr>
+          <p:cNvPr id="40" name="overview-goal-target-ASR-QA-06">
+            <a:extLst xmlns:a="http://schemas.openxmlformats.org/drawingml/2006/main">
+              <a:ext uri="{FF2B5EF4-FFF2-40B4-BE49-F238E27FC236}">
+                <a16:creationId xmlns:a16="http://schemas.microsoft.com/office/drawing/2014/main" id="{8DA9633C-43BB-499E-A772-A079C4BB6379}"/>
+              </a:ext>
+            </a:extLst>
+          </p:cNvPr>
+          <p:cNvSpPr>
+            <a:spLocks xmlns:a="http://schemas.openxmlformats.org/drawingml/2006/main" noGrp="1"/>
+          </p:cNvSpPr>
+          <p:nvPr/>
+        </p:nvSpPr>
+        <p:spPr>
+          <a:xfrm xmlns:a="http://schemas.openxmlformats.org/drawingml/2006/main">
+            <a:off x="552450" y="7429500"/>
+            <a:ext cx="2628900" cy="295275"/>
+          </a:xfrm>
+          <a:prstGeom xmlns:a="http://schemas.openxmlformats.org/drawingml/2006/main" prst="rect">
+            <a:avLst/>
+          </a:prstGeom>
+          <a:noFill xmlns:a="http://schemas.openxmlformats.org/drawingml/2006/main"/>
+          <a:ln xmlns:a="http://schemas.openxmlformats.org/drawingml/2006/main" w="0">
+            <a:noFill/>
+            <a:prstDash val="solid"/>
+          </a:ln>
+        </p:spPr>
+        <p:txBody>
+          <a:bodyPr xmlns:a="http://schemas.openxmlformats.org/drawingml/2006/main" wrap="none" lIns="0" tIns="0" rIns="0" bIns="0" anchor="ctr">
+            <a:noAutofit/>
+          </a:bodyPr>
+          <a:lstStyle xmlns:a="http://schemas.openxmlformats.org/drawingml/2006/main"/>
+          <a:p xmlns:a="http://schemas.openxmlformats.org/drawingml/2006/main">
+            <a:pPr algn="ctr">
+              <a:defRPr sz="1650" b="0">
+                <a:solidFill>
+                  <a:srgbClr val="FFFFFF"/>
+                </a:solidFill>
+                <a:latin typeface="Apple SD Gothic Neo"/>
+                <a:ea typeface="Apple SD Gothic Neo"/>
+                <a:cs typeface="Apple SD Gothic Neo"/>
+              </a:defRPr>
+            </a:pPr>
+            <a:r>
+              <a:rPr sz="1650" b="0">
+                <a:solidFill>
+                  <a:srgbClr val="FFFFFF"/>
+                </a:solidFill>
+                <a:latin typeface="Apple SD Gothic Neo"/>
+                <a:ea typeface="Apple SD Gothic Neo"/>
+                <a:cs typeface="Apple SD Gothic Neo"/>
+              </a:rPr>
+              <a:t>4,096MiB 이하 (commit)</a:t>
+            </a:r>
+          </a:p>
+        </p:txBody>
+      </p:sp>
+      <p:sp>
+        <p:nvSpPr>
+          <p:cNvPr id="41" name="overview-swatch-41">
+            <a:extLst xmlns:a="http://schemas.openxmlformats.org/drawingml/2006/main">
+              <a:ext uri="{FF2B5EF4-FFF2-40B4-BE49-F238E27FC236}">
+                <a16:creationId xmlns:a16="http://schemas.microsoft.com/office/drawing/2014/main" id="{4FE98749-1B01-4D16-8D0F-AC39908EE617}"/>
               </a:ext>
             </a:extLst>
           </p:cNvPr>
@@ -2377,10 +3186,10 @@
       </p:sp>
       <p:sp>
         <p:nvSpPr>
-          <p:cNvPr id="26" name="overview-decision-title-41">
-            <a:extLst xmlns:a="http://schemas.openxmlformats.org/drawingml/2006/main">
-              <a:ext uri="{FF2B5EF4-FFF2-40B4-BE49-F238E27FC236}">
-                <a16:creationId xmlns:a16="http://schemas.microsoft.com/office/drawing/2014/main" id="{39A2352C-7501-4DC2-AD2E-0317F08FB075}"/>
+          <p:cNvPr id="42" name="overview-decision-title-41">
+            <a:extLst xmlns:a="http://schemas.openxmlformats.org/drawingml/2006/main">
+              <a:ext uri="{FF2B5EF4-FFF2-40B4-BE49-F238E27FC236}">
+                <a16:creationId xmlns:a16="http://schemas.microsoft.com/office/drawing/2014/main" id="{8793EE45-9E91-4D78-917A-FE44C52A39E5}"/>
               </a:ext>
             </a:extLst>
           </p:cNvPr>
@@ -2435,10 +3244,10 @@
       </p:sp>
       <p:sp>
         <p:nvSpPr>
-          <p:cNvPr id="27" name="overview-decision-detail-41">
-            <a:extLst xmlns:a="http://schemas.openxmlformats.org/drawingml/2006/main">
-              <a:ext uri="{FF2B5EF4-FFF2-40B4-BE49-F238E27FC236}">
-                <a16:creationId xmlns:a16="http://schemas.microsoft.com/office/drawing/2014/main" id="{097A1D6B-536B-4A74-B5F9-0348BCF2837F}"/>
+          <p:cNvPr id="43" name="overview-decision-detail-41">
+            <a:extLst xmlns:a="http://schemas.openxmlformats.org/drawingml/2006/main">
+              <a:ext uri="{FF2B5EF4-FFF2-40B4-BE49-F238E27FC236}">
+                <a16:creationId xmlns:a16="http://schemas.microsoft.com/office/drawing/2014/main" id="{8F0BF26E-F29A-4D5A-B4E2-1D6FF876EE05}"/>
               </a:ext>
             </a:extLst>
           </p:cNvPr>
@@ -2493,32 +3302,32 @@
       </p:sp>
       <p:sp>
         <p:nvSpPr>
-          <p:cNvPr id="28" name="overview-swatch-43">
-            <a:extLst xmlns:a="http://schemas.openxmlformats.org/drawingml/2006/main">
-              <a:ext uri="{FF2B5EF4-FFF2-40B4-BE49-F238E27FC236}">
-                <a16:creationId xmlns:a16="http://schemas.microsoft.com/office/drawing/2014/main" id="{F1920F14-CE22-4674-B31D-01C4A464AD17}"/>
-              </a:ext>
-            </a:extLst>
-          </p:cNvPr>
-          <p:cNvSpPr>
-            <a:spLocks xmlns:a="http://schemas.openxmlformats.org/drawingml/2006/main" noGrp="1"/>
-          </p:cNvSpPr>
-          <p:nvPr/>
-        </p:nvSpPr>
-        <p:spPr>
-          <a:xfrm xmlns:a="http://schemas.openxmlformats.org/drawingml/2006/main">
-            <a:off x="3276600" y="3562350"/>
+          <p:cNvPr id="44" name="overview-swatch-44">
+            <a:extLst xmlns:a="http://schemas.openxmlformats.org/drawingml/2006/main">
+              <a:ext uri="{FF2B5EF4-FFF2-40B4-BE49-F238E27FC236}">
+                <a16:creationId xmlns:a16="http://schemas.microsoft.com/office/drawing/2014/main" id="{396106B6-E4BB-48FB-A36B-16A5D0EDE0EA}"/>
+              </a:ext>
+            </a:extLst>
+          </p:cNvPr>
+          <p:cNvSpPr>
+            <a:spLocks xmlns:a="http://schemas.openxmlformats.org/drawingml/2006/main" noGrp="1"/>
+          </p:cNvSpPr>
+          <p:nvPr/>
+        </p:nvSpPr>
+        <p:spPr>
+          <a:xfrm xmlns:a="http://schemas.openxmlformats.org/drawingml/2006/main">
+            <a:off x="3276600" y="4105275"/>
             <a:ext cx="228600" cy="400050"/>
           </a:xfrm>
           <a:prstGeom xmlns:a="http://schemas.openxmlformats.org/drawingml/2006/main" prst="rect">
             <a:avLst/>
           </a:prstGeom>
           <a:solidFill xmlns:a="http://schemas.openxmlformats.org/drawingml/2006/main">
-            <a:srgbClr val="E73338"/>
+            <a:srgbClr val="00A65A"/>
           </a:solidFill>
           <a:ln xmlns:a="http://schemas.openxmlformats.org/drawingml/2006/main" w="0">
             <a:solidFill>
-              <a:srgbClr val="E73338"/>
+              <a:srgbClr val="00A65A"/>
             </a:solidFill>
             <a:prstDash val="solid"/>
           </a:ln>
@@ -2526,21 +3335,21 @@
       </p:sp>
       <p:sp>
         <p:nvSpPr>
-          <p:cNvPr id="29" name="overview-decision-title-43">
-            <a:extLst xmlns:a="http://schemas.openxmlformats.org/drawingml/2006/main">
-              <a:ext uri="{FF2B5EF4-FFF2-40B4-BE49-F238E27FC236}">
-                <a16:creationId xmlns:a16="http://schemas.microsoft.com/office/drawing/2014/main" id="{2B0B04C3-6E53-47D9-8065-C9CBF78D81EA}"/>
-              </a:ext>
-            </a:extLst>
-          </p:cNvPr>
-          <p:cNvSpPr>
-            <a:spLocks xmlns:a="http://schemas.openxmlformats.org/drawingml/2006/main" noGrp="1"/>
-          </p:cNvSpPr>
-          <p:nvPr/>
-        </p:nvSpPr>
-        <p:spPr>
-          <a:xfrm xmlns:a="http://schemas.openxmlformats.org/drawingml/2006/main">
-            <a:off x="3714750" y="3457575"/>
+          <p:cNvPr id="45" name="overview-decision-title-44">
+            <a:extLst xmlns:a="http://schemas.openxmlformats.org/drawingml/2006/main">
+              <a:ext uri="{FF2B5EF4-FFF2-40B4-BE49-F238E27FC236}">
+                <a16:creationId xmlns:a16="http://schemas.microsoft.com/office/drawing/2014/main" id="{D8ADDD93-DD7E-4DE8-A135-B1840395FD00}"/>
+              </a:ext>
+            </a:extLst>
+          </p:cNvPr>
+          <p:cNvSpPr>
+            <a:spLocks xmlns:a="http://schemas.openxmlformats.org/drawingml/2006/main" noGrp="1"/>
+          </p:cNvSpPr>
+          <p:nvPr/>
+        </p:nvSpPr>
+        <p:spPr>
+          <a:xfrm xmlns:a="http://schemas.openxmlformats.org/drawingml/2006/main">
+            <a:off x="3714750" y="4000500"/>
             <a:ext cx="4438650" cy="476250"/>
           </a:xfrm>
           <a:prstGeom xmlns:a="http://schemas.openxmlformats.org/drawingml/2006/main" prst="rect">
@@ -2577,28 +3386,28 @@
                 <a:ea typeface="Apple SD Gothic Neo"/>
                 <a:cs typeface="Apple SD Gothic Neo"/>
               </a:rPr>
-              <a:t>04-43. Request 의미 판단</a:t>
+              <a:t>04-44. 지속 대화 실행</a:t>
             </a:r>
           </a:p>
         </p:txBody>
       </p:sp>
       <p:sp>
         <p:nvSpPr>
-          <p:cNvPr id="30" name="overview-decision-detail-43">
-            <a:extLst xmlns:a="http://schemas.openxmlformats.org/drawingml/2006/main">
-              <a:ext uri="{FF2B5EF4-FFF2-40B4-BE49-F238E27FC236}">
-                <a16:creationId xmlns:a16="http://schemas.microsoft.com/office/drawing/2014/main" id="{121EF9CA-8B04-47F4-9C9C-3C4BE0B3BEC7}"/>
-              </a:ext>
-            </a:extLst>
-          </p:cNvPr>
-          <p:cNvSpPr>
-            <a:spLocks xmlns:a="http://schemas.openxmlformats.org/drawingml/2006/main" noGrp="1"/>
-          </p:cNvSpPr>
-          <p:nvPr/>
-        </p:nvSpPr>
-        <p:spPr>
-          <a:xfrm xmlns:a="http://schemas.openxmlformats.org/drawingml/2006/main">
-            <a:off x="3714750" y="3952875"/>
+          <p:cNvPr id="46" name="overview-decision-detail-44">
+            <a:extLst xmlns:a="http://schemas.openxmlformats.org/drawingml/2006/main">
+              <a:ext uri="{FF2B5EF4-FFF2-40B4-BE49-F238E27FC236}">
+                <a16:creationId xmlns:a16="http://schemas.microsoft.com/office/drawing/2014/main" id="{A4BF74CB-1700-46F4-BD48-A33A11BFC304}"/>
+              </a:ext>
+            </a:extLst>
+          </p:cNvPr>
+          <p:cNvSpPr>
+            <a:spLocks xmlns:a="http://schemas.openxmlformats.org/drawingml/2006/main" noGrp="1"/>
+          </p:cNvSpPr>
+          <p:nvPr/>
+        </p:nvSpPr>
+        <p:spPr>
+          <a:xfrm xmlns:a="http://schemas.openxmlformats.org/drawingml/2006/main">
+            <a:off x="3714750" y="4495800"/>
             <a:ext cx="4429125" cy="371475"/>
           </a:xfrm>
           <a:prstGeom xmlns:a="http://schemas.openxmlformats.org/drawingml/2006/main" prst="rect">
@@ -2635,28 +3444,28 @@
                 <a:ea typeface="Apple SD Gothic Neo"/>
                 <a:cs typeface="Apple SD Gothic Neo"/>
               </a:rPr>
-              <a:t>통합 판단과 기능별 판단의 생산 책임</a:t>
+              <a:t>입력과 질문 및 결과의 후속 실행</a:t>
             </a:r>
           </a:p>
         </p:txBody>
       </p:sp>
       <p:sp>
         <p:nvSpPr>
-          <p:cNvPr id="31" name="overview-swatch-45">
-            <a:extLst xmlns:a="http://schemas.openxmlformats.org/drawingml/2006/main">
-              <a:ext uri="{FF2B5EF4-FFF2-40B4-BE49-F238E27FC236}">
-                <a16:creationId xmlns:a16="http://schemas.microsoft.com/office/drawing/2014/main" id="{E7B3F9B0-F3E4-4AE5-A261-DB0F8827B5CB}"/>
-              </a:ext>
-            </a:extLst>
-          </p:cNvPr>
-          <p:cNvSpPr>
-            <a:spLocks xmlns:a="http://schemas.openxmlformats.org/drawingml/2006/main" noGrp="1"/>
-          </p:cNvSpPr>
-          <p:nvPr/>
-        </p:nvSpPr>
-        <p:spPr>
-          <a:xfrm xmlns:a="http://schemas.openxmlformats.org/drawingml/2006/main">
-            <a:off x="3276600" y="4638675"/>
+          <p:cNvPr id="47" name="overview-swatch-45">
+            <a:extLst xmlns:a="http://schemas.openxmlformats.org/drawingml/2006/main">
+              <a:ext uri="{FF2B5EF4-FFF2-40B4-BE49-F238E27FC236}">
+                <a16:creationId xmlns:a16="http://schemas.microsoft.com/office/drawing/2014/main" id="{7631732F-1137-4649-9478-389F0E363914}"/>
+              </a:ext>
+            </a:extLst>
+          </p:cNvPr>
+          <p:cNvSpPr>
+            <a:spLocks xmlns:a="http://schemas.openxmlformats.org/drawingml/2006/main" noGrp="1"/>
+          </p:cNvSpPr>
+          <p:nvPr/>
+        </p:nvSpPr>
+        <p:spPr>
+          <a:xfrm xmlns:a="http://schemas.openxmlformats.org/drawingml/2006/main">
+            <a:off x="3276600" y="5724525"/>
             <a:ext cx="228600" cy="400050"/>
           </a:xfrm>
           <a:prstGeom xmlns:a="http://schemas.openxmlformats.org/drawingml/2006/main" prst="rect">
@@ -2675,21 +3484,21 @@
       </p:sp>
       <p:sp>
         <p:nvSpPr>
-          <p:cNvPr id="32" name="overview-decision-title-45">
-            <a:extLst xmlns:a="http://schemas.openxmlformats.org/drawingml/2006/main">
-              <a:ext uri="{FF2B5EF4-FFF2-40B4-BE49-F238E27FC236}">
-                <a16:creationId xmlns:a16="http://schemas.microsoft.com/office/drawing/2014/main" id="{223DFE7C-564B-42D1-98BA-49835EE98576}"/>
-              </a:ext>
-            </a:extLst>
-          </p:cNvPr>
-          <p:cNvSpPr>
-            <a:spLocks xmlns:a="http://schemas.openxmlformats.org/drawingml/2006/main" noGrp="1"/>
-          </p:cNvSpPr>
-          <p:nvPr/>
-        </p:nvSpPr>
-        <p:spPr>
-          <a:xfrm xmlns:a="http://schemas.openxmlformats.org/drawingml/2006/main">
-            <a:off x="3714750" y="4533900"/>
+          <p:cNvPr id="48" name="overview-decision-title-45">
+            <a:extLst xmlns:a="http://schemas.openxmlformats.org/drawingml/2006/main">
+              <a:ext uri="{FF2B5EF4-FFF2-40B4-BE49-F238E27FC236}">
+                <a16:creationId xmlns:a16="http://schemas.microsoft.com/office/drawing/2014/main" id="{E52F407F-FDC8-4EFC-A9D2-E53C5F03CC76}"/>
+              </a:ext>
+            </a:extLst>
+          </p:cNvPr>
+          <p:cNvSpPr>
+            <a:spLocks xmlns:a="http://schemas.openxmlformats.org/drawingml/2006/main" noGrp="1"/>
+          </p:cNvSpPr>
+          <p:nvPr/>
+        </p:nvSpPr>
+        <p:spPr>
+          <a:xfrm xmlns:a="http://schemas.openxmlformats.org/drawingml/2006/main">
+            <a:off x="3714750" y="5619750"/>
             <a:ext cx="4438650" cy="476250"/>
           </a:xfrm>
           <a:prstGeom xmlns:a="http://schemas.openxmlformats.org/drawingml/2006/main" prst="rect">
@@ -2733,21 +3542,21 @@
       </p:sp>
       <p:sp>
         <p:nvSpPr>
-          <p:cNvPr id="33" name="overview-decision-detail-45">
-            <a:extLst xmlns:a="http://schemas.openxmlformats.org/drawingml/2006/main">
-              <a:ext uri="{FF2B5EF4-FFF2-40B4-BE49-F238E27FC236}">
-                <a16:creationId xmlns:a16="http://schemas.microsoft.com/office/drawing/2014/main" id="{401FCFAE-D98A-4C64-8210-F8D9A1631B20}"/>
-              </a:ext>
-            </a:extLst>
-          </p:cNvPr>
-          <p:cNvSpPr>
-            <a:spLocks xmlns:a="http://schemas.openxmlformats.org/drawingml/2006/main" noGrp="1"/>
-          </p:cNvSpPr>
-          <p:nvPr/>
-        </p:nvSpPr>
-        <p:spPr>
-          <a:xfrm xmlns:a="http://schemas.openxmlformats.org/drawingml/2006/main">
-            <a:off x="3714750" y="5029200"/>
+          <p:cNvPr id="49" name="overview-decision-detail-45">
+            <a:extLst xmlns:a="http://schemas.openxmlformats.org/drawingml/2006/main">
+              <a:ext uri="{FF2B5EF4-FFF2-40B4-BE49-F238E27FC236}">
+                <a16:creationId xmlns:a16="http://schemas.microsoft.com/office/drawing/2014/main" id="{6DB70456-EF81-48E7-A9F0-F58A943556D5}"/>
+              </a:ext>
+            </a:extLst>
+          </p:cNvPr>
+          <p:cNvSpPr>
+            <a:spLocks xmlns:a="http://schemas.openxmlformats.org/drawingml/2006/main" noGrp="1"/>
+          </p:cNvSpPr>
+          <p:nvPr/>
+        </p:nvSpPr>
+        <p:spPr>
+          <a:xfrm xmlns:a="http://schemas.openxmlformats.org/drawingml/2006/main">
+            <a:off x="3714750" y="6115050"/>
             <a:ext cx="4429125" cy="371475"/>
           </a:xfrm>
           <a:prstGeom xmlns:a="http://schemas.openxmlformats.org/drawingml/2006/main" prst="rect">
@@ -2791,159 +3600,10 @@
       </p:sp>
       <p:sp>
         <p:nvSpPr>
-          <p:cNvPr id="34" name="overview-swatch-44">
-            <a:extLst xmlns:a="http://schemas.openxmlformats.org/drawingml/2006/main">
-              <a:ext uri="{FF2B5EF4-FFF2-40B4-BE49-F238E27FC236}">
-                <a16:creationId xmlns:a16="http://schemas.microsoft.com/office/drawing/2014/main" id="{1107228C-AE89-4B88-9298-1BB8A58B6086}"/>
-              </a:ext>
-            </a:extLst>
-          </p:cNvPr>
-          <p:cNvSpPr>
-            <a:spLocks xmlns:a="http://schemas.openxmlformats.org/drawingml/2006/main" noGrp="1"/>
-          </p:cNvSpPr>
-          <p:nvPr/>
-        </p:nvSpPr>
-        <p:spPr>
-          <a:xfrm xmlns:a="http://schemas.openxmlformats.org/drawingml/2006/main">
-            <a:off x="3276600" y="5800725"/>
-            <a:ext cx="228600" cy="400050"/>
-          </a:xfrm>
-          <a:prstGeom xmlns:a="http://schemas.openxmlformats.org/drawingml/2006/main" prst="rect">
-            <a:avLst/>
-          </a:prstGeom>
-          <a:solidFill xmlns:a="http://schemas.openxmlformats.org/drawingml/2006/main">
-            <a:srgbClr val="00A65A"/>
-          </a:solidFill>
-          <a:ln xmlns:a="http://schemas.openxmlformats.org/drawingml/2006/main" w="0">
-            <a:solidFill>
-              <a:srgbClr val="00A65A"/>
-            </a:solidFill>
-            <a:prstDash val="solid"/>
-          </a:ln>
-        </p:spPr>
-      </p:sp>
-      <p:sp>
-        <p:nvSpPr>
-          <p:cNvPr id="35" name="overview-decision-title-44">
-            <a:extLst xmlns:a="http://schemas.openxmlformats.org/drawingml/2006/main">
-              <a:ext uri="{FF2B5EF4-FFF2-40B4-BE49-F238E27FC236}">
-                <a16:creationId xmlns:a16="http://schemas.microsoft.com/office/drawing/2014/main" id="{7F80A15F-A443-4801-A5CE-C6887D757DFB}"/>
-              </a:ext>
-            </a:extLst>
-          </p:cNvPr>
-          <p:cNvSpPr>
-            <a:spLocks xmlns:a="http://schemas.openxmlformats.org/drawingml/2006/main" noGrp="1"/>
-          </p:cNvSpPr>
-          <p:nvPr/>
-        </p:nvSpPr>
-        <p:spPr>
-          <a:xfrm xmlns:a="http://schemas.openxmlformats.org/drawingml/2006/main">
-            <a:off x="3714750" y="5695950"/>
-            <a:ext cx="4438650" cy="476250"/>
-          </a:xfrm>
-          <a:prstGeom xmlns:a="http://schemas.openxmlformats.org/drawingml/2006/main" prst="rect">
-            <a:avLst/>
-          </a:prstGeom>
-          <a:noFill xmlns:a="http://schemas.openxmlformats.org/drawingml/2006/main"/>
-          <a:ln xmlns:a="http://schemas.openxmlformats.org/drawingml/2006/main" w="0">
-            <a:noFill/>
-            <a:prstDash val="solid"/>
-          </a:ln>
-        </p:spPr>
-        <p:txBody>
-          <a:bodyPr xmlns:a="http://schemas.openxmlformats.org/drawingml/2006/main" wrap="none" lIns="0" tIns="0" rIns="0" bIns="0" anchor="ctr">
-            <a:noAutofit/>
-          </a:bodyPr>
-          <a:lstStyle xmlns:a="http://schemas.openxmlformats.org/drawingml/2006/main"/>
-          <a:p xmlns:a="http://schemas.openxmlformats.org/drawingml/2006/main">
-            <a:pPr algn="l">
-              <a:defRPr sz="2475" b="1">
-                <a:solidFill>
-                  <a:srgbClr val="141414"/>
-                </a:solidFill>
-                <a:latin typeface="Apple SD Gothic Neo"/>
-                <a:ea typeface="Apple SD Gothic Neo"/>
-                <a:cs typeface="Apple SD Gothic Neo"/>
-              </a:defRPr>
-            </a:pPr>
-            <a:r>
-              <a:rPr sz="2475" b="1">
-                <a:solidFill>
-                  <a:srgbClr val="141414"/>
-                </a:solidFill>
-                <a:latin typeface="Apple SD Gothic Neo"/>
-                <a:ea typeface="Apple SD Gothic Neo"/>
-                <a:cs typeface="Apple SD Gothic Neo"/>
-              </a:rPr>
-              <a:t>04-44. 지속 대화 실행</a:t>
-            </a:r>
-          </a:p>
-        </p:txBody>
-      </p:sp>
-      <p:sp>
-        <p:nvSpPr>
-          <p:cNvPr id="36" name="overview-decision-detail-44">
-            <a:extLst xmlns:a="http://schemas.openxmlformats.org/drawingml/2006/main">
-              <a:ext uri="{FF2B5EF4-FFF2-40B4-BE49-F238E27FC236}">
-                <a16:creationId xmlns:a16="http://schemas.microsoft.com/office/drawing/2014/main" id="{E1F195B6-2287-4B08-9DE2-8F8D49ACC599}"/>
-              </a:ext>
-            </a:extLst>
-          </p:cNvPr>
-          <p:cNvSpPr>
-            <a:spLocks xmlns:a="http://schemas.openxmlformats.org/drawingml/2006/main" noGrp="1"/>
-          </p:cNvSpPr>
-          <p:nvPr/>
-        </p:nvSpPr>
-        <p:spPr>
-          <a:xfrm xmlns:a="http://schemas.openxmlformats.org/drawingml/2006/main">
-            <a:off x="3714750" y="6191250"/>
-            <a:ext cx="4429125" cy="371475"/>
-          </a:xfrm>
-          <a:prstGeom xmlns:a="http://schemas.openxmlformats.org/drawingml/2006/main" prst="rect">
-            <a:avLst/>
-          </a:prstGeom>
-          <a:noFill xmlns:a="http://schemas.openxmlformats.org/drawingml/2006/main"/>
-          <a:ln xmlns:a="http://schemas.openxmlformats.org/drawingml/2006/main" w="0">
-            <a:noFill/>
-            <a:prstDash val="solid"/>
-          </a:ln>
-        </p:spPr>
-        <p:txBody>
-          <a:bodyPr xmlns:a="http://schemas.openxmlformats.org/drawingml/2006/main" wrap="none" lIns="0" tIns="0" rIns="0" bIns="0" anchor="ctr">
-            <a:noAutofit/>
-          </a:bodyPr>
-          <a:lstStyle xmlns:a="http://schemas.openxmlformats.org/drawingml/2006/main"/>
-          <a:p xmlns:a="http://schemas.openxmlformats.org/drawingml/2006/main">
-            <a:pPr algn="l">
-              <a:defRPr sz="2025" b="0">
-                <a:solidFill>
-                  <a:srgbClr val="505760"/>
-                </a:solidFill>
-                <a:latin typeface="Apple SD Gothic Neo"/>
-                <a:ea typeface="Apple SD Gothic Neo"/>
-                <a:cs typeface="Apple SD Gothic Neo"/>
-              </a:defRPr>
-            </a:pPr>
-            <a:r>
-              <a:rPr sz="2025" b="0">
-                <a:solidFill>
-                  <a:srgbClr val="505760"/>
-                </a:solidFill>
-                <a:latin typeface="Apple SD Gothic Neo"/>
-                <a:ea typeface="Apple SD Gothic Neo"/>
-                <a:cs typeface="Apple SD Gothic Neo"/>
-              </a:rPr>
-              <a:t>입력과 질문 및 결과의 후속 실행</a:t>
-            </a:r>
-          </a:p>
-        </p:txBody>
-      </p:sp>
-      <p:sp>
-        <p:nvSpPr>
-          <p:cNvPr id="37" name="overview-swatch-42">
-            <a:extLst xmlns:a="http://schemas.openxmlformats.org/drawingml/2006/main">
-              <a:ext uri="{FF2B5EF4-FFF2-40B4-BE49-F238E27FC236}">
-                <a16:creationId xmlns:a16="http://schemas.microsoft.com/office/drawing/2014/main" id="{FBFF4D86-C4DA-4937-B760-7950FFFEBADC}"/>
+          <p:cNvPr id="50" name="overview-swatch-42">
+            <a:extLst xmlns:a="http://schemas.openxmlformats.org/drawingml/2006/main">
+              <a:ext uri="{FF2B5EF4-FFF2-40B4-BE49-F238E27FC236}">
+                <a16:creationId xmlns:a16="http://schemas.microsoft.com/office/drawing/2014/main" id="{D9B0A4C1-2205-4E7E-9E07-3F1217E974EE}"/>
               </a:ext>
             </a:extLst>
           </p:cNvPr>
@@ -2973,10 +3633,10 @@
       </p:sp>
       <p:sp>
         <p:nvSpPr>
-          <p:cNvPr id="38" name="overview-decision-title-42">
-            <a:extLst xmlns:a="http://schemas.openxmlformats.org/drawingml/2006/main">
-              <a:ext uri="{FF2B5EF4-FFF2-40B4-BE49-F238E27FC236}">
-                <a16:creationId xmlns:a16="http://schemas.microsoft.com/office/drawing/2014/main" id="{0334C01A-7F2A-440F-9FA3-8E2A07A582AA}"/>
+          <p:cNvPr id="51" name="overview-decision-title-42">
+            <a:extLst xmlns:a="http://schemas.openxmlformats.org/drawingml/2006/main">
+              <a:ext uri="{FF2B5EF4-FFF2-40B4-BE49-F238E27FC236}">
+                <a16:creationId xmlns:a16="http://schemas.microsoft.com/office/drawing/2014/main" id="{58124065-1888-4363-BE35-0F6260A72F08}"/>
               </a:ext>
             </a:extLst>
           </p:cNvPr>
@@ -3006,7 +3666,7 @@
           <a:lstStyle xmlns:a="http://schemas.openxmlformats.org/drawingml/2006/main"/>
           <a:p xmlns:a="http://schemas.openxmlformats.org/drawingml/2006/main">
             <a:pPr algn="l">
-              <a:defRPr sz="2475" b="1">
+              <a:defRPr sz="2175" b="1">
                 <a:solidFill>
                   <a:srgbClr val="141414"/>
                 </a:solidFill>
@@ -3016,7 +3676,7 @@
               </a:defRPr>
             </a:pPr>
             <a:r>
-              <a:rPr sz="2475" b="1">
+              <a:rPr sz="2175" b="1">
                 <a:solidFill>
                   <a:srgbClr val="141414"/>
                 </a:solidFill>
@@ -3031,10 +3691,10 @@
       </p:sp>
       <p:sp>
         <p:nvSpPr>
-          <p:cNvPr id="39" name="overview-decision-detail-42">
-            <a:extLst xmlns:a="http://schemas.openxmlformats.org/drawingml/2006/main">
-              <a:ext uri="{FF2B5EF4-FFF2-40B4-BE49-F238E27FC236}">
-                <a16:creationId xmlns:a16="http://schemas.microsoft.com/office/drawing/2014/main" id="{38AB7BE8-3228-44C6-AF23-70E630733A1C}"/>
+          <p:cNvPr id="52" name="overview-decision-detail-42">
+            <a:extLst xmlns:a="http://schemas.openxmlformats.org/drawingml/2006/main">
+              <a:ext uri="{FF2B5EF4-FFF2-40B4-BE49-F238E27FC236}">
+                <a16:creationId xmlns:a16="http://schemas.microsoft.com/office/drawing/2014/main" id="{466D25E9-1831-40FB-80F8-1D449E64168E}"/>
               </a:ext>
             </a:extLst>
           </p:cNvPr>
@@ -3089,10 +3749,10 @@
       </p:sp>
       <p:sp>
         <p:nvSpPr>
-          <p:cNvPr id="40" name="overview-VIA-boundary">
-            <a:extLst xmlns:a="http://schemas.openxmlformats.org/drawingml/2006/main">
-              <a:ext uri="{FF2B5EF4-FFF2-40B4-BE49-F238E27FC236}">
-                <a16:creationId xmlns:a16="http://schemas.microsoft.com/office/drawing/2014/main" id="{6092F400-97A3-46D2-8949-722E210BFEB7}"/>
+          <p:cNvPr id="53" name="overview-VIA-boundary">
+            <a:extLst xmlns:a="http://schemas.openxmlformats.org/drawingml/2006/main">
+              <a:ext uri="{FF2B5EF4-FFF2-40B4-BE49-F238E27FC236}">
+                <a16:creationId xmlns:a16="http://schemas.microsoft.com/office/drawing/2014/main" id="{0667F901-341B-44E1-B622-EDA03A2B690A}"/>
               </a:ext>
             </a:extLst>
           </p:cNvPr>
@@ -3122,10 +3782,10 @@
       </p:sp>
       <p:sp>
         <p:nvSpPr>
-          <p:cNvPr id="41" name="overview-VIA-label">
-            <a:extLst xmlns:a="http://schemas.openxmlformats.org/drawingml/2006/main">
-              <a:ext uri="{FF2B5EF4-FFF2-40B4-BE49-F238E27FC236}">
-                <a16:creationId xmlns:a16="http://schemas.microsoft.com/office/drawing/2014/main" id="{41D121AB-66D5-4758-BF87-C39953B307F7}"/>
+          <p:cNvPr id="54" name="overview-VIA-label">
+            <a:extLst xmlns:a="http://schemas.openxmlformats.org/drawingml/2006/main">
+              <a:ext uri="{FF2B5EF4-FFF2-40B4-BE49-F238E27FC236}">
+                <a16:creationId xmlns:a16="http://schemas.microsoft.com/office/drawing/2014/main" id="{D4B1B01E-411B-48FB-B131-F0A731EA7F93}"/>
               </a:ext>
             </a:extLst>
           </p:cNvPr>
@@ -3180,10 +3840,10 @@
       </p:sp>
       <p:sp>
         <p:nvSpPr>
-          <p:cNvPr id="42" name="overview-Interaction">
-            <a:extLst xmlns:a="http://schemas.openxmlformats.org/drawingml/2006/main">
-              <a:ext uri="{FF2B5EF4-FFF2-40B4-BE49-F238E27FC236}">
-                <a16:creationId xmlns:a16="http://schemas.microsoft.com/office/drawing/2014/main" id="{98897458-9DD3-4FD3-BDCB-651BE0190A21}"/>
+          <p:cNvPr id="55" name="overview-Interaction">
+            <a:extLst xmlns:a="http://schemas.openxmlformats.org/drawingml/2006/main">
+              <a:ext uri="{FF2B5EF4-FFF2-40B4-BE49-F238E27FC236}">
+                <a16:creationId xmlns:a16="http://schemas.microsoft.com/office/drawing/2014/main" id="{05444503-736C-4A46-88AE-BAF5E3E47471}"/>
               </a:ext>
             </a:extLst>
           </p:cNvPr>
@@ -3213,10 +3873,10 @@
       </p:sp>
       <p:sp>
         <p:nvSpPr>
-          <p:cNvPr id="43" name="overview-Interaction-label">
-            <a:extLst xmlns:a="http://schemas.openxmlformats.org/drawingml/2006/main">
-              <a:ext uri="{FF2B5EF4-FFF2-40B4-BE49-F238E27FC236}">
-                <a16:creationId xmlns:a16="http://schemas.microsoft.com/office/drawing/2014/main" id="{3DCB3690-EE04-4E33-8360-EF1B57598588}"/>
+          <p:cNvPr id="56" name="overview-Interaction-label">
+            <a:extLst xmlns:a="http://schemas.openxmlformats.org/drawingml/2006/main">
+              <a:ext uri="{FF2B5EF4-FFF2-40B4-BE49-F238E27FC236}">
+                <a16:creationId xmlns:a16="http://schemas.microsoft.com/office/drawing/2014/main" id="{B4C83EED-8672-4B9F-99C8-3C29E33D4909}"/>
               </a:ext>
             </a:extLst>
           </p:cNvPr>
@@ -3271,10 +3931,10 @@
       </p:sp>
       <p:sp>
         <p:nvSpPr>
-          <p:cNvPr id="44" name="overview-component-Interaction Manager">
-            <a:extLst xmlns:a="http://schemas.openxmlformats.org/drawingml/2006/main">
-              <a:ext uri="{FF2B5EF4-FFF2-40B4-BE49-F238E27FC236}">
-                <a16:creationId xmlns:a16="http://schemas.microsoft.com/office/drawing/2014/main" id="{56A3AB06-9C8A-4809-BB5B-65C412CE6B65}"/>
+          <p:cNvPr id="57" name="overview-component-Interaction Manager">
+            <a:extLst xmlns:a="http://schemas.openxmlformats.org/drawingml/2006/main">
+              <a:ext uri="{FF2B5EF4-FFF2-40B4-BE49-F238E27FC236}">
+                <a16:creationId xmlns:a16="http://schemas.microsoft.com/office/drawing/2014/main" id="{B311954B-3254-4B9A-B492-21E04BEA0852}"/>
               </a:ext>
             </a:extLst>
           </p:cNvPr>
@@ -3304,10 +3964,10 @@
       </p:sp>
       <p:sp>
         <p:nvSpPr>
-          <p:cNvPr id="45" name="overview-name-Interaction Manager">
-            <a:extLst xmlns:a="http://schemas.openxmlformats.org/drawingml/2006/main">
-              <a:ext uri="{FF2B5EF4-FFF2-40B4-BE49-F238E27FC236}">
-                <a16:creationId xmlns:a16="http://schemas.microsoft.com/office/drawing/2014/main" id="{3CE66761-8A2F-477C-B89A-084F73E21F7D}"/>
+          <p:cNvPr id="58" name="overview-name-Interaction Manager">
+            <a:extLst xmlns:a="http://schemas.openxmlformats.org/drawingml/2006/main">
+              <a:ext uri="{FF2B5EF4-FFF2-40B4-BE49-F238E27FC236}">
+                <a16:creationId xmlns:a16="http://schemas.microsoft.com/office/drawing/2014/main" id="{C9EDC35C-F628-4FF9-BF4D-8AD712C66390}"/>
               </a:ext>
             </a:extLst>
           </p:cNvPr>
@@ -3362,10 +4022,10 @@
       </p:sp>
       <p:sp>
         <p:nvSpPr>
-          <p:cNvPr id="46" name="overview-component-Response Manager">
-            <a:extLst xmlns:a="http://schemas.openxmlformats.org/drawingml/2006/main">
-              <a:ext uri="{FF2B5EF4-FFF2-40B4-BE49-F238E27FC236}">
-                <a16:creationId xmlns:a16="http://schemas.microsoft.com/office/drawing/2014/main" id="{AE363D9E-D027-433F-874B-F998A167BFB6}"/>
+          <p:cNvPr id="59" name="overview-component-Response Manager">
+            <a:extLst xmlns:a="http://schemas.openxmlformats.org/drawingml/2006/main">
+              <a:ext uri="{FF2B5EF4-FFF2-40B4-BE49-F238E27FC236}">
+                <a16:creationId xmlns:a16="http://schemas.microsoft.com/office/drawing/2014/main" id="{7452EC8B-254E-4254-94E5-6DC88F7E64B3}"/>
               </a:ext>
             </a:extLst>
           </p:cNvPr>
@@ -3395,10 +4055,10 @@
       </p:sp>
       <p:sp>
         <p:nvSpPr>
-          <p:cNvPr id="47" name="overview-name-Response Manager">
-            <a:extLst xmlns:a="http://schemas.openxmlformats.org/drawingml/2006/main">
-              <a:ext uri="{FF2B5EF4-FFF2-40B4-BE49-F238E27FC236}">
-                <a16:creationId xmlns:a16="http://schemas.microsoft.com/office/drawing/2014/main" id="{FD1386B3-F5FA-43CB-9737-DE7A035249CB}"/>
+          <p:cNvPr id="60" name="overview-name-Response Manager">
+            <a:extLst xmlns:a="http://schemas.openxmlformats.org/drawingml/2006/main">
+              <a:ext uri="{FF2B5EF4-FFF2-40B4-BE49-F238E27FC236}">
+                <a16:creationId xmlns:a16="http://schemas.microsoft.com/office/drawing/2014/main" id="{A7068843-721B-4A60-AD45-332B9611AF67}"/>
               </a:ext>
             </a:extLst>
           </p:cNvPr>
@@ -3453,10 +4113,10 @@
       </p:sp>
       <p:sp>
         <p:nvSpPr>
-          <p:cNvPr id="48" name="overview-Orchestration">
-            <a:extLst xmlns:a="http://schemas.openxmlformats.org/drawingml/2006/main">
-              <a:ext uri="{FF2B5EF4-FFF2-40B4-BE49-F238E27FC236}">
-                <a16:creationId xmlns:a16="http://schemas.microsoft.com/office/drawing/2014/main" id="{394A7073-8491-4DB4-80E5-08B2F0E9DD5C}"/>
+          <p:cNvPr id="61" name="overview-Orchestration">
+            <a:extLst xmlns:a="http://schemas.openxmlformats.org/drawingml/2006/main">
+              <a:ext uri="{FF2B5EF4-FFF2-40B4-BE49-F238E27FC236}">
+                <a16:creationId xmlns:a16="http://schemas.microsoft.com/office/drawing/2014/main" id="{AEBA02E5-2698-46DB-93E7-C9282787FD6E}"/>
               </a:ext>
             </a:extLst>
           </p:cNvPr>
@@ -3486,10 +4146,10 @@
       </p:sp>
       <p:sp>
         <p:nvSpPr>
-          <p:cNvPr id="49" name="overview-Orchestration-label">
-            <a:extLst xmlns:a="http://schemas.openxmlformats.org/drawingml/2006/main">
-              <a:ext uri="{FF2B5EF4-FFF2-40B4-BE49-F238E27FC236}">
-                <a16:creationId xmlns:a16="http://schemas.microsoft.com/office/drawing/2014/main" id="{5373FEE3-27B0-452D-83AD-27D2C111C8D8}"/>
+          <p:cNvPr id="62" name="overview-Orchestration-label">
+            <a:extLst xmlns:a="http://schemas.openxmlformats.org/drawingml/2006/main">
+              <a:ext uri="{FF2B5EF4-FFF2-40B4-BE49-F238E27FC236}">
+                <a16:creationId xmlns:a16="http://schemas.microsoft.com/office/drawing/2014/main" id="{F7FA0B2B-F1C8-4AB6-AA80-D94EFD0B90C5}"/>
               </a:ext>
             </a:extLst>
           </p:cNvPr>
@@ -3544,10 +4204,10 @@
       </p:sp>
       <p:sp>
         <p:nvSpPr>
-          <p:cNvPr id="50" name="overview-component-Request Controller">
-            <a:extLst xmlns:a="http://schemas.openxmlformats.org/drawingml/2006/main">
-              <a:ext uri="{FF2B5EF4-FFF2-40B4-BE49-F238E27FC236}">
-                <a16:creationId xmlns:a16="http://schemas.microsoft.com/office/drawing/2014/main" id="{C5DB38EF-D503-4FEA-AF9C-FE47AEE73044}"/>
+          <p:cNvPr id="63" name="overview-component-Request Controller">
+            <a:extLst xmlns:a="http://schemas.openxmlformats.org/drawingml/2006/main">
+              <a:ext uri="{FF2B5EF4-FFF2-40B4-BE49-F238E27FC236}">
+                <a16:creationId xmlns:a16="http://schemas.microsoft.com/office/drawing/2014/main" id="{DF4BE49B-E898-4802-91C1-CDCB6CCF8989}"/>
               </a:ext>
             </a:extLst>
           </p:cNvPr>
@@ -3577,10 +4237,10 @@
       </p:sp>
       <p:sp>
         <p:nvSpPr>
-          <p:cNvPr id="51" name="overview-name-Request Controller">
-            <a:extLst xmlns:a="http://schemas.openxmlformats.org/drawingml/2006/main">
-              <a:ext uri="{FF2B5EF4-FFF2-40B4-BE49-F238E27FC236}">
-                <a16:creationId xmlns:a16="http://schemas.microsoft.com/office/drawing/2014/main" id="{FBD05ECF-B1EC-43F2-947F-EFD5CC22D078}"/>
+          <p:cNvPr id="64" name="overview-name-Request Controller">
+            <a:extLst xmlns:a="http://schemas.openxmlformats.org/drawingml/2006/main">
+              <a:ext uri="{FF2B5EF4-FFF2-40B4-BE49-F238E27FC236}">
+                <a16:creationId xmlns:a16="http://schemas.microsoft.com/office/drawing/2014/main" id="{0BD89C5D-2909-4652-9B57-929FAEE069A2}"/>
               </a:ext>
             </a:extLst>
           </p:cNvPr>
@@ -3635,10 +4295,10 @@
       </p:sp>
       <p:sp>
         <p:nvSpPr>
-          <p:cNvPr id="52" name="overview-component-Request Interpreter">
-            <a:extLst xmlns:a="http://schemas.openxmlformats.org/drawingml/2006/main">
-              <a:ext uri="{FF2B5EF4-FFF2-40B4-BE49-F238E27FC236}">
-                <a16:creationId xmlns:a16="http://schemas.microsoft.com/office/drawing/2014/main" id="{8B160582-ED2C-46E8-98EC-6B8DFF8F3710}"/>
+          <p:cNvPr id="65" name="overview-component-Request Interpreter">
+            <a:extLst xmlns:a="http://schemas.openxmlformats.org/drawingml/2006/main">
+              <a:ext uri="{FF2B5EF4-FFF2-40B4-BE49-F238E27FC236}">
+                <a16:creationId xmlns:a16="http://schemas.microsoft.com/office/drawing/2014/main" id="{29E90C18-0D26-48D1-B96C-57CFD1F364AF}"/>
               </a:ext>
             </a:extLst>
           </p:cNvPr>
@@ -3668,10 +4328,10 @@
       </p:sp>
       <p:sp>
         <p:nvSpPr>
-          <p:cNvPr id="53" name="overview-name-Request Interpreter">
-            <a:extLst xmlns:a="http://schemas.openxmlformats.org/drawingml/2006/main">
-              <a:ext uri="{FF2B5EF4-FFF2-40B4-BE49-F238E27FC236}">
-                <a16:creationId xmlns:a16="http://schemas.microsoft.com/office/drawing/2014/main" id="{D8DB87C1-E6EB-4E94-908C-AC0EA0B2440E}"/>
+          <p:cNvPr id="66" name="overview-name-Request Interpreter">
+            <a:extLst xmlns:a="http://schemas.openxmlformats.org/drawingml/2006/main">
+              <a:ext uri="{FF2B5EF4-FFF2-40B4-BE49-F238E27FC236}">
+                <a16:creationId xmlns:a16="http://schemas.microsoft.com/office/drawing/2014/main" id="{C7DE6FB3-F4ED-4273-A692-B5D4E85938E1}"/>
               </a:ext>
             </a:extLst>
           </p:cNvPr>
@@ -3726,10 +4386,10 @@
       </p:sp>
       <p:sp>
         <p:nvSpPr>
-          <p:cNvPr id="54" name="overview-component-Context Manager">
-            <a:extLst xmlns:a="http://schemas.openxmlformats.org/drawingml/2006/main">
-              <a:ext uri="{FF2B5EF4-FFF2-40B4-BE49-F238E27FC236}">
-                <a16:creationId xmlns:a16="http://schemas.microsoft.com/office/drawing/2014/main" id="{AC901521-6117-433C-8F5E-C596016BE0B2}"/>
+          <p:cNvPr id="67" name="overview-component-Context Manager">
+            <a:extLst xmlns:a="http://schemas.openxmlformats.org/drawingml/2006/main">
+              <a:ext uri="{FF2B5EF4-FFF2-40B4-BE49-F238E27FC236}">
+                <a16:creationId xmlns:a16="http://schemas.microsoft.com/office/drawing/2014/main" id="{CC588BA3-0092-4123-BD68-119001462853}"/>
               </a:ext>
             </a:extLst>
           </p:cNvPr>
@@ -3759,10 +4419,10 @@
       </p:sp>
       <p:sp>
         <p:nvSpPr>
-          <p:cNvPr id="55" name="overview-name-Context Manager">
-            <a:extLst xmlns:a="http://schemas.openxmlformats.org/drawingml/2006/main">
-              <a:ext uri="{FF2B5EF4-FFF2-40B4-BE49-F238E27FC236}">
-                <a16:creationId xmlns:a16="http://schemas.microsoft.com/office/drawing/2014/main" id="{7DA49012-CF53-4953-A5C0-B2E1CCB4DB51}"/>
+          <p:cNvPr id="68" name="overview-name-Context Manager">
+            <a:extLst xmlns:a="http://schemas.openxmlformats.org/drawingml/2006/main">
+              <a:ext uri="{FF2B5EF4-FFF2-40B4-BE49-F238E27FC236}">
+                <a16:creationId xmlns:a16="http://schemas.microsoft.com/office/drawing/2014/main" id="{5DDCC5D7-62AD-43D5-A518-69A59D4BF05C}"/>
               </a:ext>
             </a:extLst>
           </p:cNvPr>
@@ -3817,10 +4477,10 @@
       </p:sp>
       <p:sp>
         <p:nvSpPr>
-          <p:cNvPr id="56" name="overview-component-Policy Manager">
-            <a:extLst xmlns:a="http://schemas.openxmlformats.org/drawingml/2006/main">
-              <a:ext uri="{FF2B5EF4-FFF2-40B4-BE49-F238E27FC236}">
-                <a16:creationId xmlns:a16="http://schemas.microsoft.com/office/drawing/2014/main" id="{E27475CC-FCDA-4B8B-A0A3-9BE22D49E96D}"/>
+          <p:cNvPr id="69" name="overview-component-Policy Manager">
+            <a:extLst xmlns:a="http://schemas.openxmlformats.org/drawingml/2006/main">
+              <a:ext uri="{FF2B5EF4-FFF2-40B4-BE49-F238E27FC236}">
+                <a16:creationId xmlns:a16="http://schemas.microsoft.com/office/drawing/2014/main" id="{B3071E9C-F3B5-4F3F-AC3C-BE3E74A2379B}"/>
               </a:ext>
             </a:extLst>
           </p:cNvPr>
@@ -3850,10 +4510,10 @@
       </p:sp>
       <p:sp>
         <p:nvSpPr>
-          <p:cNvPr id="57" name="overview-name-Policy Manager">
-            <a:extLst xmlns:a="http://schemas.openxmlformats.org/drawingml/2006/main">
-              <a:ext uri="{FF2B5EF4-FFF2-40B4-BE49-F238E27FC236}">
-                <a16:creationId xmlns:a16="http://schemas.microsoft.com/office/drawing/2014/main" id="{10834BA4-32B7-4BCA-862E-6BB4B30A2037}"/>
+          <p:cNvPr id="70" name="overview-name-Policy Manager">
+            <a:extLst xmlns:a="http://schemas.openxmlformats.org/drawingml/2006/main">
+              <a:ext uri="{FF2B5EF4-FFF2-40B4-BE49-F238E27FC236}">
+                <a16:creationId xmlns:a16="http://schemas.microsoft.com/office/drawing/2014/main" id="{4C489507-5C88-47E3-B463-24C64B16F6E8}"/>
               </a:ext>
             </a:extLst>
           </p:cNvPr>
@@ -3908,10 +4568,10 @@
       </p:sp>
       <p:sp>
         <p:nvSpPr>
-          <p:cNvPr id="58" name="overview-component-Task Manager">
-            <a:extLst xmlns:a="http://schemas.openxmlformats.org/drawingml/2006/main">
-              <a:ext uri="{FF2B5EF4-FFF2-40B4-BE49-F238E27FC236}">
-                <a16:creationId xmlns:a16="http://schemas.microsoft.com/office/drawing/2014/main" id="{82F2D3EE-6C0D-42C1-BAD2-A829B22AA798}"/>
+          <p:cNvPr id="71" name="overview-component-Task Manager">
+            <a:extLst xmlns:a="http://schemas.openxmlformats.org/drawingml/2006/main">
+              <a:ext uri="{FF2B5EF4-FFF2-40B4-BE49-F238E27FC236}">
+                <a16:creationId xmlns:a16="http://schemas.microsoft.com/office/drawing/2014/main" id="{05DADF7B-2DA2-4E57-AAA1-8107E13776E1}"/>
               </a:ext>
             </a:extLst>
           </p:cNvPr>
@@ -3941,10 +4601,10 @@
       </p:sp>
       <p:sp>
         <p:nvSpPr>
-          <p:cNvPr id="59" name="overview-name-Task Manager">
-            <a:extLst xmlns:a="http://schemas.openxmlformats.org/drawingml/2006/main">
-              <a:ext uri="{FF2B5EF4-FFF2-40B4-BE49-F238E27FC236}">
-                <a16:creationId xmlns:a16="http://schemas.microsoft.com/office/drawing/2014/main" id="{3D8B9086-1E6F-4AA8-A143-D4EBE0D494A3}"/>
+          <p:cNvPr id="72" name="overview-name-Task Manager">
+            <a:extLst xmlns:a="http://schemas.openxmlformats.org/drawingml/2006/main">
+              <a:ext uri="{FF2B5EF4-FFF2-40B4-BE49-F238E27FC236}">
+                <a16:creationId xmlns:a16="http://schemas.microsoft.com/office/drawing/2014/main" id="{3DE7176D-B17C-4FE8-A02A-6A566C6721E0}"/>
               </a:ext>
             </a:extLst>
           </p:cNvPr>
@@ -3999,10 +4659,10 @@
       </p:sp>
       <p:sp>
         <p:nvSpPr>
-          <p:cNvPr id="60" name="overview-component-Agent Gateway">
-            <a:extLst xmlns:a="http://schemas.openxmlformats.org/drawingml/2006/main">
-              <a:ext uri="{FF2B5EF4-FFF2-40B4-BE49-F238E27FC236}">
-                <a16:creationId xmlns:a16="http://schemas.microsoft.com/office/drawing/2014/main" id="{3F5CEEB9-E948-4DC6-AA9C-047CFC1A93EC}"/>
+          <p:cNvPr id="73" name="overview-component-Agent Gateway">
+            <a:extLst xmlns:a="http://schemas.openxmlformats.org/drawingml/2006/main">
+              <a:ext uri="{FF2B5EF4-FFF2-40B4-BE49-F238E27FC236}">
+                <a16:creationId xmlns:a16="http://schemas.microsoft.com/office/drawing/2014/main" id="{8C58E22E-3D1B-4AAD-B5F8-66B4250D6F51}"/>
               </a:ext>
             </a:extLst>
           </p:cNvPr>
@@ -4032,10 +4692,10 @@
       </p:sp>
       <p:sp>
         <p:nvSpPr>
-          <p:cNvPr id="61" name="overview-name-Agent Gateway">
-            <a:extLst xmlns:a="http://schemas.openxmlformats.org/drawingml/2006/main">
-              <a:ext uri="{FF2B5EF4-FFF2-40B4-BE49-F238E27FC236}">
-                <a16:creationId xmlns:a16="http://schemas.microsoft.com/office/drawing/2014/main" id="{1ED19A3E-4957-46AF-A0F3-A8B66C4C3D02}"/>
+          <p:cNvPr id="74" name="overview-name-Agent Gateway">
+            <a:extLst xmlns:a="http://schemas.openxmlformats.org/drawingml/2006/main">
+              <a:ext uri="{FF2B5EF4-FFF2-40B4-BE49-F238E27FC236}">
+                <a16:creationId xmlns:a16="http://schemas.microsoft.com/office/drawing/2014/main" id="{049E4586-44AB-4EC4-9BE6-59A688F09B55}"/>
               </a:ext>
             </a:extLst>
           </p:cNvPr>
@@ -4090,10 +4750,10 @@
       </p:sp>
       <p:sp>
         <p:nvSpPr>
-          <p:cNvPr id="62" name="overview-Shared">
-            <a:extLst xmlns:a="http://schemas.openxmlformats.org/drawingml/2006/main">
-              <a:ext uri="{FF2B5EF4-FFF2-40B4-BE49-F238E27FC236}">
-                <a16:creationId xmlns:a16="http://schemas.microsoft.com/office/drawing/2014/main" id="{07204EA6-4F43-45C0-9181-F585AD538F0B}"/>
+          <p:cNvPr id="75" name="overview-Shared">
+            <a:extLst xmlns:a="http://schemas.openxmlformats.org/drawingml/2006/main">
+              <a:ext uri="{FF2B5EF4-FFF2-40B4-BE49-F238E27FC236}">
+                <a16:creationId xmlns:a16="http://schemas.microsoft.com/office/drawing/2014/main" id="{7DCACDBD-8F04-48D7-A14C-B4352ED1E801}"/>
               </a:ext>
             </a:extLst>
           </p:cNvPr>
@@ -4123,10 +4783,10 @@
       </p:sp>
       <p:sp>
         <p:nvSpPr>
-          <p:cNvPr id="63" name="overview-Shared-label">
-            <a:extLst xmlns:a="http://schemas.openxmlformats.org/drawingml/2006/main">
-              <a:ext uri="{FF2B5EF4-FFF2-40B4-BE49-F238E27FC236}">
-                <a16:creationId xmlns:a16="http://schemas.microsoft.com/office/drawing/2014/main" id="{334737E3-C55A-4042-8A4B-9154A325D520}"/>
+          <p:cNvPr id="76" name="overview-Shared-label">
+            <a:extLst xmlns:a="http://schemas.openxmlformats.org/drawingml/2006/main">
+              <a:ext uri="{FF2B5EF4-FFF2-40B4-BE49-F238E27FC236}">
+                <a16:creationId xmlns:a16="http://schemas.microsoft.com/office/drawing/2014/main" id="{35118724-3179-4EDC-8CF3-0CE5DC055862}"/>
               </a:ext>
             </a:extLst>
           </p:cNvPr>
@@ -4181,10 +4841,10 @@
       </p:sp>
       <p:sp>
         <p:nvSpPr>
-          <p:cNvPr id="64" name="overview-component-State Store">
-            <a:extLst xmlns:a="http://schemas.openxmlformats.org/drawingml/2006/main">
-              <a:ext uri="{FF2B5EF4-FFF2-40B4-BE49-F238E27FC236}">
-                <a16:creationId xmlns:a16="http://schemas.microsoft.com/office/drawing/2014/main" id="{B11F1CB5-88C5-4555-AB46-8AD835B0137D}"/>
+          <p:cNvPr id="77" name="overview-component-State Store">
+            <a:extLst xmlns:a="http://schemas.openxmlformats.org/drawingml/2006/main">
+              <a:ext uri="{FF2B5EF4-FFF2-40B4-BE49-F238E27FC236}">
+                <a16:creationId xmlns:a16="http://schemas.microsoft.com/office/drawing/2014/main" id="{8DB15C76-A40F-4752-8C92-AA89EA15F4F5}"/>
               </a:ext>
             </a:extLst>
           </p:cNvPr>
@@ -4214,10 +4874,10 @@
       </p:sp>
       <p:sp>
         <p:nvSpPr>
-          <p:cNvPr id="65" name="overview-name-State Store">
-            <a:extLst xmlns:a="http://schemas.openxmlformats.org/drawingml/2006/main">
-              <a:ext uri="{FF2B5EF4-FFF2-40B4-BE49-F238E27FC236}">
-                <a16:creationId xmlns:a16="http://schemas.microsoft.com/office/drawing/2014/main" id="{AF2A75E7-59C9-462F-994F-FC407639792C}"/>
+          <p:cNvPr id="78" name="overview-name-State Store">
+            <a:extLst xmlns:a="http://schemas.openxmlformats.org/drawingml/2006/main">
+              <a:ext uri="{FF2B5EF4-FFF2-40B4-BE49-F238E27FC236}">
+                <a16:creationId xmlns:a16="http://schemas.microsoft.com/office/drawing/2014/main" id="{C04D2307-C7C3-4318-B8D0-DAD0DCCE8344}"/>
               </a:ext>
             </a:extLst>
           </p:cNvPr>
@@ -4272,10 +4932,10 @@
       </p:sp>
       <p:sp>
         <p:nvSpPr>
-          <p:cNvPr id="66" name="overview-component-Model Access">
-            <a:extLst xmlns:a="http://schemas.openxmlformats.org/drawingml/2006/main">
-              <a:ext uri="{FF2B5EF4-FFF2-40B4-BE49-F238E27FC236}">
-                <a16:creationId xmlns:a16="http://schemas.microsoft.com/office/drawing/2014/main" id="{9586494B-F25D-42E5-87F5-117EC35D87DB}"/>
+          <p:cNvPr id="79" name="overview-component-Model Access">
+            <a:extLst xmlns:a="http://schemas.openxmlformats.org/drawingml/2006/main">
+              <a:ext uri="{FF2B5EF4-FFF2-40B4-BE49-F238E27FC236}">
+                <a16:creationId xmlns:a16="http://schemas.microsoft.com/office/drawing/2014/main" id="{7C955D5F-BF32-4962-915B-6F6B0C41FA8B}"/>
               </a:ext>
             </a:extLst>
           </p:cNvPr>
@@ -4305,10 +4965,10 @@
       </p:sp>
       <p:sp>
         <p:nvSpPr>
-          <p:cNvPr id="67" name="overview-name-Model Access">
-            <a:extLst xmlns:a="http://schemas.openxmlformats.org/drawingml/2006/main">
-              <a:ext uri="{FF2B5EF4-FFF2-40B4-BE49-F238E27FC236}">
-                <a16:creationId xmlns:a16="http://schemas.microsoft.com/office/drawing/2014/main" id="{AA1C104C-47C8-4954-B908-ABEC6E0268B8}"/>
+          <p:cNvPr id="80" name="overview-name-Model Access">
+            <a:extLst xmlns:a="http://schemas.openxmlformats.org/drawingml/2006/main">
+              <a:ext uri="{FF2B5EF4-FFF2-40B4-BE49-F238E27FC236}">
+                <a16:creationId xmlns:a16="http://schemas.microsoft.com/office/drawing/2014/main" id="{C88EF205-84AC-4C5E-BD98-D592DEE8E74C}"/>
               </a:ext>
             </a:extLst>
           </p:cNvPr>
@@ -4363,10 +5023,10 @@
       </p:sp>
       <p:sp>
         <p:nvSpPr>
-          <p:cNvPr id="68" name="overview-External-boundary">
-            <a:extLst xmlns:a="http://schemas.openxmlformats.org/drawingml/2006/main">
-              <a:ext uri="{FF2B5EF4-FFF2-40B4-BE49-F238E27FC236}">
-                <a16:creationId xmlns:a16="http://schemas.microsoft.com/office/drawing/2014/main" id="{479861B2-3098-4650-964B-D83E7E558878}"/>
+          <p:cNvPr id="81" name="overview-External-boundary">
+            <a:extLst xmlns:a="http://schemas.openxmlformats.org/drawingml/2006/main">
+              <a:ext uri="{FF2B5EF4-FFF2-40B4-BE49-F238E27FC236}">
+                <a16:creationId xmlns:a16="http://schemas.microsoft.com/office/drawing/2014/main" id="{4468BEAD-2D6B-4CA1-B88F-D85C9C8B2AB8}"/>
               </a:ext>
             </a:extLst>
           </p:cNvPr>
@@ -4396,10 +5056,10 @@
       </p:sp>
       <p:sp>
         <p:nvSpPr>
-          <p:cNvPr id="69" name="overview-External-label">
-            <a:extLst xmlns:a="http://schemas.openxmlformats.org/drawingml/2006/main">
-              <a:ext uri="{FF2B5EF4-FFF2-40B4-BE49-F238E27FC236}">
-                <a16:creationId xmlns:a16="http://schemas.microsoft.com/office/drawing/2014/main" id="{9CB3EAD1-CC67-4944-8857-1137B1A58448}"/>
+          <p:cNvPr id="82" name="overview-External-label">
+            <a:extLst xmlns:a="http://schemas.openxmlformats.org/drawingml/2006/main">
+              <a:ext uri="{FF2B5EF4-FFF2-40B4-BE49-F238E27FC236}">
+                <a16:creationId xmlns:a16="http://schemas.microsoft.com/office/drawing/2014/main" id="{2070E664-1378-40E8-865B-6A34F38FD443}"/>
               </a:ext>
             </a:extLst>
           </p:cNvPr>
@@ -4454,10 +5114,10 @@
       </p:sp>
       <p:sp>
         <p:nvSpPr>
-          <p:cNvPr id="70" name="overview-component-Context Sources">
-            <a:extLst xmlns:a="http://schemas.openxmlformats.org/drawingml/2006/main">
-              <a:ext uri="{FF2B5EF4-FFF2-40B4-BE49-F238E27FC236}">
-                <a16:creationId xmlns:a16="http://schemas.microsoft.com/office/drawing/2014/main" id="{516B78C6-5823-499A-A4B0-0AEBCB319886}"/>
+          <p:cNvPr id="83" name="overview-component-Context Sources">
+            <a:extLst xmlns:a="http://schemas.openxmlformats.org/drawingml/2006/main">
+              <a:ext uri="{FF2B5EF4-FFF2-40B4-BE49-F238E27FC236}">
+                <a16:creationId xmlns:a16="http://schemas.microsoft.com/office/drawing/2014/main" id="{BE81075E-A92F-4D40-B9D4-DF438D10168E}"/>
               </a:ext>
             </a:extLst>
           </p:cNvPr>
@@ -4487,10 +5147,10 @@
       </p:sp>
       <p:sp>
         <p:nvSpPr>
-          <p:cNvPr id="71" name="overview-name-Context Sources">
-            <a:extLst xmlns:a="http://schemas.openxmlformats.org/drawingml/2006/main">
-              <a:ext uri="{FF2B5EF4-FFF2-40B4-BE49-F238E27FC236}">
-                <a16:creationId xmlns:a16="http://schemas.microsoft.com/office/drawing/2014/main" id="{2B517FC9-80D8-4F6E-9180-10AE21411DF0}"/>
+          <p:cNvPr id="84" name="overview-name-Context Sources">
+            <a:extLst xmlns:a="http://schemas.openxmlformats.org/drawingml/2006/main">
+              <a:ext uri="{FF2B5EF4-FFF2-40B4-BE49-F238E27FC236}">
+                <a16:creationId xmlns:a16="http://schemas.microsoft.com/office/drawing/2014/main" id="{2FAFE2F4-67D2-41D0-9B67-167C1EC50335}"/>
               </a:ext>
             </a:extLst>
           </p:cNvPr>
@@ -4545,10 +5205,10 @@
       </p:sp>
       <p:sp>
         <p:nvSpPr>
-          <p:cNvPr id="72" name="overview-component-Downstream Agents">
-            <a:extLst xmlns:a="http://schemas.openxmlformats.org/drawingml/2006/main">
-              <a:ext uri="{FF2B5EF4-FFF2-40B4-BE49-F238E27FC236}">
-                <a16:creationId xmlns:a16="http://schemas.microsoft.com/office/drawing/2014/main" id="{EBE070EC-2F31-44BC-B096-36F074F46B85}"/>
+          <p:cNvPr id="85" name="overview-component-Downstream Agents">
+            <a:extLst xmlns:a="http://schemas.openxmlformats.org/drawingml/2006/main">
+              <a:ext uri="{FF2B5EF4-FFF2-40B4-BE49-F238E27FC236}">
+                <a16:creationId xmlns:a16="http://schemas.microsoft.com/office/drawing/2014/main" id="{325498E5-EE7A-4CE6-8D76-2A1FAC17DAB5}"/>
               </a:ext>
             </a:extLst>
           </p:cNvPr>
@@ -4578,10 +5238,10 @@
       </p:sp>
       <p:sp>
         <p:nvSpPr>
-          <p:cNvPr id="73" name="overview-name-Downstream Agents">
-            <a:extLst xmlns:a="http://schemas.openxmlformats.org/drawingml/2006/main">
-              <a:ext uri="{FF2B5EF4-FFF2-40B4-BE49-F238E27FC236}">
-                <a16:creationId xmlns:a16="http://schemas.microsoft.com/office/drawing/2014/main" id="{50B4C4CF-BC53-4F6F-B078-A05B0F6373EF}"/>
+          <p:cNvPr id="86" name="overview-name-Downstream Agents">
+            <a:extLst xmlns:a="http://schemas.openxmlformats.org/drawingml/2006/main">
+              <a:ext uri="{FF2B5EF4-FFF2-40B4-BE49-F238E27FC236}">
+                <a16:creationId xmlns:a16="http://schemas.microsoft.com/office/drawing/2014/main" id="{CB888E71-FF3A-4BF4-A35D-C834EA91CE20}"/>
               </a:ext>
             </a:extLst>
           </p:cNvPr>
@@ -4636,10 +5296,10 @@
       </p:sp>
       <p:sp>
         <p:nvSpPr>
-          <p:cNvPr id="74" name="overview-Model-runtime">
-            <a:extLst xmlns:a="http://schemas.openxmlformats.org/drawingml/2006/main">
-              <a:ext uri="{FF2B5EF4-FFF2-40B4-BE49-F238E27FC236}">
-                <a16:creationId xmlns:a16="http://schemas.microsoft.com/office/drawing/2014/main" id="{50D1BFEA-DC94-41EB-9C0E-60F70D5A5909}"/>
+          <p:cNvPr id="87" name="overview-Model-runtime">
+            <a:extLst xmlns:a="http://schemas.openxmlformats.org/drawingml/2006/main">
+              <a:ext uri="{FF2B5EF4-FFF2-40B4-BE49-F238E27FC236}">
+                <a16:creationId xmlns:a16="http://schemas.microsoft.com/office/drawing/2014/main" id="{D4B4485E-D4E7-4E0F-8BE2-8DAFF861E64B}"/>
               </a:ext>
             </a:extLst>
           </p:cNvPr>
@@ -4669,10 +5329,10 @@
       </p:sp>
       <p:sp>
         <p:nvSpPr>
-          <p:cNvPr id="75" name="overview-Model-runtime-label">
-            <a:extLst xmlns:a="http://schemas.openxmlformats.org/drawingml/2006/main">
-              <a:ext uri="{FF2B5EF4-FFF2-40B4-BE49-F238E27FC236}">
-                <a16:creationId xmlns:a16="http://schemas.microsoft.com/office/drawing/2014/main" id="{2AA163DD-9E96-4145-9139-A77184EE096D}"/>
+          <p:cNvPr id="88" name="overview-Model-runtime-label">
+            <a:extLst xmlns:a="http://schemas.openxmlformats.org/drawingml/2006/main">
+              <a:ext uri="{FF2B5EF4-FFF2-40B4-BE49-F238E27FC236}">
+                <a16:creationId xmlns:a16="http://schemas.microsoft.com/office/drawing/2014/main" id="{FCF21818-A223-494E-91B0-BCE7EC92D67E}"/>
               </a:ext>
             </a:extLst>
           </p:cNvPr>
@@ -4720,17 +5380,17 @@
                 <a:ea typeface="Apple SD Gothic Neo"/>
                 <a:cs typeface="Apple SD Gothic Neo"/>
               </a:rPr>
-              <a:t>Model Runtime</a:t>
+              <a:t>Cloud Model Runtime</a:t>
             </a:r>
           </a:p>
         </p:txBody>
       </p:sp>
       <p:sp>
         <p:nvSpPr>
-          <p:cNvPr id="76" name="overview-component-LLM Omni">
-            <a:extLst xmlns:a="http://schemas.openxmlformats.org/drawingml/2006/main">
-              <a:ext uri="{FF2B5EF4-FFF2-40B4-BE49-F238E27FC236}">
-                <a16:creationId xmlns:a16="http://schemas.microsoft.com/office/drawing/2014/main" id="{D97DB5CF-A55A-467E-AFE8-9C3ED3837599}"/>
+          <p:cNvPr id="89" name="overview-component-음성 모델">
+            <a:extLst xmlns:a="http://schemas.openxmlformats.org/drawingml/2006/main">
+              <a:ext uri="{FF2B5EF4-FFF2-40B4-BE49-F238E27FC236}">
+                <a16:creationId xmlns:a16="http://schemas.microsoft.com/office/drawing/2014/main" id="{73112365-6EA3-4C63-B7C9-7F4E911E6556}"/>
               </a:ext>
             </a:extLst>
           </p:cNvPr>
@@ -4760,10 +5420,10 @@
       </p:sp>
       <p:sp>
         <p:nvSpPr>
-          <p:cNvPr id="77" name="overview-name-LLM Omni">
-            <a:extLst xmlns:a="http://schemas.openxmlformats.org/drawingml/2006/main">
-              <a:ext uri="{FF2B5EF4-FFF2-40B4-BE49-F238E27FC236}">
-                <a16:creationId xmlns:a16="http://schemas.microsoft.com/office/drawing/2014/main" id="{EE20AFB6-C0DD-4A0A-BACA-34D72F5CA405}"/>
+          <p:cNvPr id="90" name="overview-name-음성 모델">
+            <a:extLst xmlns:a="http://schemas.openxmlformats.org/drawingml/2006/main">
+              <a:ext uri="{FF2B5EF4-FFF2-40B4-BE49-F238E27FC236}">
+                <a16:creationId xmlns:a16="http://schemas.microsoft.com/office/drawing/2014/main" id="{08145815-739F-4B46-A752-A183878634CA}"/>
               </a:ext>
             </a:extLst>
           </p:cNvPr>
@@ -4811,17 +5471,17 @@
                 <a:ea typeface="Apple SD Gothic Neo"/>
                 <a:cs typeface="Apple SD Gothic Neo"/>
               </a:rPr>
-              <a:t>LLM Omni</a:t>
+              <a:t>음성 모델</a:t>
             </a:r>
           </a:p>
         </p:txBody>
       </p:sp>
       <p:sp>
         <p:nvSpPr>
-          <p:cNvPr id="78" name="overview-component-Streaming ASR">
-            <a:extLst xmlns:a="http://schemas.openxmlformats.org/drawingml/2006/main">
-              <a:ext uri="{FF2B5EF4-FFF2-40B4-BE49-F238E27FC236}">
-                <a16:creationId xmlns:a16="http://schemas.microsoft.com/office/drawing/2014/main" id="{DC5484AB-5B41-4A40-9E6F-632253D94B6B}"/>
+          <p:cNvPr id="91" name="overview-component-의미 LLM">
+            <a:extLst xmlns:a="http://schemas.openxmlformats.org/drawingml/2006/main">
+              <a:ext uri="{FF2B5EF4-FFF2-40B4-BE49-F238E27FC236}">
+                <a16:creationId xmlns:a16="http://schemas.microsoft.com/office/drawing/2014/main" id="{A9C7AEAD-6EDD-4BFB-803F-D8F8641AB2AF}"/>
               </a:ext>
             </a:extLst>
           </p:cNvPr>
@@ -4851,10 +5511,10 @@
       </p:sp>
       <p:sp>
         <p:nvSpPr>
-          <p:cNvPr id="79" name="overview-name-Streaming ASR">
-            <a:extLst xmlns:a="http://schemas.openxmlformats.org/drawingml/2006/main">
-              <a:ext uri="{FF2B5EF4-FFF2-40B4-BE49-F238E27FC236}">
-                <a16:creationId xmlns:a16="http://schemas.microsoft.com/office/drawing/2014/main" id="{43C2DAF2-E044-417B-BAD0-2AF4C6BE99AD}"/>
+          <p:cNvPr id="92" name="overview-name-의미 LLM">
+            <a:extLst xmlns:a="http://schemas.openxmlformats.org/drawingml/2006/main">
+              <a:ext uri="{FF2B5EF4-FFF2-40B4-BE49-F238E27FC236}">
+                <a16:creationId xmlns:a16="http://schemas.microsoft.com/office/drawing/2014/main" id="{46640195-5AB9-4311-A44B-668281A2A039}"/>
               </a:ext>
             </a:extLst>
           </p:cNvPr>
@@ -4902,17 +5562,17 @@
                 <a:ea typeface="Apple SD Gothic Neo"/>
                 <a:cs typeface="Apple SD Gothic Neo"/>
               </a:rPr>
-              <a:t>Streaming ASR</a:t>
+              <a:t>의미 LLM</a:t>
             </a:r>
           </a:p>
         </p:txBody>
       </p:sp>
       <p:sp>
         <p:nvSpPr>
-          <p:cNvPr id="80" name="overview-dp44-interaction-and-control">
-            <a:extLst xmlns:a="http://schemas.openxmlformats.org/drawingml/2006/main">
-              <a:ext uri="{FF2B5EF4-FFF2-40B4-BE49-F238E27FC236}">
-                <a16:creationId xmlns:a16="http://schemas.microsoft.com/office/drawing/2014/main" id="{1987472F-A111-4121-802C-9B7BE9B8DC1D}"/>
+          <p:cNvPr id="93" name="overview-dp44-interaction-and-control">
+            <a:extLst xmlns:a="http://schemas.openxmlformats.org/drawingml/2006/main">
+              <a:ext uri="{FF2B5EF4-FFF2-40B4-BE49-F238E27FC236}">
+                <a16:creationId xmlns:a16="http://schemas.microsoft.com/office/drawing/2014/main" id="{8155A883-55CA-4C69-A00E-94D0ABE3A153}"/>
               </a:ext>
             </a:extLst>
           </p:cNvPr>
@@ -4964,10 +5624,10 @@
       </p:sp>
       <p:sp>
         <p:nvSpPr>
-          <p:cNvPr id="81" name="overview-tag-44-interaction">
-            <a:extLst xmlns:a="http://schemas.openxmlformats.org/drawingml/2006/main">
-              <a:ext uri="{FF2B5EF4-FFF2-40B4-BE49-F238E27FC236}">
-                <a16:creationId xmlns:a16="http://schemas.microsoft.com/office/drawing/2014/main" id="{3FADC77F-ECCC-49FB-BB13-4CAE848F31DD}"/>
+          <p:cNvPr id="94" name="overview-tag-44-interaction">
+            <a:extLst xmlns:a="http://schemas.openxmlformats.org/drawingml/2006/main">
+              <a:ext uri="{FF2B5EF4-FFF2-40B4-BE49-F238E27FC236}">
+                <a16:creationId xmlns:a16="http://schemas.microsoft.com/office/drawing/2014/main" id="{C9AC9D45-BFC1-4646-AFD1-93C69A20FE6E}"/>
               </a:ext>
             </a:extLst>
           </p:cNvPr>
@@ -4997,10 +5657,10 @@
       </p:sp>
       <p:sp>
         <p:nvSpPr>
-          <p:cNvPr id="82" name="overview-tag-text-44-interaction">
-            <a:extLst xmlns:a="http://schemas.openxmlformats.org/drawingml/2006/main">
-              <a:ext uri="{FF2B5EF4-FFF2-40B4-BE49-F238E27FC236}">
-                <a16:creationId xmlns:a16="http://schemas.microsoft.com/office/drawing/2014/main" id="{6110B6C5-3F8F-4F19-921C-6BCA96C27A7C}"/>
+          <p:cNvPr id="95" name="overview-tag-text-44-interaction">
+            <a:extLst xmlns:a="http://schemas.openxmlformats.org/drawingml/2006/main">
+              <a:ext uri="{FF2B5EF4-FFF2-40B4-BE49-F238E27FC236}">
+                <a16:creationId xmlns:a16="http://schemas.microsoft.com/office/drawing/2014/main" id="{050FDA99-9E25-4FEA-B995-EB94CC224FE1}"/>
               </a:ext>
             </a:extLst>
           </p:cNvPr>
@@ -5055,10 +5715,10 @@
       </p:sp>
       <p:sp>
         <p:nvSpPr>
-          <p:cNvPr id="83" name="overview-dp41-resolution-control">
-            <a:extLst xmlns:a="http://schemas.openxmlformats.org/drawingml/2006/main">
-              <a:ext uri="{FF2B5EF4-FFF2-40B4-BE49-F238E27FC236}">
-                <a16:creationId xmlns:a16="http://schemas.microsoft.com/office/drawing/2014/main" id="{81B334E1-0AD8-4CFB-9367-57E3F369EDC4}"/>
+          <p:cNvPr id="96" name="overview-dp41-resolution-control">
+            <a:extLst xmlns:a="http://schemas.openxmlformats.org/drawingml/2006/main">
+              <a:ext uri="{FF2B5EF4-FFF2-40B4-BE49-F238E27FC236}">
+                <a16:creationId xmlns:a16="http://schemas.microsoft.com/office/drawing/2014/main" id="{618DD39E-BF49-4BF3-9267-DEDC4344382F}"/>
               </a:ext>
             </a:extLst>
           </p:cNvPr>
@@ -5086,10 +5746,10 @@
       </p:sp>
       <p:sp>
         <p:nvSpPr>
-          <p:cNvPr id="84" name="overview-tag-41-resolution">
-            <a:extLst xmlns:a="http://schemas.openxmlformats.org/drawingml/2006/main">
-              <a:ext uri="{FF2B5EF4-FFF2-40B4-BE49-F238E27FC236}">
-                <a16:creationId xmlns:a16="http://schemas.microsoft.com/office/drawing/2014/main" id="{5E84ACA3-01F5-44D4-A7A8-D75E73C5D329}"/>
+          <p:cNvPr id="97" name="overview-tag-41-resolution">
+            <a:extLst xmlns:a="http://schemas.openxmlformats.org/drawingml/2006/main">
+              <a:ext uri="{FF2B5EF4-FFF2-40B4-BE49-F238E27FC236}">
+                <a16:creationId xmlns:a16="http://schemas.microsoft.com/office/drawing/2014/main" id="{47BF70B7-A106-4E0A-A576-49141A5017C2}"/>
               </a:ext>
             </a:extLst>
           </p:cNvPr>
@@ -5119,10 +5779,10 @@
       </p:sp>
       <p:sp>
         <p:nvSpPr>
-          <p:cNvPr id="85" name="overview-tag-text-41-resolution">
-            <a:extLst xmlns:a="http://schemas.openxmlformats.org/drawingml/2006/main">
-              <a:ext uri="{FF2B5EF4-FFF2-40B4-BE49-F238E27FC236}">
-                <a16:creationId xmlns:a16="http://schemas.microsoft.com/office/drawing/2014/main" id="{BF57437B-D8C6-4D28-AFAF-3B21ADD7F9C4}"/>
+          <p:cNvPr id="98" name="overview-tag-text-41-resolution">
+            <a:extLst xmlns:a="http://schemas.openxmlformats.org/drawingml/2006/main">
+              <a:ext uri="{FF2B5EF4-FFF2-40B4-BE49-F238E27FC236}">
+                <a16:creationId xmlns:a16="http://schemas.microsoft.com/office/drawing/2014/main" id="{0353F6F6-190E-4B13-8745-AF76511FD8D8}"/>
               </a:ext>
             </a:extLst>
           </p:cNvPr>
@@ -5177,10 +5837,10 @@
       </p:sp>
       <p:sp>
         <p:nvSpPr>
-          <p:cNvPr id="86" name="overview-dp41-tag-link">
-            <a:extLst xmlns:a="http://schemas.openxmlformats.org/drawingml/2006/main">
-              <a:ext uri="{FF2B5EF4-FFF2-40B4-BE49-F238E27FC236}">
-                <a16:creationId xmlns:a16="http://schemas.microsoft.com/office/drawing/2014/main" id="{205F8EDC-4921-4872-BCCF-C50C897F4E1A}"/>
+          <p:cNvPr id="99" name="overview-dp41-tag-link">
+            <a:extLst xmlns:a="http://schemas.openxmlformats.org/drawingml/2006/main">
+              <a:ext uri="{FF2B5EF4-FFF2-40B4-BE49-F238E27FC236}">
+                <a16:creationId xmlns:a16="http://schemas.microsoft.com/office/drawing/2014/main" id="{F0AB8F29-A821-4DF2-AC5B-09B557066BE5}"/>
               </a:ext>
             </a:extLst>
           </p:cNvPr>
@@ -5217,22 +5877,22 @@
       </p:sp>
       <p:sp>
         <p:nvSpPr>
-          <p:cNvPr id="87" name="overview-dp43-semantic-production">
-            <a:extLst xmlns:a="http://schemas.openxmlformats.org/drawingml/2006/main">
-              <a:ext uri="{FF2B5EF4-FFF2-40B4-BE49-F238E27FC236}">
-                <a16:creationId xmlns:a16="http://schemas.microsoft.com/office/drawing/2014/main" id="{8A44B922-A929-4969-A2C9-D550256740C7}"/>
-              </a:ext>
-            </a:extLst>
-          </p:cNvPr>
-          <p:cNvSpPr>
-            <a:spLocks xmlns:a="http://schemas.openxmlformats.org/drawingml/2006/main" noGrp="1"/>
-          </p:cNvSpPr>
-          <p:nvPr/>
-        </p:nvSpPr>
-        <p:spPr>
-          <a:xfrm xmlns:a="http://schemas.openxmlformats.org/drawingml/2006/main">
-            <a:off x="13211175" y="4010025"/>
-            <a:ext cx="4229100" cy="600075"/>
+          <p:cNvPr id="100" name="overview-dp42-dialogue-authority">
+            <a:extLst xmlns:a="http://schemas.openxmlformats.org/drawingml/2006/main">
+              <a:ext uri="{FF2B5EF4-FFF2-40B4-BE49-F238E27FC236}">
+                <a16:creationId xmlns:a16="http://schemas.microsoft.com/office/drawing/2014/main" id="{972BD342-6CD2-49C0-8124-56DF0B46C676}"/>
+              </a:ext>
+            </a:extLst>
+          </p:cNvPr>
+          <p:cNvSpPr>
+            <a:spLocks xmlns:a="http://schemas.openxmlformats.org/drawingml/2006/main" noGrp="1"/>
+          </p:cNvSpPr>
+          <p:nvPr/>
+        </p:nvSpPr>
+        <p:spPr>
+          <a:xfrm xmlns:a="http://schemas.openxmlformats.org/drawingml/2006/main">
+            <a:off x="8858250" y="4010025"/>
+            <a:ext cx="4210050" cy="600075"/>
           </a:xfrm>
           <a:prstGeom xmlns:a="http://schemas.openxmlformats.org/drawingml/2006/main" prst="rect">
             <a:avLst/>
@@ -5240,7 +5900,7 @@
           <a:noFill xmlns:a="http://schemas.openxmlformats.org/drawingml/2006/main"/>
           <a:ln xmlns:a="http://schemas.openxmlformats.org/drawingml/2006/main" w="38100">
             <a:solidFill>
-              <a:srgbClr val="E73338"/>
+              <a:srgbClr val="2463DD"/>
             </a:solidFill>
             <a:prstDash val="dash"/>
           </a:ln>
@@ -5248,32 +5908,32 @@
       </p:sp>
       <p:sp>
         <p:nvSpPr>
-          <p:cNvPr id="88" name="overview-tag-43-production">
-            <a:extLst xmlns:a="http://schemas.openxmlformats.org/drawingml/2006/main">
-              <a:ext uri="{FF2B5EF4-FFF2-40B4-BE49-F238E27FC236}">
-                <a16:creationId xmlns:a16="http://schemas.microsoft.com/office/drawing/2014/main" id="{45A3BADA-B237-4292-B594-7B28A12AB957}"/>
-              </a:ext>
-            </a:extLst>
-          </p:cNvPr>
-          <p:cNvSpPr>
-            <a:spLocks xmlns:a="http://schemas.openxmlformats.org/drawingml/2006/main" noGrp="1"/>
-          </p:cNvSpPr>
-          <p:nvPr/>
-        </p:nvSpPr>
-        <p:spPr>
-          <a:xfrm xmlns:a="http://schemas.openxmlformats.org/drawingml/2006/main">
-            <a:off x="16344900" y="3495675"/>
+          <p:cNvPr id="101" name="overview-tag-42-dialogue">
+            <a:extLst xmlns:a="http://schemas.openxmlformats.org/drawingml/2006/main">
+              <a:ext uri="{FF2B5EF4-FFF2-40B4-BE49-F238E27FC236}">
+                <a16:creationId xmlns:a16="http://schemas.microsoft.com/office/drawing/2014/main" id="{48D07129-7BFE-4338-ACAE-4723C40C8682}"/>
+              </a:ext>
+            </a:extLst>
+          </p:cNvPr>
+          <p:cNvSpPr>
+            <a:spLocks xmlns:a="http://schemas.openxmlformats.org/drawingml/2006/main" noGrp="1"/>
+          </p:cNvSpPr>
+          <p:nvPr/>
+        </p:nvSpPr>
+        <p:spPr>
+          <a:xfrm xmlns:a="http://schemas.openxmlformats.org/drawingml/2006/main">
+            <a:off x="11125200" y="3495675"/>
             <a:ext cx="1000125" cy="342900"/>
           </a:xfrm>
           <a:prstGeom xmlns:a="http://schemas.openxmlformats.org/drawingml/2006/main" prst="rect">
             <a:avLst/>
           </a:prstGeom>
           <a:solidFill xmlns:a="http://schemas.openxmlformats.org/drawingml/2006/main">
-            <a:srgbClr val="FFE5E6"/>
+            <a:srgbClr val="E4EDFF"/>
           </a:solidFill>
           <a:ln xmlns:a="http://schemas.openxmlformats.org/drawingml/2006/main" w="28575">
             <a:solidFill>
-              <a:srgbClr val="E73338"/>
+              <a:srgbClr val="2463DD"/>
             </a:solidFill>
             <a:prstDash val="solid"/>
           </a:ln>
@@ -5281,21 +5941,21 @@
       </p:sp>
       <p:sp>
         <p:nvSpPr>
-          <p:cNvPr id="89" name="overview-tag-text-43-production">
-            <a:extLst xmlns:a="http://schemas.openxmlformats.org/drawingml/2006/main">
-              <a:ext uri="{FF2B5EF4-FFF2-40B4-BE49-F238E27FC236}">
-                <a16:creationId xmlns:a16="http://schemas.microsoft.com/office/drawing/2014/main" id="{312C09E3-8693-4577-8A75-3A102849CE16}"/>
-              </a:ext>
-            </a:extLst>
-          </p:cNvPr>
-          <p:cNvSpPr>
-            <a:spLocks xmlns:a="http://schemas.openxmlformats.org/drawingml/2006/main" noGrp="1"/>
-          </p:cNvSpPr>
-          <p:nvPr/>
-        </p:nvSpPr>
-        <p:spPr>
-          <a:xfrm xmlns:a="http://schemas.openxmlformats.org/drawingml/2006/main">
-            <a:off x="16344900" y="3495675"/>
+          <p:cNvPr id="102" name="overview-tag-text-42-dialogue">
+            <a:extLst xmlns:a="http://schemas.openxmlformats.org/drawingml/2006/main">
+              <a:ext uri="{FF2B5EF4-FFF2-40B4-BE49-F238E27FC236}">
+                <a16:creationId xmlns:a16="http://schemas.microsoft.com/office/drawing/2014/main" id="{9BD8150C-7023-4E47-AE87-2170FA869D80}"/>
+              </a:ext>
+            </a:extLst>
+          </p:cNvPr>
+          <p:cNvSpPr>
+            <a:spLocks xmlns:a="http://schemas.openxmlformats.org/drawingml/2006/main" noGrp="1"/>
+          </p:cNvSpPr>
+          <p:nvPr/>
+        </p:nvSpPr>
+        <p:spPr>
+          <a:xfrm xmlns:a="http://schemas.openxmlformats.org/drawingml/2006/main">
+            <a:off x="11125200" y="3495675"/>
             <a:ext cx="1000125" cy="342900"/>
           </a:xfrm>
           <a:prstGeom xmlns:a="http://schemas.openxmlformats.org/drawingml/2006/main" prst="rect">
@@ -5332,28 +5992,28 @@
                 <a:ea typeface="Apple SD Gothic Neo"/>
                 <a:cs typeface="Apple SD Gothic Neo"/>
               </a:rPr>
-              <a:t>04-43</a:t>
+              <a:t>04-42</a:t>
             </a:r>
           </a:p>
         </p:txBody>
       </p:sp>
       <p:sp>
         <p:nvSpPr>
-          <p:cNvPr id="90" name="overview-dp43-tag-link">
-            <a:extLst xmlns:a="http://schemas.openxmlformats.org/drawingml/2006/main">
-              <a:ext uri="{FF2B5EF4-FFF2-40B4-BE49-F238E27FC236}">
-                <a16:creationId xmlns:a16="http://schemas.microsoft.com/office/drawing/2014/main" id="{4FF80992-D60A-48C6-8F56-E42953C453DC}"/>
-              </a:ext>
-            </a:extLst>
-          </p:cNvPr>
-          <p:cNvSpPr>
-            <a:spLocks xmlns:a="http://schemas.openxmlformats.org/drawingml/2006/main" noGrp="1"/>
-          </p:cNvSpPr>
-          <p:nvPr/>
-        </p:nvSpPr>
-        <p:spPr>
-          <a:xfrm xmlns:a="http://schemas.openxmlformats.org/drawingml/2006/main">
-            <a:off x="16840200" y="3838575"/>
+          <p:cNvPr id="103" name="overview-dp42-dialogue-tag-link">
+            <a:extLst xmlns:a="http://schemas.openxmlformats.org/drawingml/2006/main">
+              <a:ext uri="{FF2B5EF4-FFF2-40B4-BE49-F238E27FC236}">
+                <a16:creationId xmlns:a16="http://schemas.microsoft.com/office/drawing/2014/main" id="{CD209373-DC99-4E3C-9316-54B29A7B59F5}"/>
+              </a:ext>
+            </a:extLst>
+          </p:cNvPr>
+          <p:cNvSpPr>
+            <a:spLocks xmlns:a="http://schemas.openxmlformats.org/drawingml/2006/main" noGrp="1"/>
+          </p:cNvSpPr>
+          <p:nvPr/>
+        </p:nvSpPr>
+        <p:spPr>
+          <a:xfrm xmlns:a="http://schemas.openxmlformats.org/drawingml/2006/main">
+            <a:off x="11620500" y="3838575"/>
             <a:ext cx="953" cy="171450"/>
           </a:xfrm>
           <a:custGeom xmlns:a="http://schemas.openxmlformats.org/drawingml/2006/main">
@@ -5371,7 +6031,7 @@
           <a:noFill xmlns:a="http://schemas.openxmlformats.org/drawingml/2006/main"/>
           <a:ln xmlns:a="http://schemas.openxmlformats.org/drawingml/2006/main" w="28575">
             <a:solidFill>
-              <a:srgbClr val="E73338"/>
+              <a:srgbClr val="2463DD"/>
             </a:solidFill>
             <a:prstDash val="solid"/>
           </a:ln>
@@ -5379,22 +6039,22 @@
       </p:sp>
       <p:sp>
         <p:nvSpPr>
-          <p:cNvPr id="91" name="overview-dp42-dialogue-authority">
-            <a:extLst xmlns:a="http://schemas.openxmlformats.org/drawingml/2006/main">
-              <a:ext uri="{FF2B5EF4-FFF2-40B4-BE49-F238E27FC236}">
-                <a16:creationId xmlns:a16="http://schemas.microsoft.com/office/drawing/2014/main" id="{61360AD1-5A6E-4B6A-B5DA-1448CA2AD50F}"/>
-              </a:ext>
-            </a:extLst>
-          </p:cNvPr>
-          <p:cNvSpPr>
-            <a:spLocks xmlns:a="http://schemas.openxmlformats.org/drawingml/2006/main" noGrp="1"/>
-          </p:cNvSpPr>
-          <p:nvPr/>
-        </p:nvSpPr>
-        <p:spPr>
-          <a:xfrm xmlns:a="http://schemas.openxmlformats.org/drawingml/2006/main">
-            <a:off x="8858250" y="4010025"/>
-            <a:ext cx="4210050" cy="600075"/>
+          <p:cNvPr id="104" name="overview-dp42-work-authority">
+            <a:extLst xmlns:a="http://schemas.openxmlformats.org/drawingml/2006/main">
+              <a:ext uri="{FF2B5EF4-FFF2-40B4-BE49-F238E27FC236}">
+                <a16:creationId xmlns:a16="http://schemas.microsoft.com/office/drawing/2014/main" id="{13813961-2DAB-4B76-A620-849617853E5A}"/>
+              </a:ext>
+            </a:extLst>
+          </p:cNvPr>
+          <p:cNvSpPr>
+            <a:spLocks xmlns:a="http://schemas.openxmlformats.org/drawingml/2006/main" noGrp="1"/>
+          </p:cNvSpPr>
+          <p:nvPr/>
+        </p:nvSpPr>
+        <p:spPr>
+          <a:xfrm xmlns:a="http://schemas.openxmlformats.org/drawingml/2006/main">
+            <a:off x="8791575" y="5800725"/>
+            <a:ext cx="8715375" cy="657225"/>
           </a:xfrm>
           <a:prstGeom xmlns:a="http://schemas.openxmlformats.org/drawingml/2006/main" prst="rect">
             <a:avLst/>
@@ -5410,21 +6070,21 @@
       </p:sp>
       <p:sp>
         <p:nvSpPr>
-          <p:cNvPr id="92" name="overview-tag-42-dialogue">
-            <a:extLst xmlns:a="http://schemas.openxmlformats.org/drawingml/2006/main">
-              <a:ext uri="{FF2B5EF4-FFF2-40B4-BE49-F238E27FC236}">
-                <a16:creationId xmlns:a16="http://schemas.microsoft.com/office/drawing/2014/main" id="{89884329-4DAC-48F9-9BA5-890CA1CE4A1B}"/>
-              </a:ext>
-            </a:extLst>
-          </p:cNvPr>
-          <p:cNvSpPr>
-            <a:spLocks xmlns:a="http://schemas.openxmlformats.org/drawingml/2006/main" noGrp="1"/>
-          </p:cNvSpPr>
-          <p:nvPr/>
-        </p:nvSpPr>
-        <p:spPr>
-          <a:xfrm xmlns:a="http://schemas.openxmlformats.org/drawingml/2006/main">
-            <a:off x="11125200" y="3495675"/>
+          <p:cNvPr id="105" name="overview-tag-42-work">
+            <a:extLst xmlns:a="http://schemas.openxmlformats.org/drawingml/2006/main">
+              <a:ext uri="{FF2B5EF4-FFF2-40B4-BE49-F238E27FC236}">
+                <a16:creationId xmlns:a16="http://schemas.microsoft.com/office/drawing/2014/main" id="{B8BF9D41-0F7A-472D-B04D-4514F4E9BD6B}"/>
+              </a:ext>
+            </a:extLst>
+          </p:cNvPr>
+          <p:cNvSpPr>
+            <a:spLocks xmlns:a="http://schemas.openxmlformats.org/drawingml/2006/main" noGrp="1"/>
+          </p:cNvSpPr>
+          <p:nvPr/>
+        </p:nvSpPr>
+        <p:spPr>
+          <a:xfrm xmlns:a="http://schemas.openxmlformats.org/drawingml/2006/main">
+            <a:off x="16344900" y="6486525"/>
             <a:ext cx="1000125" cy="342900"/>
           </a:xfrm>
           <a:prstGeom xmlns:a="http://schemas.openxmlformats.org/drawingml/2006/main" prst="rect">
@@ -5443,21 +6103,21 @@
       </p:sp>
       <p:sp>
         <p:nvSpPr>
-          <p:cNvPr id="93" name="overview-tag-text-42-dialogue">
-            <a:extLst xmlns:a="http://schemas.openxmlformats.org/drawingml/2006/main">
-              <a:ext uri="{FF2B5EF4-FFF2-40B4-BE49-F238E27FC236}">
-                <a16:creationId xmlns:a16="http://schemas.microsoft.com/office/drawing/2014/main" id="{CD756C85-7426-4E8E-9290-3B63FA19C1DD}"/>
-              </a:ext>
-            </a:extLst>
-          </p:cNvPr>
-          <p:cNvSpPr>
-            <a:spLocks xmlns:a="http://schemas.openxmlformats.org/drawingml/2006/main" noGrp="1"/>
-          </p:cNvSpPr>
-          <p:nvPr/>
-        </p:nvSpPr>
-        <p:spPr>
-          <a:xfrm xmlns:a="http://schemas.openxmlformats.org/drawingml/2006/main">
-            <a:off x="11125200" y="3495675"/>
+          <p:cNvPr id="106" name="overview-tag-text-42-work">
+            <a:extLst xmlns:a="http://schemas.openxmlformats.org/drawingml/2006/main">
+              <a:ext uri="{FF2B5EF4-FFF2-40B4-BE49-F238E27FC236}">
+                <a16:creationId xmlns:a16="http://schemas.microsoft.com/office/drawing/2014/main" id="{5FB759DB-9A6C-400A-BFEE-34FA6000B142}"/>
+              </a:ext>
+            </a:extLst>
+          </p:cNvPr>
+          <p:cNvSpPr>
+            <a:spLocks xmlns:a="http://schemas.openxmlformats.org/drawingml/2006/main" noGrp="1"/>
+          </p:cNvSpPr>
+          <p:nvPr/>
+        </p:nvSpPr>
+        <p:spPr>
+          <a:xfrm xmlns:a="http://schemas.openxmlformats.org/drawingml/2006/main">
+            <a:off x="16344900" y="6486525"/>
             <a:ext cx="1000125" cy="342900"/>
           </a:xfrm>
           <a:prstGeom xmlns:a="http://schemas.openxmlformats.org/drawingml/2006/main" prst="rect">
@@ -5501,39 +6161,63 @@
       </p:sp>
       <p:sp>
         <p:nvSpPr>
-          <p:cNvPr id="94" name="overview-dp42-dialogue-tag-link">
-            <a:extLst xmlns:a="http://schemas.openxmlformats.org/drawingml/2006/main">
-              <a:ext uri="{FF2B5EF4-FFF2-40B4-BE49-F238E27FC236}">
-                <a16:creationId xmlns:a16="http://schemas.microsoft.com/office/drawing/2014/main" id="{D82759C1-AF12-4734-9FFC-947FFD7B4494}"/>
-              </a:ext>
-            </a:extLst>
-          </p:cNvPr>
-          <p:cNvSpPr>
-            <a:spLocks xmlns:a="http://schemas.openxmlformats.org/drawingml/2006/main" noGrp="1"/>
-          </p:cNvSpPr>
-          <p:nvPr/>
-        </p:nvSpPr>
-        <p:spPr>
-          <a:xfrm xmlns:a="http://schemas.openxmlformats.org/drawingml/2006/main">
-            <a:off x="11620500" y="3838575"/>
-            <a:ext cx="953" cy="171450"/>
-          </a:xfrm>
-          <a:custGeom xmlns:a="http://schemas.openxmlformats.org/drawingml/2006/main">
-            <a:pathLst>
-              <a:path w="953" h="171450">
-                <a:moveTo>
-                  <a:pt x="0" y="0"/>
-                </a:moveTo>
-                <a:lnTo>
-                  <a:pt x="0" y="171450"/>
-                </a:lnTo>
-              </a:path>
-            </a:pathLst>
-          </a:custGeom>
-          <a:noFill xmlns:a="http://schemas.openxmlformats.org/drawingml/2006/main"/>
+          <p:cNvPr id="107" name="overview-dp45-context-production">
+            <a:extLst xmlns:a="http://schemas.openxmlformats.org/drawingml/2006/main">
+              <a:ext uri="{FF2B5EF4-FFF2-40B4-BE49-F238E27FC236}">
+                <a16:creationId xmlns:a16="http://schemas.microsoft.com/office/drawing/2014/main" id="{34199849-1520-46B4-A3BD-5008B9DA8D89}"/>
+              </a:ext>
+            </a:extLst>
+          </p:cNvPr>
+          <p:cNvSpPr>
+            <a:spLocks xmlns:a="http://schemas.openxmlformats.org/drawingml/2006/main" noGrp="1"/>
+          </p:cNvSpPr>
+          <p:nvPr/>
+        </p:nvSpPr>
+        <p:spPr>
+          <a:xfrm xmlns:a="http://schemas.openxmlformats.org/drawingml/2006/main">
+            <a:off x="8791575" y="4886325"/>
+            <a:ext cx="4333875" cy="676275"/>
+          </a:xfrm>
+          <a:prstGeom xmlns:a="http://schemas.openxmlformats.org/drawingml/2006/main" prst="rect">
+            <a:avLst/>
+          </a:prstGeom>
+          <a:noFill xmlns:a="http://schemas.openxmlformats.org/drawingml/2006/main"/>
+          <a:ln xmlns:a="http://schemas.openxmlformats.org/drawingml/2006/main" w="38100">
+            <a:solidFill>
+              <a:srgbClr val="8D49B8"/>
+            </a:solidFill>
+            <a:prstDash val="dash"/>
+          </a:ln>
+        </p:spPr>
+      </p:sp>
+      <p:sp>
+        <p:nvSpPr>
+          <p:cNvPr id="108" name="overview-tag-45-context">
+            <a:extLst xmlns:a="http://schemas.openxmlformats.org/drawingml/2006/main">
+              <a:ext uri="{FF2B5EF4-FFF2-40B4-BE49-F238E27FC236}">
+                <a16:creationId xmlns:a16="http://schemas.microsoft.com/office/drawing/2014/main" id="{58B80AB7-FB2F-4483-9363-92589F3C7BD1}"/>
+              </a:ext>
+            </a:extLst>
+          </p:cNvPr>
+          <p:cNvSpPr>
+            <a:spLocks xmlns:a="http://schemas.openxmlformats.org/drawingml/2006/main" noGrp="1"/>
+          </p:cNvSpPr>
+          <p:nvPr/>
+        </p:nvSpPr>
+        <p:spPr>
+          <a:xfrm xmlns:a="http://schemas.openxmlformats.org/drawingml/2006/main">
+            <a:off x="11858625" y="4695825"/>
+            <a:ext cx="1000125" cy="266700"/>
+          </a:xfrm>
+          <a:prstGeom xmlns:a="http://schemas.openxmlformats.org/drawingml/2006/main" prst="rect">
+            <a:avLst/>
+          </a:prstGeom>
+          <a:solidFill xmlns:a="http://schemas.openxmlformats.org/drawingml/2006/main">
+            <a:srgbClr val="F1E5FA"/>
+          </a:solidFill>
           <a:ln xmlns:a="http://schemas.openxmlformats.org/drawingml/2006/main" w="28575">
             <a:solidFill>
-              <a:srgbClr val="2463DD"/>
+              <a:srgbClr val="8D49B8"/>
             </a:solidFill>
             <a:prstDash val="solid"/>
           </a:ln>
@@ -5541,22 +6225,80 @@
       </p:sp>
       <p:sp>
         <p:nvSpPr>
-          <p:cNvPr id="95" name="overview-dp42-work-authority">
-            <a:extLst xmlns:a="http://schemas.openxmlformats.org/drawingml/2006/main">
-              <a:ext uri="{FF2B5EF4-FFF2-40B4-BE49-F238E27FC236}">
-                <a16:creationId xmlns:a16="http://schemas.microsoft.com/office/drawing/2014/main" id="{F892980D-3FC3-465A-8BA0-556D65A8C165}"/>
-              </a:ext>
-            </a:extLst>
-          </p:cNvPr>
-          <p:cNvSpPr>
-            <a:spLocks xmlns:a="http://schemas.openxmlformats.org/drawingml/2006/main" noGrp="1"/>
-          </p:cNvSpPr>
-          <p:nvPr/>
-        </p:nvSpPr>
-        <p:spPr>
-          <a:xfrm xmlns:a="http://schemas.openxmlformats.org/drawingml/2006/main">
-            <a:off x="8791575" y="5800725"/>
-            <a:ext cx="8715375" cy="657225"/>
+          <p:cNvPr id="109" name="overview-tag-text-45-context">
+            <a:extLst xmlns:a="http://schemas.openxmlformats.org/drawingml/2006/main">
+              <a:ext uri="{FF2B5EF4-FFF2-40B4-BE49-F238E27FC236}">
+                <a16:creationId xmlns:a16="http://schemas.microsoft.com/office/drawing/2014/main" id="{FE6A6FEF-1D3F-46D2-AE94-BB3B8676D039}"/>
+              </a:ext>
+            </a:extLst>
+          </p:cNvPr>
+          <p:cNvSpPr>
+            <a:spLocks xmlns:a="http://schemas.openxmlformats.org/drawingml/2006/main" noGrp="1"/>
+          </p:cNvSpPr>
+          <p:nvPr/>
+        </p:nvSpPr>
+        <p:spPr>
+          <a:xfrm xmlns:a="http://schemas.openxmlformats.org/drawingml/2006/main">
+            <a:off x="11858625" y="4695825"/>
+            <a:ext cx="1000125" cy="266700"/>
+          </a:xfrm>
+          <a:prstGeom xmlns:a="http://schemas.openxmlformats.org/drawingml/2006/main" prst="rect">
+            <a:avLst/>
+          </a:prstGeom>
+          <a:noFill xmlns:a="http://schemas.openxmlformats.org/drawingml/2006/main"/>
+          <a:ln xmlns:a="http://schemas.openxmlformats.org/drawingml/2006/main" w="0">
+            <a:noFill/>
+            <a:prstDash val="solid"/>
+          </a:ln>
+        </p:spPr>
+        <p:txBody>
+          <a:bodyPr xmlns:a="http://schemas.openxmlformats.org/drawingml/2006/main" wrap="none" lIns="0" tIns="0" rIns="0" bIns="0" anchor="ctr">
+            <a:noAutofit/>
+          </a:bodyPr>
+          <a:lstStyle xmlns:a="http://schemas.openxmlformats.org/drawingml/2006/main"/>
+          <a:p xmlns:a="http://schemas.openxmlformats.org/drawingml/2006/main">
+            <a:pPr algn="ctr">
+              <a:defRPr sz="1800" b="0">
+                <a:solidFill>
+                  <a:srgbClr val="141414"/>
+                </a:solidFill>
+                <a:latin typeface="Apple SD Gothic Neo"/>
+                <a:ea typeface="Apple SD Gothic Neo"/>
+                <a:cs typeface="Apple SD Gothic Neo"/>
+              </a:defRPr>
+            </a:pPr>
+            <a:r>
+              <a:rPr sz="1800" b="0">
+                <a:solidFill>
+                  <a:srgbClr val="141414"/>
+                </a:solidFill>
+                <a:latin typeface="Apple SD Gothic Neo"/>
+                <a:ea typeface="Apple SD Gothic Neo"/>
+                <a:cs typeface="Apple SD Gothic Neo"/>
+              </a:rPr>
+              <a:t>04-45</a:t>
+            </a:r>
+          </a:p>
+        </p:txBody>
+      </p:sp>
+      <p:sp>
+        <p:nvSpPr>
+          <p:cNvPr id="110" name="overview-dp42-durable-ownership">
+            <a:extLst xmlns:a="http://schemas.openxmlformats.org/drawingml/2006/main">
+              <a:ext uri="{FF2B5EF4-FFF2-40B4-BE49-F238E27FC236}">
+                <a16:creationId xmlns:a16="http://schemas.microsoft.com/office/drawing/2014/main" id="{EB38A937-9B8F-4BF3-A45F-5F2F52FB96EB}"/>
+              </a:ext>
+            </a:extLst>
+          </p:cNvPr>
+          <p:cNvSpPr>
+            <a:spLocks xmlns:a="http://schemas.openxmlformats.org/drawingml/2006/main" noGrp="1"/>
+          </p:cNvSpPr>
+          <p:nvPr/>
+        </p:nvSpPr>
+        <p:spPr>
+          <a:xfrm xmlns:a="http://schemas.openxmlformats.org/drawingml/2006/main">
+            <a:off x="8791575" y="7639050"/>
+            <a:ext cx="4333875" cy="695325"/>
           </a:xfrm>
           <a:prstGeom xmlns:a="http://schemas.openxmlformats.org/drawingml/2006/main" prst="rect">
             <a:avLst/>
@@ -5572,21 +6314,52 @@
       </p:sp>
       <p:sp>
         <p:nvSpPr>
-          <p:cNvPr id="96" name="overview-tag-42-work">
-            <a:extLst xmlns:a="http://schemas.openxmlformats.org/drawingml/2006/main">
-              <a:ext uri="{FF2B5EF4-FFF2-40B4-BE49-F238E27FC236}">
-                <a16:creationId xmlns:a16="http://schemas.microsoft.com/office/drawing/2014/main" id="{413753B7-3AD3-40CF-B266-2FE2BCF94C36}"/>
-              </a:ext>
-            </a:extLst>
-          </p:cNvPr>
-          <p:cNvSpPr>
-            <a:spLocks xmlns:a="http://schemas.openxmlformats.org/drawingml/2006/main" noGrp="1"/>
-          </p:cNvSpPr>
-          <p:nvPr/>
-        </p:nvSpPr>
-        <p:spPr>
-          <a:xfrm xmlns:a="http://schemas.openxmlformats.org/drawingml/2006/main">
-            <a:off x="16344900" y="6486525"/>
+          <p:cNvPr id="111" name="overview-dp45-memory-storage">
+            <a:extLst xmlns:a="http://schemas.openxmlformats.org/drawingml/2006/main">
+              <a:ext uri="{FF2B5EF4-FFF2-40B4-BE49-F238E27FC236}">
+                <a16:creationId xmlns:a16="http://schemas.microsoft.com/office/drawing/2014/main" id="{C8BEE31E-2EA9-4135-A30C-9E49EF83C500}"/>
+              </a:ext>
+            </a:extLst>
+          </p:cNvPr>
+          <p:cNvSpPr>
+            <a:spLocks xmlns:a="http://schemas.openxmlformats.org/drawingml/2006/main" noGrp="1"/>
+          </p:cNvSpPr>
+          <p:nvPr/>
+        </p:nvSpPr>
+        <p:spPr>
+          <a:xfrm xmlns:a="http://schemas.openxmlformats.org/drawingml/2006/main">
+            <a:off x="8858250" y="7705725"/>
+            <a:ext cx="4200525" cy="561975"/>
+          </a:xfrm>
+          <a:prstGeom xmlns:a="http://schemas.openxmlformats.org/drawingml/2006/main" prst="rect">
+            <a:avLst/>
+          </a:prstGeom>
+          <a:noFill xmlns:a="http://schemas.openxmlformats.org/drawingml/2006/main"/>
+          <a:ln xmlns:a="http://schemas.openxmlformats.org/drawingml/2006/main" w="38100">
+            <a:solidFill>
+              <a:srgbClr val="8D49B8"/>
+            </a:solidFill>
+            <a:prstDash val="dash"/>
+          </a:ln>
+        </p:spPr>
+      </p:sp>
+      <p:sp>
+        <p:nvSpPr>
+          <p:cNvPr id="112" name="overview-tag-42-store">
+            <a:extLst xmlns:a="http://schemas.openxmlformats.org/drawingml/2006/main">
+              <a:ext uri="{FF2B5EF4-FFF2-40B4-BE49-F238E27FC236}">
+                <a16:creationId xmlns:a16="http://schemas.microsoft.com/office/drawing/2014/main" id="{229759EA-FD8E-4444-B482-C3ABDA93ECAC}"/>
+              </a:ext>
+            </a:extLst>
+          </p:cNvPr>
+          <p:cNvSpPr>
+            <a:spLocks xmlns:a="http://schemas.openxmlformats.org/drawingml/2006/main" noGrp="1"/>
+          </p:cNvSpPr>
+          <p:nvPr/>
+        </p:nvSpPr>
+        <p:spPr>
+          <a:xfrm xmlns:a="http://schemas.openxmlformats.org/drawingml/2006/main">
+            <a:off x="10982325" y="7143750"/>
             <a:ext cx="1000125" cy="342900"/>
           </a:xfrm>
           <a:prstGeom xmlns:a="http://schemas.openxmlformats.org/drawingml/2006/main" prst="rect">
@@ -5605,21 +6378,21 @@
       </p:sp>
       <p:sp>
         <p:nvSpPr>
-          <p:cNvPr id="97" name="overview-tag-text-42-work">
-            <a:extLst xmlns:a="http://schemas.openxmlformats.org/drawingml/2006/main">
-              <a:ext uri="{FF2B5EF4-FFF2-40B4-BE49-F238E27FC236}">
-                <a16:creationId xmlns:a16="http://schemas.microsoft.com/office/drawing/2014/main" id="{A98DFBAB-2A75-43BE-A47E-2DD177687C77}"/>
-              </a:ext>
-            </a:extLst>
-          </p:cNvPr>
-          <p:cNvSpPr>
-            <a:spLocks xmlns:a="http://schemas.openxmlformats.org/drawingml/2006/main" noGrp="1"/>
-          </p:cNvSpPr>
-          <p:nvPr/>
-        </p:nvSpPr>
-        <p:spPr>
-          <a:xfrm xmlns:a="http://schemas.openxmlformats.org/drawingml/2006/main">
-            <a:off x="16344900" y="6486525"/>
+          <p:cNvPr id="113" name="overview-tag-text-42-store">
+            <a:extLst xmlns:a="http://schemas.openxmlformats.org/drawingml/2006/main">
+              <a:ext uri="{FF2B5EF4-FFF2-40B4-BE49-F238E27FC236}">
+                <a16:creationId xmlns:a16="http://schemas.microsoft.com/office/drawing/2014/main" id="{9D3B8A08-800B-49A4-A55F-463675ECEFB6}"/>
+              </a:ext>
+            </a:extLst>
+          </p:cNvPr>
+          <p:cNvSpPr>
+            <a:spLocks xmlns:a="http://schemas.openxmlformats.org/drawingml/2006/main" noGrp="1"/>
+          </p:cNvSpPr>
+          <p:nvPr/>
+        </p:nvSpPr>
+        <p:spPr>
+          <a:xfrm xmlns:a="http://schemas.openxmlformats.org/drawingml/2006/main">
+            <a:off x="10982325" y="7143750"/>
             <a:ext cx="1000125" cy="342900"/>
           </a:xfrm>
           <a:prstGeom xmlns:a="http://schemas.openxmlformats.org/drawingml/2006/main" prst="rect">
@@ -5663,53 +6436,22 @@
       </p:sp>
       <p:sp>
         <p:nvSpPr>
-          <p:cNvPr id="98" name="overview-dp45-context-production">
-            <a:extLst xmlns:a="http://schemas.openxmlformats.org/drawingml/2006/main">
-              <a:ext uri="{FF2B5EF4-FFF2-40B4-BE49-F238E27FC236}">
-                <a16:creationId xmlns:a16="http://schemas.microsoft.com/office/drawing/2014/main" id="{FDF8B8FC-514E-41FF-9E4D-B346B6E9C9B2}"/>
-              </a:ext>
-            </a:extLst>
-          </p:cNvPr>
-          <p:cNvSpPr>
-            <a:spLocks xmlns:a="http://schemas.openxmlformats.org/drawingml/2006/main" noGrp="1"/>
-          </p:cNvSpPr>
-          <p:nvPr/>
-        </p:nvSpPr>
-        <p:spPr>
-          <a:xfrm xmlns:a="http://schemas.openxmlformats.org/drawingml/2006/main">
-            <a:off x="8791575" y="4886325"/>
-            <a:ext cx="4333875" cy="676275"/>
-          </a:xfrm>
-          <a:prstGeom xmlns:a="http://schemas.openxmlformats.org/drawingml/2006/main" prst="rect">
-            <a:avLst/>
-          </a:prstGeom>
-          <a:noFill xmlns:a="http://schemas.openxmlformats.org/drawingml/2006/main"/>
-          <a:ln xmlns:a="http://schemas.openxmlformats.org/drawingml/2006/main" w="38100">
-            <a:solidFill>
-              <a:srgbClr val="8D49B8"/>
-            </a:solidFill>
-            <a:prstDash val="dash"/>
-          </a:ln>
-        </p:spPr>
-      </p:sp>
-      <p:sp>
-        <p:nvSpPr>
-          <p:cNvPr id="99" name="overview-tag-45-context">
-            <a:extLst xmlns:a="http://schemas.openxmlformats.org/drawingml/2006/main">
-              <a:ext uri="{FF2B5EF4-FFF2-40B4-BE49-F238E27FC236}">
-                <a16:creationId xmlns:a16="http://schemas.microsoft.com/office/drawing/2014/main" id="{E855FC02-3B50-478A-8230-C5E4AC5C0A82}"/>
-              </a:ext>
-            </a:extLst>
-          </p:cNvPr>
-          <p:cNvSpPr>
-            <a:spLocks xmlns:a="http://schemas.openxmlformats.org/drawingml/2006/main" noGrp="1"/>
-          </p:cNvSpPr>
-          <p:nvPr/>
-        </p:nvSpPr>
-        <p:spPr>
-          <a:xfrm xmlns:a="http://schemas.openxmlformats.org/drawingml/2006/main">
-            <a:off x="11858625" y="4695825"/>
-            <a:ext cx="1000125" cy="266700"/>
+          <p:cNvPr id="114" name="overview-tag-45-store">
+            <a:extLst xmlns:a="http://schemas.openxmlformats.org/drawingml/2006/main">
+              <a:ext uri="{FF2B5EF4-FFF2-40B4-BE49-F238E27FC236}">
+                <a16:creationId xmlns:a16="http://schemas.microsoft.com/office/drawing/2014/main" id="{1DF3F2AF-9CA8-42F8-9781-6D41D9E4C84E}"/>
+              </a:ext>
+            </a:extLst>
+          </p:cNvPr>
+          <p:cNvSpPr>
+            <a:spLocks xmlns:a="http://schemas.openxmlformats.org/drawingml/2006/main" noGrp="1"/>
+          </p:cNvSpPr>
+          <p:nvPr/>
+        </p:nvSpPr>
+        <p:spPr>
+          <a:xfrm xmlns:a="http://schemas.openxmlformats.org/drawingml/2006/main">
+            <a:off x="12125325" y="7143750"/>
+            <a:ext cx="1000125" cy="342900"/>
           </a:xfrm>
           <a:prstGeom xmlns:a="http://schemas.openxmlformats.org/drawingml/2006/main" prst="rect">
             <a:avLst/>
@@ -5727,22 +6469,22 @@
       </p:sp>
       <p:sp>
         <p:nvSpPr>
-          <p:cNvPr id="100" name="overview-tag-text-45-context">
-            <a:extLst xmlns:a="http://schemas.openxmlformats.org/drawingml/2006/main">
-              <a:ext uri="{FF2B5EF4-FFF2-40B4-BE49-F238E27FC236}">
-                <a16:creationId xmlns:a16="http://schemas.microsoft.com/office/drawing/2014/main" id="{43A1AB8E-E991-4E18-A7F5-BA4D53201457}"/>
-              </a:ext>
-            </a:extLst>
-          </p:cNvPr>
-          <p:cNvSpPr>
-            <a:spLocks xmlns:a="http://schemas.openxmlformats.org/drawingml/2006/main" noGrp="1"/>
-          </p:cNvSpPr>
-          <p:nvPr/>
-        </p:nvSpPr>
-        <p:spPr>
-          <a:xfrm xmlns:a="http://schemas.openxmlformats.org/drawingml/2006/main">
-            <a:off x="11858625" y="4695825"/>
-            <a:ext cx="1000125" cy="266700"/>
+          <p:cNvPr id="115" name="overview-tag-text-45-store">
+            <a:extLst xmlns:a="http://schemas.openxmlformats.org/drawingml/2006/main">
+              <a:ext uri="{FF2B5EF4-FFF2-40B4-BE49-F238E27FC236}">
+                <a16:creationId xmlns:a16="http://schemas.microsoft.com/office/drawing/2014/main" id="{5A08A67E-36A0-4845-A203-49CD315BF00A}"/>
+              </a:ext>
+            </a:extLst>
+          </p:cNvPr>
+          <p:cNvSpPr>
+            <a:spLocks xmlns:a="http://schemas.openxmlformats.org/drawingml/2006/main" noGrp="1"/>
+          </p:cNvSpPr>
+          <p:nvPr/>
+        </p:nvSpPr>
+        <p:spPr>
+          <a:xfrm xmlns:a="http://schemas.openxmlformats.org/drawingml/2006/main">
+            <a:off x="12125325" y="7143750"/>
+            <a:ext cx="1000125" cy="342900"/>
           </a:xfrm>
           <a:prstGeom xmlns:a="http://schemas.openxmlformats.org/drawingml/2006/main" prst="rect">
             <a:avLst/>
@@ -5760,7 +6502,7 @@
           <a:lstStyle xmlns:a="http://schemas.openxmlformats.org/drawingml/2006/main"/>
           <a:p xmlns:a="http://schemas.openxmlformats.org/drawingml/2006/main">
             <a:pPr algn="ctr">
-              <a:defRPr sz="1800" b="0">
+              <a:defRPr sz="2100" b="0">
                 <a:solidFill>
                   <a:srgbClr val="141414"/>
                 </a:solidFill>
@@ -5770,7 +6512,7 @@
               </a:defRPr>
             </a:pPr>
             <a:r>
-              <a:rPr sz="1800" b="0">
+              <a:rPr sz="2100" b="0">
                 <a:solidFill>
                   <a:srgbClr val="141414"/>
                 </a:solidFill>
@@ -5785,254 +6527,10 @@
       </p:sp>
       <p:sp>
         <p:nvSpPr>
-          <p:cNvPr id="101" name="overview-dp42-durable-ownership">
-            <a:extLst xmlns:a="http://schemas.openxmlformats.org/drawingml/2006/main">
-              <a:ext uri="{FF2B5EF4-FFF2-40B4-BE49-F238E27FC236}">
-                <a16:creationId xmlns:a16="http://schemas.microsoft.com/office/drawing/2014/main" id="{B5313D77-86A5-4606-BF02-6DCE3DEA607E}"/>
-              </a:ext>
-            </a:extLst>
-          </p:cNvPr>
-          <p:cNvSpPr>
-            <a:spLocks xmlns:a="http://schemas.openxmlformats.org/drawingml/2006/main" noGrp="1"/>
-          </p:cNvSpPr>
-          <p:nvPr/>
-        </p:nvSpPr>
-        <p:spPr>
-          <a:xfrm xmlns:a="http://schemas.openxmlformats.org/drawingml/2006/main">
-            <a:off x="8791575" y="7639050"/>
-            <a:ext cx="4333875" cy="695325"/>
-          </a:xfrm>
-          <a:prstGeom xmlns:a="http://schemas.openxmlformats.org/drawingml/2006/main" prst="rect">
-            <a:avLst/>
-          </a:prstGeom>
-          <a:noFill xmlns:a="http://schemas.openxmlformats.org/drawingml/2006/main"/>
-          <a:ln xmlns:a="http://schemas.openxmlformats.org/drawingml/2006/main" w="38100">
-            <a:solidFill>
-              <a:srgbClr val="2463DD"/>
-            </a:solidFill>
-            <a:prstDash val="dash"/>
-          </a:ln>
-        </p:spPr>
-      </p:sp>
-      <p:sp>
-        <p:nvSpPr>
-          <p:cNvPr id="102" name="overview-dp45-memory-storage">
-            <a:extLst xmlns:a="http://schemas.openxmlformats.org/drawingml/2006/main">
-              <a:ext uri="{FF2B5EF4-FFF2-40B4-BE49-F238E27FC236}">
-                <a16:creationId xmlns:a16="http://schemas.microsoft.com/office/drawing/2014/main" id="{F663AED7-4086-4A33-B5AF-6E0CCDA26434}"/>
-              </a:ext>
-            </a:extLst>
-          </p:cNvPr>
-          <p:cNvSpPr>
-            <a:spLocks xmlns:a="http://schemas.openxmlformats.org/drawingml/2006/main" noGrp="1"/>
-          </p:cNvSpPr>
-          <p:nvPr/>
-        </p:nvSpPr>
-        <p:spPr>
-          <a:xfrm xmlns:a="http://schemas.openxmlformats.org/drawingml/2006/main">
-            <a:off x="8858250" y="7705725"/>
-            <a:ext cx="4200525" cy="561975"/>
-          </a:xfrm>
-          <a:prstGeom xmlns:a="http://schemas.openxmlformats.org/drawingml/2006/main" prst="rect">
-            <a:avLst/>
-          </a:prstGeom>
-          <a:noFill xmlns:a="http://schemas.openxmlformats.org/drawingml/2006/main"/>
-          <a:ln xmlns:a="http://schemas.openxmlformats.org/drawingml/2006/main" w="38100">
-            <a:solidFill>
-              <a:srgbClr val="8D49B8"/>
-            </a:solidFill>
-            <a:prstDash val="dash"/>
-          </a:ln>
-        </p:spPr>
-      </p:sp>
-      <p:sp>
-        <p:nvSpPr>
-          <p:cNvPr id="103" name="overview-tag-42-store">
-            <a:extLst xmlns:a="http://schemas.openxmlformats.org/drawingml/2006/main">
-              <a:ext uri="{FF2B5EF4-FFF2-40B4-BE49-F238E27FC236}">
-                <a16:creationId xmlns:a16="http://schemas.microsoft.com/office/drawing/2014/main" id="{6275D8A5-2170-4FD7-88EC-8FCAB4D6E2E4}"/>
-              </a:ext>
-            </a:extLst>
-          </p:cNvPr>
-          <p:cNvSpPr>
-            <a:spLocks xmlns:a="http://schemas.openxmlformats.org/drawingml/2006/main" noGrp="1"/>
-          </p:cNvSpPr>
-          <p:nvPr/>
-        </p:nvSpPr>
-        <p:spPr>
-          <a:xfrm xmlns:a="http://schemas.openxmlformats.org/drawingml/2006/main">
-            <a:off x="10982325" y="7143750"/>
-            <a:ext cx="1000125" cy="342900"/>
-          </a:xfrm>
-          <a:prstGeom xmlns:a="http://schemas.openxmlformats.org/drawingml/2006/main" prst="rect">
-            <a:avLst/>
-          </a:prstGeom>
-          <a:solidFill xmlns:a="http://schemas.openxmlformats.org/drawingml/2006/main">
-            <a:srgbClr val="E4EDFF"/>
-          </a:solidFill>
-          <a:ln xmlns:a="http://schemas.openxmlformats.org/drawingml/2006/main" w="28575">
-            <a:solidFill>
-              <a:srgbClr val="2463DD"/>
-            </a:solidFill>
-            <a:prstDash val="solid"/>
-          </a:ln>
-        </p:spPr>
-      </p:sp>
-      <p:sp>
-        <p:nvSpPr>
-          <p:cNvPr id="104" name="overview-tag-text-42-store">
-            <a:extLst xmlns:a="http://schemas.openxmlformats.org/drawingml/2006/main">
-              <a:ext uri="{FF2B5EF4-FFF2-40B4-BE49-F238E27FC236}">
-                <a16:creationId xmlns:a16="http://schemas.microsoft.com/office/drawing/2014/main" id="{7C4CEBBE-DB41-4B3A-B1CD-EA47CCFEF810}"/>
-              </a:ext>
-            </a:extLst>
-          </p:cNvPr>
-          <p:cNvSpPr>
-            <a:spLocks xmlns:a="http://schemas.openxmlformats.org/drawingml/2006/main" noGrp="1"/>
-          </p:cNvSpPr>
-          <p:nvPr/>
-        </p:nvSpPr>
-        <p:spPr>
-          <a:xfrm xmlns:a="http://schemas.openxmlformats.org/drawingml/2006/main">
-            <a:off x="10982325" y="7143750"/>
-            <a:ext cx="1000125" cy="342900"/>
-          </a:xfrm>
-          <a:prstGeom xmlns:a="http://schemas.openxmlformats.org/drawingml/2006/main" prst="rect">
-            <a:avLst/>
-          </a:prstGeom>
-          <a:noFill xmlns:a="http://schemas.openxmlformats.org/drawingml/2006/main"/>
-          <a:ln xmlns:a="http://schemas.openxmlformats.org/drawingml/2006/main" w="0">
-            <a:noFill/>
-            <a:prstDash val="solid"/>
-          </a:ln>
-        </p:spPr>
-        <p:txBody>
-          <a:bodyPr xmlns:a="http://schemas.openxmlformats.org/drawingml/2006/main" wrap="none" lIns="0" tIns="0" rIns="0" bIns="0" anchor="ctr">
-            <a:noAutofit/>
-          </a:bodyPr>
-          <a:lstStyle xmlns:a="http://schemas.openxmlformats.org/drawingml/2006/main"/>
-          <a:p xmlns:a="http://schemas.openxmlformats.org/drawingml/2006/main">
-            <a:pPr algn="ctr">
-              <a:defRPr sz="2100" b="0">
-                <a:solidFill>
-                  <a:srgbClr val="141414"/>
-                </a:solidFill>
-                <a:latin typeface="Apple SD Gothic Neo"/>
-                <a:ea typeface="Apple SD Gothic Neo"/>
-                <a:cs typeface="Apple SD Gothic Neo"/>
-              </a:defRPr>
-            </a:pPr>
-            <a:r>
-              <a:rPr sz="2100" b="0">
-                <a:solidFill>
-                  <a:srgbClr val="141414"/>
-                </a:solidFill>
-                <a:latin typeface="Apple SD Gothic Neo"/>
-                <a:ea typeface="Apple SD Gothic Neo"/>
-                <a:cs typeface="Apple SD Gothic Neo"/>
-              </a:rPr>
-              <a:t>04-42</a:t>
-            </a:r>
-          </a:p>
-        </p:txBody>
-      </p:sp>
-      <p:sp>
-        <p:nvSpPr>
-          <p:cNvPr id="105" name="overview-tag-45-store">
-            <a:extLst xmlns:a="http://schemas.openxmlformats.org/drawingml/2006/main">
-              <a:ext uri="{FF2B5EF4-FFF2-40B4-BE49-F238E27FC236}">
-                <a16:creationId xmlns:a16="http://schemas.microsoft.com/office/drawing/2014/main" id="{32935D09-E61A-4022-8CE3-1E5E00477960}"/>
-              </a:ext>
-            </a:extLst>
-          </p:cNvPr>
-          <p:cNvSpPr>
-            <a:spLocks xmlns:a="http://schemas.openxmlformats.org/drawingml/2006/main" noGrp="1"/>
-          </p:cNvSpPr>
-          <p:nvPr/>
-        </p:nvSpPr>
-        <p:spPr>
-          <a:xfrm xmlns:a="http://schemas.openxmlformats.org/drawingml/2006/main">
-            <a:off x="12125325" y="7143750"/>
-            <a:ext cx="1000125" cy="342900"/>
-          </a:xfrm>
-          <a:prstGeom xmlns:a="http://schemas.openxmlformats.org/drawingml/2006/main" prst="rect">
-            <a:avLst/>
-          </a:prstGeom>
-          <a:solidFill xmlns:a="http://schemas.openxmlformats.org/drawingml/2006/main">
-            <a:srgbClr val="F1E5FA"/>
-          </a:solidFill>
-          <a:ln xmlns:a="http://schemas.openxmlformats.org/drawingml/2006/main" w="28575">
-            <a:solidFill>
-              <a:srgbClr val="8D49B8"/>
-            </a:solidFill>
-            <a:prstDash val="solid"/>
-          </a:ln>
-        </p:spPr>
-      </p:sp>
-      <p:sp>
-        <p:nvSpPr>
-          <p:cNvPr id="106" name="overview-tag-text-45-store">
-            <a:extLst xmlns:a="http://schemas.openxmlformats.org/drawingml/2006/main">
-              <a:ext uri="{FF2B5EF4-FFF2-40B4-BE49-F238E27FC236}">
-                <a16:creationId xmlns:a16="http://schemas.microsoft.com/office/drawing/2014/main" id="{86110F27-A961-4B2F-A54E-B73064DCF0E7}"/>
-              </a:ext>
-            </a:extLst>
-          </p:cNvPr>
-          <p:cNvSpPr>
-            <a:spLocks xmlns:a="http://schemas.openxmlformats.org/drawingml/2006/main" noGrp="1"/>
-          </p:cNvSpPr>
-          <p:nvPr/>
-        </p:nvSpPr>
-        <p:spPr>
-          <a:xfrm xmlns:a="http://schemas.openxmlformats.org/drawingml/2006/main">
-            <a:off x="12125325" y="7143750"/>
-            <a:ext cx="1000125" cy="342900"/>
-          </a:xfrm>
-          <a:prstGeom xmlns:a="http://schemas.openxmlformats.org/drawingml/2006/main" prst="rect">
-            <a:avLst/>
-          </a:prstGeom>
-          <a:noFill xmlns:a="http://schemas.openxmlformats.org/drawingml/2006/main"/>
-          <a:ln xmlns:a="http://schemas.openxmlformats.org/drawingml/2006/main" w="0">
-            <a:noFill/>
-            <a:prstDash val="solid"/>
-          </a:ln>
-        </p:spPr>
-        <p:txBody>
-          <a:bodyPr xmlns:a="http://schemas.openxmlformats.org/drawingml/2006/main" wrap="none" lIns="0" tIns="0" rIns="0" bIns="0" anchor="ctr">
-            <a:noAutofit/>
-          </a:bodyPr>
-          <a:lstStyle xmlns:a="http://schemas.openxmlformats.org/drawingml/2006/main"/>
-          <a:p xmlns:a="http://schemas.openxmlformats.org/drawingml/2006/main">
-            <a:pPr algn="ctr">
-              <a:defRPr sz="2100" b="0">
-                <a:solidFill>
-                  <a:srgbClr val="141414"/>
-                </a:solidFill>
-                <a:latin typeface="Apple SD Gothic Neo"/>
-                <a:ea typeface="Apple SD Gothic Neo"/>
-                <a:cs typeface="Apple SD Gothic Neo"/>
-              </a:defRPr>
-            </a:pPr>
-            <a:r>
-              <a:rPr sz="2100" b="0">
-                <a:solidFill>
-                  <a:srgbClr val="141414"/>
-                </a:solidFill>
-                <a:latin typeface="Apple SD Gothic Neo"/>
-                <a:ea typeface="Apple SD Gothic Neo"/>
-                <a:cs typeface="Apple SD Gothic Neo"/>
-              </a:rPr>
-              <a:t>04-45</a:t>
-            </a:r>
-          </a:p>
-        </p:txBody>
-      </p:sp>
-      <p:sp>
-        <p:nvSpPr>
-          <p:cNvPr id="107" name="overview-dp42-store-tag-link">
-            <a:extLst xmlns:a="http://schemas.openxmlformats.org/drawingml/2006/main">
-              <a:ext uri="{FF2B5EF4-FFF2-40B4-BE49-F238E27FC236}">
-                <a16:creationId xmlns:a16="http://schemas.microsoft.com/office/drawing/2014/main" id="{AC32B1BC-C562-4380-A6FB-442F80E2122B}"/>
+          <p:cNvPr id="116" name="overview-dp42-store-tag-link">
+            <a:extLst xmlns:a="http://schemas.openxmlformats.org/drawingml/2006/main">
+              <a:ext uri="{FF2B5EF4-FFF2-40B4-BE49-F238E27FC236}">
+                <a16:creationId xmlns:a16="http://schemas.microsoft.com/office/drawing/2014/main" id="{C7DE68C1-9ACF-4859-A3EC-276F5124E0A6}"/>
               </a:ext>
             </a:extLst>
           </p:cNvPr>
@@ -6069,10 +6567,10 @@
       </p:sp>
       <p:sp>
         <p:nvSpPr>
-          <p:cNvPr id="108" name="overview-dp45-store-tag-link">
-            <a:extLst xmlns:a="http://schemas.openxmlformats.org/drawingml/2006/main">
-              <a:ext uri="{FF2B5EF4-FFF2-40B4-BE49-F238E27FC236}">
-                <a16:creationId xmlns:a16="http://schemas.microsoft.com/office/drawing/2014/main" id="{399B1D5D-3B2B-4B7E-AC58-73835C631E4E}"/>
+          <p:cNvPr id="117" name="overview-dp45-store-tag-link">
+            <a:extLst xmlns:a="http://schemas.openxmlformats.org/drawingml/2006/main">
+              <a:ext uri="{FF2B5EF4-FFF2-40B4-BE49-F238E27FC236}">
+                <a16:creationId xmlns:a16="http://schemas.microsoft.com/office/drawing/2014/main" id="{1E0CC9FB-0922-433B-8916-5B48D92EEF86}"/>
               </a:ext>
             </a:extLst>
           </p:cNvPr>
@@ -6109,10 +6607,10 @@
       </p:sp>
       <p:sp>
         <p:nvSpPr>
-          <p:cNvPr id="109" name="overview-legend">
-            <a:extLst xmlns:a="http://schemas.openxmlformats.org/drawingml/2006/main">
-              <a:ext uri="{FF2B5EF4-FFF2-40B4-BE49-F238E27FC236}">
-                <a16:creationId xmlns:a16="http://schemas.microsoft.com/office/drawing/2014/main" id="{3ECB32A4-1421-437F-9DEF-EC86870C4031}"/>
+          <p:cNvPr id="118" name="overview-legend">
+            <a:extLst xmlns:a="http://schemas.openxmlformats.org/drawingml/2006/main">
+              <a:ext uri="{FF2B5EF4-FFF2-40B4-BE49-F238E27FC236}">
+                <a16:creationId xmlns:a16="http://schemas.microsoft.com/office/drawing/2014/main" id="{13D46BAB-2A34-47FA-BA80-0897576421A2}"/>
               </a:ext>
             </a:extLst>
           </p:cNvPr>
@@ -6142,10 +6640,10 @@
       </p:sp>
       <p:sp>
         <p:nvSpPr>
-          <p:cNvPr id="110" name="overview-legend-title">
-            <a:extLst xmlns:a="http://schemas.openxmlformats.org/drawingml/2006/main">
-              <a:ext uri="{FF2B5EF4-FFF2-40B4-BE49-F238E27FC236}">
-                <a16:creationId xmlns:a16="http://schemas.microsoft.com/office/drawing/2014/main" id="{EC6EDF36-4276-4796-86E8-68B26596018B}"/>
+          <p:cNvPr id="119" name="overview-legend-title">
+            <a:extLst xmlns:a="http://schemas.openxmlformats.org/drawingml/2006/main">
+              <a:ext uri="{FF2B5EF4-FFF2-40B4-BE49-F238E27FC236}">
+                <a16:creationId xmlns:a16="http://schemas.microsoft.com/office/drawing/2014/main" id="{45C12E20-AD8E-41ED-94B3-B2AE51B9B7B9}"/>
               </a:ext>
             </a:extLst>
           </p:cNvPr>
@@ -6200,10 +6698,10 @@
       </p:sp>
       <p:sp>
         <p:nvSpPr>
-          <p:cNvPr id="111" name="overview-legend-module">
-            <a:extLst xmlns:a="http://schemas.openxmlformats.org/drawingml/2006/main">
-              <a:ext uri="{FF2B5EF4-FFF2-40B4-BE49-F238E27FC236}">
-                <a16:creationId xmlns:a16="http://schemas.microsoft.com/office/drawing/2014/main" id="{52DF1F6D-C1B4-4AED-ABBB-423EA19EF7B3}"/>
+          <p:cNvPr id="120" name="overview-legend-module">
+            <a:extLst xmlns:a="http://schemas.openxmlformats.org/drawingml/2006/main">
+              <a:ext uri="{FF2B5EF4-FFF2-40B4-BE49-F238E27FC236}">
+                <a16:creationId xmlns:a16="http://schemas.microsoft.com/office/drawing/2014/main" id="{C9ED8F48-4DF7-4532-B079-54EF52075876}"/>
               </a:ext>
             </a:extLst>
           </p:cNvPr>
@@ -6233,10 +6731,10 @@
       </p:sp>
       <p:sp>
         <p:nvSpPr>
-          <p:cNvPr id="112" name="overview-legend-module-text">
-            <a:extLst xmlns:a="http://schemas.openxmlformats.org/drawingml/2006/main">
-              <a:ext uri="{FF2B5EF4-FFF2-40B4-BE49-F238E27FC236}">
-                <a16:creationId xmlns:a16="http://schemas.microsoft.com/office/drawing/2014/main" id="{2BCD6DB4-6CD4-4013-9664-A4B81FFDDA22}"/>
+          <p:cNvPr id="121" name="overview-legend-module-text">
+            <a:extLst xmlns:a="http://schemas.openxmlformats.org/drawingml/2006/main">
+              <a:ext uri="{FF2B5EF4-FFF2-40B4-BE49-F238E27FC236}">
+                <a16:creationId xmlns:a16="http://schemas.microsoft.com/office/drawing/2014/main" id="{DE079278-585C-4E79-943A-523412311CDC}"/>
               </a:ext>
             </a:extLst>
           </p:cNvPr>
@@ -6291,10 +6789,10 @@
       </p:sp>
       <p:sp>
         <p:nvSpPr>
-          <p:cNvPr id="113" name="overview-legend-external">
-            <a:extLst xmlns:a="http://schemas.openxmlformats.org/drawingml/2006/main">
-              <a:ext uri="{FF2B5EF4-FFF2-40B4-BE49-F238E27FC236}">
-                <a16:creationId xmlns:a16="http://schemas.microsoft.com/office/drawing/2014/main" id="{A210D06A-7F5E-4A88-818A-BAAA62DCF632}"/>
+          <p:cNvPr id="122" name="overview-legend-external">
+            <a:extLst xmlns:a="http://schemas.openxmlformats.org/drawingml/2006/main">
+              <a:ext uri="{FF2B5EF4-FFF2-40B4-BE49-F238E27FC236}">
+                <a16:creationId xmlns:a16="http://schemas.microsoft.com/office/drawing/2014/main" id="{1DE87AB3-99BE-42D8-9DFE-7BEB74ED7F61}"/>
               </a:ext>
             </a:extLst>
           </p:cNvPr>
@@ -6324,10 +6822,10 @@
       </p:sp>
       <p:sp>
         <p:nvSpPr>
-          <p:cNvPr id="114" name="overview-legend-external-text">
-            <a:extLst xmlns:a="http://schemas.openxmlformats.org/drawingml/2006/main">
-              <a:ext uri="{FF2B5EF4-FFF2-40B4-BE49-F238E27FC236}">
-                <a16:creationId xmlns:a16="http://schemas.microsoft.com/office/drawing/2014/main" id="{20A82E72-AA12-455A-9561-BD17603A0EA3}"/>
+          <p:cNvPr id="123" name="overview-legend-external-text">
+            <a:extLst xmlns:a="http://schemas.openxmlformats.org/drawingml/2006/main">
+              <a:ext uri="{FF2B5EF4-FFF2-40B4-BE49-F238E27FC236}">
+                <a16:creationId xmlns:a16="http://schemas.microsoft.com/office/drawing/2014/main" id="{5A439BB7-A4F9-4D17-B310-817DE17EF3B9}"/>
               </a:ext>
             </a:extLst>
           </p:cNvPr>
@@ -6382,10 +6880,10 @@
       </p:sp>
       <p:sp>
         <p:nvSpPr>
-          <p:cNvPr id="115" name="overview-legend-store">
-            <a:extLst xmlns:a="http://schemas.openxmlformats.org/drawingml/2006/main">
-              <a:ext uri="{FF2B5EF4-FFF2-40B4-BE49-F238E27FC236}">
-                <a16:creationId xmlns:a16="http://schemas.microsoft.com/office/drawing/2014/main" id="{38A3D9D5-8358-47D4-ABA0-D226DE61222C}"/>
+          <p:cNvPr id="124" name="overview-legend-store">
+            <a:extLst xmlns:a="http://schemas.openxmlformats.org/drawingml/2006/main">
+              <a:ext uri="{FF2B5EF4-FFF2-40B4-BE49-F238E27FC236}">
+                <a16:creationId xmlns:a16="http://schemas.microsoft.com/office/drawing/2014/main" id="{0035B82A-BA50-41A5-AF88-3A8518F373E6}"/>
               </a:ext>
             </a:extLst>
           </p:cNvPr>
@@ -6415,10 +6913,10 @@
       </p:sp>
       <p:sp>
         <p:nvSpPr>
-          <p:cNvPr id="116" name="overview-legend-store-text">
-            <a:extLst xmlns:a="http://schemas.openxmlformats.org/drawingml/2006/main">
-              <a:ext uri="{FF2B5EF4-FFF2-40B4-BE49-F238E27FC236}">
-                <a16:creationId xmlns:a16="http://schemas.microsoft.com/office/drawing/2014/main" id="{34AD5AC5-F9F4-4BF3-8F6E-1B15A8971A05}"/>
+          <p:cNvPr id="125" name="overview-legend-store-text">
+            <a:extLst xmlns:a="http://schemas.openxmlformats.org/drawingml/2006/main">
+              <a:ext uri="{FF2B5EF4-FFF2-40B4-BE49-F238E27FC236}">
+                <a16:creationId xmlns:a16="http://schemas.microsoft.com/office/drawing/2014/main" id="{6D7E8E32-97F1-4035-AF97-84215950B93D}"/>
               </a:ext>
             </a:extLst>
           </p:cNvPr>
@@ -6473,10 +6971,10 @@
       </p:sp>
       <p:sp>
         <p:nvSpPr>
-          <p:cNvPr id="117" name="overview-legend-dp">
-            <a:extLst xmlns:a="http://schemas.openxmlformats.org/drawingml/2006/main">
-              <a:ext uri="{FF2B5EF4-FFF2-40B4-BE49-F238E27FC236}">
-                <a16:creationId xmlns:a16="http://schemas.microsoft.com/office/drawing/2014/main" id="{E9586B6F-DCD8-49ED-9F64-14382900124E}"/>
+          <p:cNvPr id="126" name="overview-legend-dp">
+            <a:extLst xmlns:a="http://schemas.openxmlformats.org/drawingml/2006/main">
+              <a:ext uri="{FF2B5EF4-FFF2-40B4-BE49-F238E27FC236}">
+                <a16:creationId xmlns:a16="http://schemas.microsoft.com/office/drawing/2014/main" id="{59742401-6355-4FBE-9BFA-06A3FC25A8A1}"/>
               </a:ext>
             </a:extLst>
           </p:cNvPr>
@@ -6504,10 +7002,10 @@
       </p:sp>
       <p:sp>
         <p:nvSpPr>
-          <p:cNvPr id="118" name="overview-legend-dp-text">
-            <a:extLst xmlns:a="http://schemas.openxmlformats.org/drawingml/2006/main">
-              <a:ext uri="{FF2B5EF4-FFF2-40B4-BE49-F238E27FC236}">
-                <a16:creationId xmlns:a16="http://schemas.microsoft.com/office/drawing/2014/main" id="{53663033-4CF2-4F39-A970-DEF6F266C079}"/>
+          <p:cNvPr id="127" name="overview-legend-dp-text">
+            <a:extLst xmlns:a="http://schemas.openxmlformats.org/drawingml/2006/main">
+              <a:ext uri="{FF2B5EF4-FFF2-40B4-BE49-F238E27FC236}">
+                <a16:creationId xmlns:a16="http://schemas.microsoft.com/office/drawing/2014/main" id="{2B4F234E-E757-4F46-8CDD-D7859ABBA813}"/>
               </a:ext>
             </a:extLst>
           </p:cNvPr>
@@ -6562,10 +7060,10 @@
       </p:sp>
       <p:sp>
         <p:nvSpPr>
-          <p:cNvPr id="119" name="overview-scope-footnote">
-            <a:extLst xmlns:a="http://schemas.openxmlformats.org/drawingml/2006/main">
-              <a:ext uri="{FF2B5EF4-FFF2-40B4-BE49-F238E27FC236}">
-                <a16:creationId xmlns:a16="http://schemas.microsoft.com/office/drawing/2014/main" id="{795AED64-758C-43F0-BBB4-081912166752}"/>
+          <p:cNvPr id="128" name="overview-scope-footnote">
+            <a:extLst xmlns:a="http://schemas.openxmlformats.org/drawingml/2006/main">
+              <a:ext uri="{FF2B5EF4-FFF2-40B4-BE49-F238E27FC236}">
+                <a16:creationId xmlns:a16="http://schemas.microsoft.com/office/drawing/2014/main" id="{E77E531B-F943-4860-BCCB-062254FAFF7F}"/>
               </a:ext>
             </a:extLst>
           </p:cNvPr>
@@ -6595,7 +7093,7 @@
           <a:lstStyle xmlns:a="http://schemas.openxmlformats.org/drawingml/2006/main"/>
           <a:p xmlns:a="http://schemas.openxmlformats.org/drawingml/2006/main">
             <a:pPr algn="l">
-              <a:defRPr sz="1650" b="0">
+              <a:defRPr sz="1575" b="0">
                 <a:solidFill>
                   <a:srgbClr val="59616B"/>
                 </a:solidFill>
@@ -6605,7 +7103,7 @@
               </a:defRPr>
             </a:pPr>
             <a:r>
-              <a:rPr sz="1650" b="0">
+              <a:rPr sz="1575" b="0">
                 <a:solidFill>
                   <a:srgbClr val="59616B"/>
                 </a:solidFill>
@@ -6613,7 +7111,7 @@
                 <a:ea typeface="Apple SD Gothic Neo"/>
                 <a:cs typeface="Apple SD Gothic Neo"/>
               </a:rPr>
-              <a:t>참조 구조 위의 주요 비교 위치. 같은 번호의 영역은 함께 검토하며 대안 채택을 뜻하지 않음</a:t>
+              <a:t>점선은 주요 비교 위치. 모든 DP를 6개 QA로 검토하며, 권위 상태와 VAD는 로컬, 음성과 의미 모델은 클라우드</a:t>
             </a:r>
           </a:p>
         </p:txBody>
@@ -6621,7 +7119,7 @@
     </p:spTree>
     <p:extLst>
       <p:ext uri="{BB962C8B-B14F-4D97-AF65-F5344CB8AC3E}">
-        <p14:creationId xmlns:p14="http://schemas.microsoft.com/office/powerpoint/2010/main" val="1112730487"/>
+        <p14:creationId xmlns:p14="http://schemas.microsoft.com/office/powerpoint/2010/main" val="95298337"/>
       </p:ext>
     </p:extLst>
   </p:cSld>
